--- a/Presentacion/TrainerOS_TFI_Fase1-2.pptx
+++ b/Presentacion/TrainerOS_TFI_Fase1-2.pptx
@@ -3111,7 +3111,7 @@
             <a:avLst/>
           </a:prstGeom>
           <a:solidFill>
-            <a:srgbClr val="0F172A"/>
+            <a:srgbClr val="1F4E79"/>
           </a:solidFill>
           <a:ln>
             <a:noFill/>
@@ -3142,20 +3142,125 @@
       </p:sp>
       <p:sp>
         <p:nvSpPr>
-          <p:cNvPr id="3" name="Rectangle 2"/>
+          <p:cNvPr id="3" name="TextBox 2"/>
+          <p:cNvSpPr txBox="1"/>
+          <p:nvPr/>
+        </p:nvSpPr>
+        <p:spPr>
+          <a:xfrm>
+            <a:off x="731520" y="2240280"/>
+            <a:ext cx="10725912" cy="914400"/>
+          </a:xfrm>
+          <a:prstGeom prst="rect">
+            <a:avLst/>
+          </a:prstGeom>
+          <a:noFill/>
+        </p:spPr>
+        <p:txBody>
+          <a:bodyPr wrap="square" anchor="t" lIns="0" rIns="0" tIns="0" bIns="0">
+            <a:spAutoFit/>
+          </a:bodyPr>
+          <a:lstStyle/>
+          <a:p>
+            <a:pPr algn="ctr"/>
+            <a:r>
+              <a:rPr sz="5600" b="1">
+                <a:solidFill>
+                  <a:srgbClr val="FFFFFF"/>
+                </a:solidFill>
+                <a:latin typeface="Segoe UI"/>
+              </a:rPr>
+              <a:t>TrainerOS</a:t>
+            </a:r>
+          </a:p>
+        </p:txBody>
+      </p:sp>
+      <p:sp>
+        <p:nvSpPr>
+          <p:cNvPr id="4" name="TextBox 3"/>
+          <p:cNvSpPr txBox="1"/>
+          <p:nvPr/>
+        </p:nvSpPr>
+        <p:spPr>
+          <a:xfrm>
+            <a:off x="731520" y="3310128"/>
+            <a:ext cx="10725912" cy="502920"/>
+          </a:xfrm>
+          <a:prstGeom prst="rect">
+            <a:avLst/>
+          </a:prstGeom>
+          <a:noFill/>
+        </p:spPr>
+        <p:txBody>
+          <a:bodyPr wrap="square" anchor="t" lIns="0" rIns="0" tIns="0" bIns="0">
+            <a:spAutoFit/>
+          </a:bodyPr>
+          <a:lstStyle/>
+          <a:p>
+            <a:pPr algn="ctr"/>
+            <a:r>
+              <a:rPr sz="2200" b="1">
+                <a:solidFill>
+                  <a:srgbClr val="E8741E"/>
+                </a:solidFill>
+                <a:latin typeface="Segoe UI"/>
+              </a:rPr>
+              <a:t>“Del Código a la Arquitectura: El Criterio del Desarrollador”</a:t>
+            </a:r>
+          </a:p>
+        </p:txBody>
+      </p:sp>
+      <p:sp>
+        <p:nvSpPr>
+          <p:cNvPr id="5" name="TextBox 4"/>
+          <p:cNvSpPr txBox="1"/>
+          <p:nvPr/>
+        </p:nvSpPr>
+        <p:spPr>
+          <a:xfrm>
+            <a:off x="731520" y="3913632"/>
+            <a:ext cx="10725912" cy="411480"/>
+          </a:xfrm>
+          <a:prstGeom prst="rect">
+            <a:avLst/>
+          </a:prstGeom>
+          <a:noFill/>
+        </p:spPr>
+        <p:txBody>
+          <a:bodyPr wrap="square" anchor="t" lIns="0" rIns="0" tIns="0" bIns="0">
+            <a:spAutoFit/>
+          </a:bodyPr>
+          <a:lstStyle/>
+          <a:p>
+            <a:pPr algn="ctr"/>
+            <a:r>
+              <a:rPr sz="1500" b="0">
+                <a:solidFill>
+                  <a:srgbClr val="D6E0EA"/>
+                </a:solidFill>
+                <a:latin typeface="Segoe UI"/>
+              </a:rPr>
+              <a:t>Plataforma SaaS de gestión para entrenadores personales</a:t>
+            </a:r>
+          </a:p>
+        </p:txBody>
+      </p:sp>
+      <p:sp>
+        <p:nvSpPr>
+          <p:cNvPr id="6" name="Rectangle 5"/>
           <p:cNvSpPr/>
           <p:nvPr/>
         </p:nvSpPr>
         <p:spPr>
           <a:xfrm>
-            <a:off x="0" y="0"/>
-            <a:ext cx="12191695" cy="164592"/>
+            <a:off x="0" y="4526280"/>
+            <a:ext cx="12191695" cy="41148"/>
           </a:xfrm>
           <a:prstGeom prst="rect">
             <a:avLst/>
           </a:prstGeom>
           <a:solidFill>
-            <a:srgbClr val="2563EB"/>
+            <a:srgbClr val="E8741E"/>
           </a:solidFill>
           <a:ln>
             <a:noFill/>
@@ -3186,58 +3291,14 @@
       </p:sp>
       <p:sp>
         <p:nvSpPr>
-          <p:cNvPr id="4" name="Rectangle 3"/>
-          <p:cNvSpPr/>
-          <p:nvPr/>
-        </p:nvSpPr>
-        <p:spPr>
-          <a:xfrm>
-            <a:off x="0" y="6693408"/>
-            <a:ext cx="12191695" cy="164592"/>
-          </a:xfrm>
-          <a:prstGeom prst="rect">
-            <a:avLst/>
-          </a:prstGeom>
-          <a:solidFill>
-            <a:srgbClr val="059669"/>
-          </a:solidFill>
-          <a:ln>
-            <a:noFill/>
-          </a:ln>
-          <a:effectLst/>
-        </p:spPr>
-        <p:style>
-          <a:lnRef idx="1">
-            <a:schemeClr val="accent1"/>
-          </a:lnRef>
-          <a:fillRef idx="3">
-            <a:schemeClr val="accent1"/>
-          </a:fillRef>
-          <a:effectRef idx="2">
-            <a:schemeClr val="accent1"/>
-          </a:effectRef>
-          <a:fontRef idx="minor">
-            <a:schemeClr val="lt1"/>
-          </a:fontRef>
-        </p:style>
-        <p:txBody>
-          <a:bodyPr rtlCol="0" anchor="ctr"/>
-          <a:lstStyle/>
-          <a:p>
-            <a:pPr algn="ctr"/>
-          </a:p>
-        </p:txBody>
-      </p:sp>
-      <p:sp>
-        <p:nvSpPr>
-          <p:cNvPr id="5" name="TextBox 4"/>
+          <p:cNvPr id="7" name="TextBox 6"/>
           <p:cNvSpPr txBox="1"/>
           <p:nvPr/>
         </p:nvSpPr>
         <p:spPr>
           <a:xfrm>
-            <a:off x="822960" y="1005840"/>
-            <a:ext cx="10515600" cy="457200"/>
+            <a:off x="731520" y="5074920"/>
+            <a:ext cx="10725912" cy="365760"/>
           </a:xfrm>
           <a:prstGeom prst="rect">
             <a:avLst/>
@@ -3250,29 +3311,29 @@
           </a:bodyPr>
           <a:lstStyle/>
           <a:p>
-            <a:pPr algn="l"/>
-            <a:r>
-              <a:rPr sz="1300" b="1">
-                <a:solidFill>
-                  <a:srgbClr val="BFDBFE"/>
-                </a:solidFill>
-                <a:latin typeface="Segoe UI"/>
-              </a:rPr>
-              <a:t>TRABAJO FINAL INTEGRADOR  ·  DESARROLLO DE APLICACIONES WEB</a:t>
-            </a:r>
-          </a:p>
-        </p:txBody>
-      </p:sp>
-      <p:sp>
-        <p:nvSpPr>
-          <p:cNvPr id="6" name="TextBox 5"/>
+            <a:pPr algn="ctr"/>
+            <a:r>
+              <a:rPr sz="1300" b="0">
+                <a:solidFill>
+                  <a:srgbClr val="AEBFCE"/>
+                </a:solidFill>
+                <a:latin typeface="Segoe UI"/>
+              </a:rPr>
+              <a:t>Fase 1: Monolito modular en 3 capas      →      Fase 2: Microservicios tradicionales y modernos (event-driven)</a:t>
+            </a:r>
+          </a:p>
+        </p:txBody>
+      </p:sp>
+      <p:sp>
+        <p:nvSpPr>
+          <p:cNvPr id="8" name="TextBox 7"/>
           <p:cNvSpPr txBox="1"/>
           <p:nvPr/>
         </p:nvSpPr>
         <p:spPr>
           <a:xfrm>
-            <a:off x="822960" y="1508760"/>
-            <a:ext cx="10515600" cy="1188720"/>
+            <a:off x="731520" y="5897880"/>
+            <a:ext cx="10725912" cy="548640"/>
           </a:xfrm>
           <a:prstGeom prst="rect">
             <a:avLst/>
@@ -3285,253 +3346,31 @@
           </a:bodyPr>
           <a:lstStyle/>
           <a:p>
-            <a:pPr algn="l"/>
-            <a:r>
-              <a:rPr sz="5800" b="1">
-                <a:solidFill>
-                  <a:srgbClr val="FFFFFF"/>
-                </a:solidFill>
-                <a:latin typeface="Segoe UI"/>
-              </a:rPr>
-              <a:t>TrainerOS</a:t>
-            </a:r>
-          </a:p>
-        </p:txBody>
-      </p:sp>
-      <p:sp>
-        <p:nvSpPr>
-          <p:cNvPr id="7" name="TextBox 6"/>
-          <p:cNvSpPr txBox="1"/>
-          <p:nvPr/>
-        </p:nvSpPr>
-        <p:spPr>
-          <a:xfrm>
-            <a:off x="822960" y="2651760"/>
-            <a:ext cx="10515600" cy="548640"/>
-          </a:xfrm>
-          <a:prstGeom prst="rect">
-            <a:avLst/>
-          </a:prstGeom>
-          <a:noFill/>
-        </p:spPr>
-        <p:txBody>
-          <a:bodyPr wrap="square" anchor="t" lIns="0" rIns="0" tIns="0" bIns="0">
-            <a:spAutoFit/>
-          </a:bodyPr>
-          <a:lstStyle/>
-          <a:p>
-            <a:pPr algn="l"/>
-            <a:r>
-              <a:rPr sz="2100" b="0">
-                <a:solidFill>
-                  <a:srgbClr val="BFDBFE"/>
-                </a:solidFill>
-                <a:latin typeface="Segoe UI"/>
-              </a:rPr>
-              <a:t>Plataforma SaaS de gestión para entrenadores personales</a:t>
-            </a:r>
-          </a:p>
-        </p:txBody>
-      </p:sp>
-      <p:sp>
-        <p:nvSpPr>
-          <p:cNvPr id="8" name="TextBox 7"/>
-          <p:cNvSpPr txBox="1"/>
-          <p:nvPr/>
-        </p:nvSpPr>
-        <p:spPr>
-          <a:xfrm>
-            <a:off x="822960" y="3310128"/>
-            <a:ext cx="10607040" cy="457200"/>
-          </a:xfrm>
-          <a:prstGeom prst="rect">
-            <a:avLst/>
-          </a:prstGeom>
-          <a:noFill/>
-        </p:spPr>
-        <p:txBody>
-          <a:bodyPr wrap="square" anchor="t" lIns="0" rIns="0" tIns="0" bIns="0">
-            <a:spAutoFit/>
-          </a:bodyPr>
-          <a:lstStyle/>
-          <a:p>
-            <a:pPr algn="l"/>
-            <a:r>
-              <a:rPr sz="1500" b="0">
-                <a:solidFill>
-                  <a:srgbClr val="94A3B8"/>
-                </a:solidFill>
-                <a:latin typeface="Segoe UI"/>
-              </a:rPr>
-              <a:t>“Del Código a la Arquitectura: El Criterio del Desarrollador”</a:t>
-            </a:r>
-          </a:p>
-        </p:txBody>
-      </p:sp>
-      <p:sp>
-        <p:nvSpPr>
-          <p:cNvPr id="9" name="Rounded Rectangle 8"/>
-          <p:cNvSpPr/>
-          <p:nvPr/>
-        </p:nvSpPr>
-        <p:spPr>
-          <a:xfrm>
-            <a:off x="822960" y="4114800"/>
-            <a:ext cx="10561320" cy="1051560"/>
-          </a:xfrm>
-          <a:prstGeom prst="roundRect">
-            <a:avLst>
-              <a:gd name="adj" fmla="val 6000"/>
-            </a:avLst>
-          </a:prstGeom>
-          <a:solidFill>
-            <a:srgbClr val="1E293B"/>
-          </a:solidFill>
-          <a:ln w="12700">
-            <a:solidFill>
-              <a:srgbClr val="334155"/>
-            </a:solidFill>
-          </a:ln>
-          <a:effectLst/>
-        </p:spPr>
-        <p:style>
-          <a:lnRef idx="1">
-            <a:schemeClr val="accent1"/>
-          </a:lnRef>
-          <a:fillRef idx="3">
-            <a:schemeClr val="accent1"/>
-          </a:fillRef>
-          <a:effectRef idx="2">
-            <a:schemeClr val="accent1"/>
-          </a:effectRef>
-          <a:fontRef idx="minor">
-            <a:schemeClr val="lt1"/>
-          </a:fontRef>
-        </p:style>
-        <p:txBody>
-          <a:bodyPr rtlCol="0" anchor="ctr"/>
-          <a:lstStyle/>
-          <a:p>
-            <a:pPr algn="ctr"/>
-          </a:p>
-        </p:txBody>
-      </p:sp>
-      <p:sp>
-        <p:nvSpPr>
-          <p:cNvPr id="10" name="TextBox 9"/>
-          <p:cNvSpPr txBox="1"/>
-          <p:nvPr/>
-        </p:nvSpPr>
-        <p:spPr>
-          <a:xfrm>
-            <a:off x="1097280" y="4279392"/>
-            <a:ext cx="10058400" cy="822960"/>
-          </a:xfrm>
-          <a:prstGeom prst="rect">
-            <a:avLst/>
-          </a:prstGeom>
-          <a:noFill/>
-        </p:spPr>
-        <p:txBody>
-          <a:bodyPr wrap="square" anchor="t" lIns="0" rIns="0" tIns="0" bIns="0">
-            <a:spAutoFit/>
-          </a:bodyPr>
-          <a:lstStyle/>
-          <a:p>
-            <a:pPr algn="l">
+            <a:pPr algn="ctr">
               <a:spcAft>
                 <a:spcPts val="400"/>
               </a:spcAft>
             </a:pPr>
             <a:r>
-              <a:rPr sz="1500" b="1">
+              <a:rPr sz="1250" b="1">
                 <a:solidFill>
                   <a:srgbClr val="FFFFFF"/>
                 </a:solidFill>
                 <a:latin typeface="Segoe UI"/>
               </a:rPr>
-              <a:t>Defensa de arquitectura — Fases 1 y 2</a:t>
-            </a:r>
-          </a:p>
-          <a:p>
-            <a:pPr algn="l"/>
-            <a:r>
-              <a:rPr sz="1250" b="0">
-                <a:solidFill>
-                  <a:srgbClr val="BFDBFE"/>
-                </a:solidFill>
-                <a:latin typeface="Segoe UI"/>
-              </a:rPr>
-              <a:t>Fase 1: Monolito modular en 3 capas   </a:t>
-            </a:r>
-            <a:r>
-              <a:rPr sz="1250" b="1">
-                <a:solidFill>
-                  <a:srgbClr val="059669"/>
-                </a:solidFill>
-                <a:latin typeface="Segoe UI"/>
-              </a:rPr>
-              <a:t>→   </a:t>
-            </a:r>
-            <a:r>
-              <a:rPr sz="1250" b="0">
-                <a:solidFill>
-                  <a:srgbClr val="BFDBFE"/>
-                </a:solidFill>
-                <a:latin typeface="Segoe UI"/>
-              </a:rPr>
-              <a:t>Fase 2: Microservicios tradicionales y modernos (event-driven)</a:t>
-            </a:r>
-          </a:p>
-        </p:txBody>
-      </p:sp>
-      <p:sp>
-        <p:nvSpPr>
-          <p:cNvPr id="11" name="TextBox 10"/>
-          <p:cNvSpPr txBox="1"/>
-          <p:nvPr/>
-        </p:nvSpPr>
-        <p:spPr>
-          <a:xfrm>
-            <a:off x="822960" y="5486400"/>
-            <a:ext cx="10561320" cy="640080"/>
-          </a:xfrm>
-          <a:prstGeom prst="rect">
-            <a:avLst/>
-          </a:prstGeom>
-          <a:noFill/>
-        </p:spPr>
-        <p:txBody>
-          <a:bodyPr wrap="square" anchor="t" lIns="0" rIns="0" tIns="0" bIns="0">
-            <a:spAutoFit/>
-          </a:bodyPr>
-          <a:lstStyle/>
-          <a:p>
-            <a:pPr algn="l">
-              <a:spcAft>
-                <a:spcPts val="200"/>
-              </a:spcAft>
-            </a:pPr>
-            <a:r>
-              <a:rPr sz="1150" b="1">
-                <a:solidFill>
-                  <a:srgbClr val="94A3B8"/>
-                </a:solidFill>
-                <a:latin typeface="Segoe UI"/>
-              </a:rPr>
-              <a:t>Equipo MMP-SOFTWARE</a:t>
-            </a:r>
-          </a:p>
-          <a:p>
-            <a:pPr algn="l"/>
-            <a:r>
-              <a:rPr sz="1100" b="0">
-                <a:solidFill>
-                  <a:srgbClr val="64748B"/>
-                </a:solidFill>
-                <a:latin typeface="Segoe UI"/>
-              </a:rPr>
-              <a:t>Conrado Gómez · Nicolás Zyngale · Matías Saravia · Lautaro Naglieri · Pablo Czurylo · Leandro Gramajo</a:t>
+              <a:t>TFI · Desarrollo de Aplicaciones Web · Equipo MMP-SOFTWARE</a:t>
+            </a:r>
+          </a:p>
+          <a:p>
+            <a:pPr algn="ctr"/>
+            <a:r>
+              <a:rPr sz="1050" b="0">
+                <a:solidFill>
+                  <a:srgbClr val="AEBFCE"/>
+                </a:solidFill>
+                <a:latin typeface="Segoe UI"/>
+              </a:rPr>
+              <a:t>Conrado Gómez   ·   Nicolás Zyngale   ·   Matías Saravia   ·   Lautaro Naglieri   ·   Pablo Czurylo   ·   Leandro Gramajo</a:t>
             </a:r>
           </a:p>
         </p:txBody>
@@ -3556,20 +3395,90 @@
       <p:grpSpPr/>
       <p:sp>
         <p:nvSpPr>
-          <p:cNvPr id="2" name="Rectangle 1"/>
+          <p:cNvPr id="2" name="TextBox 1"/>
+          <p:cNvSpPr txBox="1"/>
+          <p:nvPr/>
+        </p:nvSpPr>
+        <p:spPr>
+          <a:xfrm>
+            <a:off x="640080" y="502920"/>
+            <a:ext cx="10972800" cy="640080"/>
+          </a:xfrm>
+          <a:prstGeom prst="rect">
+            <a:avLst/>
+          </a:prstGeom>
+          <a:noFill/>
+        </p:spPr>
+        <p:txBody>
+          <a:bodyPr wrap="square" anchor="t" lIns="0" rIns="0" tIns="0" bIns="0">
+            <a:spAutoFit/>
+          </a:bodyPr>
+          <a:lstStyle/>
+          <a:p>
+            <a:pPr algn="l"/>
+            <a:r>
+              <a:rPr sz="3000" b="1">
+                <a:solidFill>
+                  <a:srgbClr val="1F4E79"/>
+                </a:solidFill>
+                <a:latin typeface="Segoe UI"/>
+              </a:rPr>
+              <a:t>El problema y el modelo de negocio</a:t>
+            </a:r>
+          </a:p>
+        </p:txBody>
+      </p:sp>
+      <p:sp>
+        <p:nvSpPr>
+          <p:cNvPr id="3" name="TextBox 2"/>
+          <p:cNvSpPr txBox="1"/>
+          <p:nvPr/>
+        </p:nvSpPr>
+        <p:spPr>
+          <a:xfrm>
+            <a:off x="658368" y="1170432"/>
+            <a:ext cx="10972800" cy="365760"/>
+          </a:xfrm>
+          <a:prstGeom prst="rect">
+            <a:avLst/>
+          </a:prstGeom>
+          <a:noFill/>
+        </p:spPr>
+        <p:txBody>
+          <a:bodyPr wrap="square" anchor="t" lIns="0" rIns="0" tIns="0" bIns="0">
+            <a:spAutoFit/>
+          </a:bodyPr>
+          <a:lstStyle/>
+          <a:p>
+            <a:pPr algn="l"/>
+            <a:r>
+              <a:rPr sz="1450" b="0">
+                <a:solidFill>
+                  <a:srgbClr val="7A7A7A"/>
+                </a:solidFill>
+                <a:latin typeface="Segoe UI"/>
+              </a:rPr>
+              <a:t>Por qué existe TrainerOS y cómo gana dinero</a:t>
+            </a:r>
+          </a:p>
+        </p:txBody>
+      </p:sp>
+      <p:sp>
+        <p:nvSpPr>
+          <p:cNvPr id="4" name="Rectangle 3"/>
           <p:cNvSpPr/>
           <p:nvPr/>
         </p:nvSpPr>
         <p:spPr>
           <a:xfrm>
-            <a:off x="0" y="0"/>
-            <a:ext cx="12191695" cy="6858000"/>
+            <a:off x="640080" y="1783080"/>
+            <a:ext cx="5440680" cy="2194560"/>
           </a:xfrm>
           <a:prstGeom prst="rect">
             <a:avLst/>
           </a:prstGeom>
           <a:solidFill>
-            <a:srgbClr val="F8FAFC"/>
+            <a:srgbClr val="ECF0F3"/>
           </a:solidFill>
           <a:ln>
             <a:noFill/>
@@ -3600,20 +3509,112 @@
       </p:sp>
       <p:sp>
         <p:nvSpPr>
-          <p:cNvPr id="3" name="Rectangle 2"/>
+          <p:cNvPr id="5" name="TextBox 4"/>
+          <p:cNvSpPr txBox="1"/>
+          <p:nvPr/>
+        </p:nvSpPr>
+        <p:spPr>
+          <a:xfrm>
+            <a:off x="914400" y="2011680"/>
+            <a:ext cx="4937760" cy="1828800"/>
+          </a:xfrm>
+          <a:prstGeom prst="rect">
+            <a:avLst/>
+          </a:prstGeom>
+          <a:noFill/>
+        </p:spPr>
+        <p:txBody>
+          <a:bodyPr wrap="square" anchor="t" lIns="0" rIns="0" tIns="0" bIns="0">
+            <a:spAutoFit/>
+          </a:bodyPr>
+          <a:lstStyle/>
+          <a:p>
+            <a:pPr algn="l">
+              <a:spcAft>
+                <a:spcPts val="800"/>
+              </a:spcAft>
+            </a:pPr>
+            <a:r>
+              <a:rPr sz="1300" b="1">
+                <a:solidFill>
+                  <a:srgbClr val="1F4E79"/>
+                </a:solidFill>
+                <a:latin typeface="Segoe UI"/>
+              </a:rPr>
+              <a:t>EL PROBLEMA</a:t>
+            </a:r>
+          </a:p>
+          <a:p>
+            <a:pPr algn="l">
+              <a:lnSpc>
+                <a:spcPct val="118000"/>
+              </a:lnSpc>
+              <a:spcAft>
+                <a:spcPts val="700"/>
+              </a:spcAft>
+            </a:pPr>
+            <a:r>
+              <a:rPr sz="1350" b="0">
+                <a:solidFill>
+                  <a:srgbClr val="404040"/>
+                </a:solidFill>
+                <a:latin typeface="Segoe UI"/>
+              </a:rPr>
+              <a:t>Los entrenadores gestionan decenas de alumnos con </a:t>
+            </a:r>
+            <a:r>
+              <a:rPr sz="1350" b="1">
+                <a:solidFill>
+                  <a:srgbClr val="E8741E"/>
+                </a:solidFill>
+                <a:latin typeface="Segoe UI"/>
+              </a:rPr>
+              <a:t>planillas de Excel y mensajes de WhatsApp</a:t>
+            </a:r>
+            <a:r>
+              <a:rPr sz="1350" b="0">
+                <a:solidFill>
+                  <a:srgbClr val="404040"/>
+                </a:solidFill>
+                <a:latin typeface="Segoe UI"/>
+              </a:rPr>
+              <a:t>.</a:t>
+            </a:r>
+          </a:p>
+          <a:p>
+            <a:pPr algn="l">
+              <a:lnSpc>
+                <a:spcPct val="118000"/>
+              </a:lnSpc>
+            </a:pPr>
+            <a:r>
+              <a:rPr sz="1350" b="0">
+                <a:solidFill>
+                  <a:srgbClr val="404040"/>
+                </a:solidFill>
+                <a:latin typeface="Segoe UI"/>
+              </a:rPr>
+              <a:t>Caos logístico, rutinas desactualizadas y pérdida de control sobre los cobros de membresías.</a:t>
+            </a:r>
+          </a:p>
+        </p:txBody>
+      </p:sp>
+      <p:sp>
+        <p:nvSpPr>
+          <p:cNvPr id="6" name="Rectangle 5"/>
           <p:cNvSpPr/>
           <p:nvPr/>
         </p:nvSpPr>
         <p:spPr>
           <a:xfrm>
-            <a:off x="0" y="0"/>
-            <a:ext cx="146304" cy="6858000"/>
+            <a:off x="6263640" y="1783080"/>
+            <a:ext cx="5285232" cy="2194560"/>
           </a:xfrm>
           <a:prstGeom prst="rect">
             <a:avLst/>
           </a:prstGeom>
           <a:solidFill>
-            <a:srgbClr val="475569"/>
+            <a:srgbClr val="ECF0F3"/>
           </a:solidFill>
           <a:ln>
             <a:noFill/>
@@ -3644,22 +3645,138 @@
       </p:sp>
       <p:sp>
         <p:nvSpPr>
-          <p:cNvPr id="4" name="Rounded Rectangle 3"/>
+          <p:cNvPr id="7" name="TextBox 6"/>
+          <p:cNvSpPr txBox="1"/>
+          <p:nvPr/>
+        </p:nvSpPr>
+        <p:spPr>
+          <a:xfrm>
+            <a:off x="6537960" y="2011680"/>
+            <a:ext cx="4800600" cy="1828800"/>
+          </a:xfrm>
+          <a:prstGeom prst="rect">
+            <a:avLst/>
+          </a:prstGeom>
+          <a:noFill/>
+        </p:spPr>
+        <p:txBody>
+          <a:bodyPr wrap="square" anchor="t" lIns="0" rIns="0" tIns="0" bIns="0">
+            <a:spAutoFit/>
+          </a:bodyPr>
+          <a:lstStyle/>
+          <a:p>
+            <a:pPr algn="l">
+              <a:spcAft>
+                <a:spcPts val="800"/>
+              </a:spcAft>
+            </a:pPr>
+            <a:r>
+              <a:rPr sz="1300" b="1">
+                <a:solidFill>
+                  <a:srgbClr val="1F4E79"/>
+                </a:solidFill>
+                <a:latin typeface="Segoe UI"/>
+              </a:rPr>
+              <a:t>MODELO DE NEGOCIO — SaaS B2B2C</a:t>
+            </a:r>
+          </a:p>
+          <a:p>
+            <a:pPr algn="l">
+              <a:lnSpc>
+                <a:spcPct val="118000"/>
+              </a:lnSpc>
+              <a:spcAft>
+                <a:spcPts val="700"/>
+              </a:spcAft>
+            </a:pPr>
+            <a:r>
+              <a:rPr sz="1350" b="1">
+                <a:solidFill>
+                  <a:srgbClr val="E8741E"/>
+                </a:solidFill>
+                <a:latin typeface="Segoe UI"/>
+              </a:rPr>
+              <a:t>Suscripción mensual por entrenador</a:t>
+            </a:r>
+            <a:r>
+              <a:rPr sz="1350" b="0">
+                <a:solidFill>
+                  <a:srgbClr val="404040"/>
+                </a:solidFill>
+                <a:latin typeface="Segoe UI"/>
+              </a:rPr>
+              <a:t> (multitenant). El entrenador paga; sus alumnos usan gratis un panel móvil.</a:t>
+            </a:r>
+          </a:p>
+          <a:p>
+            <a:pPr algn="l">
+              <a:lnSpc>
+                <a:spcPct val="118000"/>
+              </a:lnSpc>
+            </a:pPr>
+            <a:r>
+              <a:rPr sz="1350" b="0">
+                <a:solidFill>
+                  <a:srgbClr val="404040"/>
+                </a:solidFill>
+                <a:latin typeface="Segoe UI"/>
+              </a:rPr>
+              <a:t>Cada entrenador es un tenant aislado: sus datos nunca se cruzan con los de otro.</a:t>
+            </a:r>
+          </a:p>
+        </p:txBody>
+      </p:sp>
+      <p:sp>
+        <p:nvSpPr>
+          <p:cNvPr id="8" name="TextBox 7"/>
+          <p:cNvSpPr txBox="1"/>
+          <p:nvPr/>
+        </p:nvSpPr>
+        <p:spPr>
+          <a:xfrm>
+            <a:off x="640080" y="4224528"/>
+            <a:ext cx="7315200" cy="320040"/>
+          </a:xfrm>
+          <a:prstGeom prst="rect">
+            <a:avLst/>
+          </a:prstGeom>
+          <a:noFill/>
+        </p:spPr>
+        <p:txBody>
+          <a:bodyPr wrap="square" anchor="t" lIns="0" rIns="0" tIns="0" bIns="0">
+            <a:spAutoFit/>
+          </a:bodyPr>
+          <a:lstStyle/>
+          <a:p>
+            <a:pPr algn="l"/>
+            <a:r>
+              <a:rPr sz="1500" b="1">
+                <a:solidFill>
+                  <a:srgbClr val="1F4E79"/>
+                </a:solidFill>
+                <a:latin typeface="Segoe UI"/>
+              </a:rPr>
+              <a:t>Funcionalidades del MVP</a:t>
+            </a:r>
+          </a:p>
+        </p:txBody>
+      </p:sp>
+      <p:sp>
+        <p:nvSpPr>
+          <p:cNvPr id="9" name="Rectangle 8"/>
           <p:cNvSpPr/>
           <p:nvPr/>
         </p:nvSpPr>
         <p:spPr>
           <a:xfrm>
-            <a:off x="502920" y="384048"/>
-            <a:ext cx="822960" cy="301752"/>
-          </a:xfrm>
-          <a:prstGeom prst="roundRect">
-            <a:avLst>
-              <a:gd name="adj" fmla="val 50000"/>
-            </a:avLst>
+            <a:off x="640080" y="4663440"/>
+            <a:ext cx="2706624" cy="1234440"/>
+          </a:xfrm>
+          <a:prstGeom prst="rect">
+            <a:avLst/>
           </a:prstGeom>
           <a:solidFill>
-            <a:srgbClr val="475569"/>
+            <a:srgbClr val="ECF0F3"/>
           </a:solidFill>
           <a:ln>
             <a:noFill/>
@@ -3690,113 +3807,23 @@
       </p:sp>
       <p:sp>
         <p:nvSpPr>
-          <p:cNvPr id="5" name="TextBox 4"/>
-          <p:cNvSpPr txBox="1"/>
-          <p:nvPr/>
-        </p:nvSpPr>
-        <p:spPr>
-          <a:xfrm>
-            <a:off x="502920" y="384048"/>
-            <a:ext cx="822960" cy="301752"/>
-          </a:xfrm>
-          <a:prstGeom prst="rect">
-            <a:avLst/>
-          </a:prstGeom>
-          <a:noFill/>
-        </p:spPr>
-        <p:txBody>
-          <a:bodyPr wrap="square" anchor="ctr" lIns="0" rIns="0" tIns="0" bIns="0">
-            <a:spAutoFit/>
-          </a:bodyPr>
-          <a:lstStyle/>
-          <a:p>
-            <a:pPr algn="ctr"/>
-            <a:r>
-              <a:rPr sz="1100" b="1">
-                <a:solidFill>
-                  <a:srgbClr val="FFFFFF"/>
-                </a:solidFill>
-                <a:latin typeface="Segoe UI"/>
-              </a:rPr>
-              <a:t>CONTEXTO</a:t>
-            </a:r>
-          </a:p>
-        </p:txBody>
-      </p:sp>
-      <p:sp>
-        <p:nvSpPr>
-          <p:cNvPr id="6" name="TextBox 5"/>
-          <p:cNvSpPr txBox="1"/>
-          <p:nvPr/>
-        </p:nvSpPr>
-        <p:spPr>
-          <a:xfrm>
-            <a:off x="502920" y="694944"/>
-            <a:ext cx="11155680" cy="914400"/>
-          </a:xfrm>
-          <a:prstGeom prst="rect">
-            <a:avLst/>
-          </a:prstGeom>
-          <a:noFill/>
-        </p:spPr>
-        <p:txBody>
-          <a:bodyPr wrap="square" anchor="t" lIns="0" rIns="0" tIns="0" bIns="0">
-            <a:spAutoFit/>
-          </a:bodyPr>
-          <a:lstStyle/>
-          <a:p>
-            <a:pPr algn="l">
-              <a:spcAft>
-                <a:spcPts val="200"/>
-              </a:spcAft>
-            </a:pPr>
-            <a:r>
-              <a:rPr sz="2600" b="1">
-                <a:solidFill>
-                  <a:srgbClr val="0F172A"/>
-                </a:solidFill>
-                <a:latin typeface="Segoe UI"/>
-              </a:rPr>
-              <a:t>El problema y el modelo de negocio</a:t>
-            </a:r>
-          </a:p>
-          <a:p>
-            <a:pPr algn="l"/>
-            <a:r>
-              <a:rPr sz="1400" b="0">
-                <a:solidFill>
-                  <a:srgbClr val="64748B"/>
-                </a:solidFill>
-                <a:latin typeface="Segoe UI"/>
-              </a:rPr>
-              <a:t>Por qué existe TrainerOS y cómo gana dinero</a:t>
-            </a:r>
-          </a:p>
-        </p:txBody>
-      </p:sp>
-      <p:sp>
-        <p:nvSpPr>
-          <p:cNvPr id="7" name="Rounded Rectangle 6"/>
+          <p:cNvPr id="10" name="Rectangle 9"/>
           <p:cNvSpPr/>
           <p:nvPr/>
         </p:nvSpPr>
         <p:spPr>
           <a:xfrm>
-            <a:off x="502920" y="1691640"/>
-            <a:ext cx="5440680" cy="2331720"/>
-          </a:xfrm>
-          <a:prstGeom prst="roundRect">
-            <a:avLst>
-              <a:gd name="adj" fmla="val 5000"/>
-            </a:avLst>
+            <a:off x="640080" y="4663440"/>
+            <a:ext cx="64008" cy="1234440"/>
+          </a:xfrm>
+          <a:prstGeom prst="rect">
+            <a:avLst/>
           </a:prstGeom>
           <a:solidFill>
-            <a:srgbClr val="FFFFFF"/>
+            <a:srgbClr val="E8741E"/>
           </a:solidFill>
-          <a:ln w="15875">
-            <a:solidFill>
-              <a:srgbClr val="FECACA"/>
-            </a:solidFill>
+          <a:ln>
+            <a:noFill/>
           </a:ln>
           <a:effectLst/>
         </p:spPr>
@@ -3824,476 +3851,14 @@
       </p:sp>
       <p:sp>
         <p:nvSpPr>
-          <p:cNvPr id="8" name="Rounded Rectangle 7"/>
-          <p:cNvSpPr/>
-          <p:nvPr/>
-        </p:nvSpPr>
-        <p:spPr>
-          <a:xfrm>
-            <a:off x="640080" y="1828800"/>
-            <a:ext cx="73152" cy="2057400"/>
-          </a:xfrm>
-          <a:prstGeom prst="roundRect">
-            <a:avLst>
-              <a:gd name="adj" fmla="val 50000"/>
-            </a:avLst>
-          </a:prstGeom>
-          <a:solidFill>
-            <a:srgbClr val="DC2626"/>
-          </a:solidFill>
-          <a:ln>
-            <a:noFill/>
-          </a:ln>
-          <a:effectLst/>
-        </p:spPr>
-        <p:style>
-          <a:lnRef idx="1">
-            <a:schemeClr val="accent1"/>
-          </a:lnRef>
-          <a:fillRef idx="3">
-            <a:schemeClr val="accent1"/>
-          </a:fillRef>
-          <a:effectRef idx="2">
-            <a:schemeClr val="accent1"/>
-          </a:effectRef>
-          <a:fontRef idx="minor">
-            <a:schemeClr val="lt1"/>
-          </a:fontRef>
-        </p:style>
-        <p:txBody>
-          <a:bodyPr rtlCol="0" anchor="ctr"/>
-          <a:lstStyle/>
-          <a:p>
-            <a:pPr algn="ctr"/>
-          </a:p>
-        </p:txBody>
-      </p:sp>
-      <p:sp>
-        <p:nvSpPr>
-          <p:cNvPr id="9" name="TextBox 8"/>
+          <p:cNvPr id="11" name="TextBox 10"/>
           <p:cNvSpPr txBox="1"/>
           <p:nvPr/>
         </p:nvSpPr>
         <p:spPr>
           <a:xfrm>
-            <a:off x="868680" y="1874519"/>
-            <a:ext cx="4937760" cy="2103120"/>
-          </a:xfrm>
-          <a:prstGeom prst="rect">
-            <a:avLst/>
-          </a:prstGeom>
-          <a:noFill/>
-        </p:spPr>
-        <p:txBody>
-          <a:bodyPr wrap="square" anchor="t" lIns="0" rIns="0" tIns="0" bIns="0">
-            <a:spAutoFit/>
-          </a:bodyPr>
-          <a:lstStyle/>
-          <a:p>
-            <a:pPr algn="l">
-              <a:spcAft>
-                <a:spcPts val="600"/>
-              </a:spcAft>
-            </a:pPr>
-            <a:r>
-              <a:rPr sz="1200" b="1">
-                <a:solidFill>
-                  <a:srgbClr val="DC2626"/>
-                </a:solidFill>
-                <a:latin typeface="Segoe UI"/>
-              </a:rPr>
-              <a:t>EL PROBLEMA</a:t>
-            </a:r>
-          </a:p>
-          <a:p>
-            <a:pPr algn="l">
-              <a:lnSpc>
-                <a:spcPct val="115000"/>
-              </a:lnSpc>
-              <a:spcAft>
-                <a:spcPts val="600"/>
-              </a:spcAft>
-            </a:pPr>
-            <a:r>
-              <a:rPr sz="1300" b="0">
-                <a:solidFill>
-                  <a:srgbClr val="334155"/>
-                </a:solidFill>
-                <a:latin typeface="Segoe UI"/>
-              </a:rPr>
-              <a:t>Los entrenadores gestionan decenas de alumnos con </a:t>
-            </a:r>
-            <a:r>
-              <a:rPr sz="1300" b="1">
-                <a:solidFill>
-                  <a:srgbClr val="0F172A"/>
-                </a:solidFill>
-                <a:latin typeface="Segoe UI"/>
-              </a:rPr>
-              <a:t>planillas de Excel y mensajes de WhatsApp</a:t>
-            </a:r>
-            <a:r>
-              <a:rPr sz="1300" b="0">
-                <a:solidFill>
-                  <a:srgbClr val="334155"/>
-                </a:solidFill>
-                <a:latin typeface="Segoe UI"/>
-              </a:rPr>
-              <a:t>.</a:t>
-            </a:r>
-          </a:p>
-          <a:p>
-            <a:pPr algn="l">
-              <a:lnSpc>
-                <a:spcPct val="115000"/>
-              </a:lnSpc>
-            </a:pPr>
-            <a:r>
-              <a:rPr sz="1300" b="0">
-                <a:solidFill>
-                  <a:srgbClr val="334155"/>
-                </a:solidFill>
-                <a:latin typeface="Segoe UI"/>
-              </a:rPr>
-              <a:t>Resultado: caos logístico, rutinas desactualizadas y pérdida de control sobre los cobros de membresías.</a:t>
-            </a:r>
-          </a:p>
-        </p:txBody>
-      </p:sp>
-      <p:sp>
-        <p:nvSpPr>
-          <p:cNvPr id="10" name="Rounded Rectangle 9"/>
-          <p:cNvSpPr/>
-          <p:nvPr/>
-        </p:nvSpPr>
-        <p:spPr>
-          <a:xfrm>
-            <a:off x="6263640" y="1691640"/>
-            <a:ext cx="5422392" cy="2331720"/>
-          </a:xfrm>
-          <a:prstGeom prst="roundRect">
-            <a:avLst>
-              <a:gd name="adj" fmla="val 5000"/>
-            </a:avLst>
-          </a:prstGeom>
-          <a:solidFill>
-            <a:srgbClr val="FFFFFF"/>
-          </a:solidFill>
-          <a:ln w="15875">
-            <a:solidFill>
-              <a:srgbClr val="A7F3D0"/>
-            </a:solidFill>
-          </a:ln>
-          <a:effectLst/>
-        </p:spPr>
-        <p:style>
-          <a:lnRef idx="1">
-            <a:schemeClr val="accent1"/>
-          </a:lnRef>
-          <a:fillRef idx="3">
-            <a:schemeClr val="accent1"/>
-          </a:fillRef>
-          <a:effectRef idx="2">
-            <a:schemeClr val="accent1"/>
-          </a:effectRef>
-          <a:fontRef idx="minor">
-            <a:schemeClr val="lt1"/>
-          </a:fontRef>
-        </p:style>
-        <p:txBody>
-          <a:bodyPr rtlCol="0" anchor="ctr"/>
-          <a:lstStyle/>
-          <a:p>
-            <a:pPr algn="ctr"/>
-          </a:p>
-        </p:txBody>
-      </p:sp>
-      <p:sp>
-        <p:nvSpPr>
-          <p:cNvPr id="11" name="Rounded Rectangle 10"/>
-          <p:cNvSpPr/>
-          <p:nvPr/>
-        </p:nvSpPr>
-        <p:spPr>
-          <a:xfrm>
-            <a:off x="6400800" y="1828800"/>
-            <a:ext cx="73152" cy="2057400"/>
-          </a:xfrm>
-          <a:prstGeom prst="roundRect">
-            <a:avLst>
-              <a:gd name="adj" fmla="val 50000"/>
-            </a:avLst>
-          </a:prstGeom>
-          <a:solidFill>
-            <a:srgbClr val="059669"/>
-          </a:solidFill>
-          <a:ln>
-            <a:noFill/>
-          </a:ln>
-          <a:effectLst/>
-        </p:spPr>
-        <p:style>
-          <a:lnRef idx="1">
-            <a:schemeClr val="accent1"/>
-          </a:lnRef>
-          <a:fillRef idx="3">
-            <a:schemeClr val="accent1"/>
-          </a:fillRef>
-          <a:effectRef idx="2">
-            <a:schemeClr val="accent1"/>
-          </a:effectRef>
-          <a:fontRef idx="minor">
-            <a:schemeClr val="lt1"/>
-          </a:fontRef>
-        </p:style>
-        <p:txBody>
-          <a:bodyPr rtlCol="0" anchor="ctr"/>
-          <a:lstStyle/>
-          <a:p>
-            <a:pPr algn="ctr"/>
-          </a:p>
-        </p:txBody>
-      </p:sp>
-      <p:sp>
-        <p:nvSpPr>
-          <p:cNvPr id="12" name="TextBox 11"/>
-          <p:cNvSpPr txBox="1"/>
-          <p:nvPr/>
-        </p:nvSpPr>
-        <p:spPr>
-          <a:xfrm>
-            <a:off x="6629400" y="1874519"/>
-            <a:ext cx="4937760" cy="2103120"/>
-          </a:xfrm>
-          <a:prstGeom prst="rect">
-            <a:avLst/>
-          </a:prstGeom>
-          <a:noFill/>
-        </p:spPr>
-        <p:txBody>
-          <a:bodyPr wrap="square" anchor="t" lIns="0" rIns="0" tIns="0" bIns="0">
-            <a:spAutoFit/>
-          </a:bodyPr>
-          <a:lstStyle/>
-          <a:p>
-            <a:pPr algn="l">
-              <a:spcAft>
-                <a:spcPts val="600"/>
-              </a:spcAft>
-            </a:pPr>
-            <a:r>
-              <a:rPr sz="1200" b="1">
-                <a:solidFill>
-                  <a:srgbClr val="059669"/>
-                </a:solidFill>
-                <a:latin typeface="Segoe UI"/>
-              </a:rPr>
-              <a:t>MODELO DE NEGOCIO — SaaS B2B2C</a:t>
-            </a:r>
-          </a:p>
-          <a:p>
-            <a:pPr algn="l">
-              <a:lnSpc>
-                <a:spcPct val="115000"/>
-              </a:lnSpc>
-              <a:spcAft>
-                <a:spcPts val="600"/>
-              </a:spcAft>
-            </a:pPr>
-            <a:r>
-              <a:rPr sz="1300" b="1">
-                <a:solidFill>
-                  <a:srgbClr val="0F172A"/>
-                </a:solidFill>
-                <a:latin typeface="Segoe UI"/>
-              </a:rPr>
-              <a:t>Suscripción mensual por entrenador</a:t>
-            </a:r>
-            <a:r>
-              <a:rPr sz="1300" b="0">
-                <a:solidFill>
-                  <a:srgbClr val="334155"/>
-                </a:solidFill>
-                <a:latin typeface="Segoe UI"/>
-              </a:rPr>
-              <a:t> (multitenant). El entrenador paga la herramienta; sus alumnos acceden gratis a un panel móvil.</a:t>
-            </a:r>
-          </a:p>
-          <a:p>
-            <a:pPr algn="l">
-              <a:lnSpc>
-                <a:spcPct val="115000"/>
-              </a:lnSpc>
-            </a:pPr>
-            <a:r>
-              <a:rPr sz="1300" b="0">
-                <a:solidFill>
-                  <a:srgbClr val="334155"/>
-                </a:solidFill>
-                <a:latin typeface="Segoe UI"/>
-              </a:rPr>
-              <a:t>Cada entrenador es un </a:t>
-            </a:r>
-            <a:r>
-              <a:rPr sz="1300" b="1">
-                <a:solidFill>
-                  <a:srgbClr val="0F172A"/>
-                </a:solidFill>
-                <a:latin typeface="Segoe UI"/>
-              </a:rPr>
-              <a:t>tenant aislado</a:t>
-            </a:r>
-            <a:r>
-              <a:rPr sz="1300" b="0">
-                <a:solidFill>
-                  <a:srgbClr val="334155"/>
-                </a:solidFill>
-                <a:latin typeface="Segoe UI"/>
-              </a:rPr>
-              <a:t>: sus datos nunca se cruzan con los de otro.</a:t>
-            </a:r>
-          </a:p>
-        </p:txBody>
-      </p:sp>
-      <p:sp>
-        <p:nvSpPr>
-          <p:cNvPr id="13" name="TextBox 12"/>
-          <p:cNvSpPr txBox="1"/>
-          <p:nvPr/>
-        </p:nvSpPr>
-        <p:spPr>
-          <a:xfrm>
-            <a:off x="502920" y="4261104"/>
-            <a:ext cx="7315200" cy="320040"/>
-          </a:xfrm>
-          <a:prstGeom prst="rect">
-            <a:avLst/>
-          </a:prstGeom>
-          <a:noFill/>
-        </p:spPr>
-        <p:txBody>
-          <a:bodyPr wrap="square" anchor="t" lIns="0" rIns="0" tIns="0" bIns="0">
-            <a:spAutoFit/>
-          </a:bodyPr>
-          <a:lstStyle/>
-          <a:p>
-            <a:pPr algn="l"/>
-            <a:r>
-              <a:rPr sz="1400" b="1">
-                <a:solidFill>
-                  <a:srgbClr val="0F172A"/>
-                </a:solidFill>
-                <a:latin typeface="Segoe UI"/>
-              </a:rPr>
-              <a:t>Funcionalidades del MVP</a:t>
-            </a:r>
-          </a:p>
-        </p:txBody>
-      </p:sp>
-      <p:sp>
-        <p:nvSpPr>
-          <p:cNvPr id="14" name="Rounded Rectangle 13"/>
-          <p:cNvSpPr/>
-          <p:nvPr/>
-        </p:nvSpPr>
-        <p:spPr>
-          <a:xfrm>
-            <a:off x="502920" y="4681728"/>
-            <a:ext cx="2706624" cy="1325880"/>
-          </a:xfrm>
-          <a:prstGeom prst="roundRect">
-            <a:avLst>
-              <a:gd name="adj" fmla="val 7000"/>
-            </a:avLst>
-          </a:prstGeom>
-          <a:solidFill>
-            <a:srgbClr val="EFF6FF"/>
-          </a:solidFill>
-          <a:ln w="15875">
-            <a:solidFill>
-              <a:srgbClr val="BFDBFE"/>
-            </a:solidFill>
-          </a:ln>
-          <a:effectLst/>
-        </p:spPr>
-        <p:style>
-          <a:lnRef idx="1">
-            <a:schemeClr val="accent1"/>
-          </a:lnRef>
-          <a:fillRef idx="3">
-            <a:schemeClr val="accent1"/>
-          </a:fillRef>
-          <a:effectRef idx="2">
-            <a:schemeClr val="accent1"/>
-          </a:effectRef>
-          <a:fontRef idx="minor">
-            <a:schemeClr val="lt1"/>
-          </a:fontRef>
-        </p:style>
-        <p:txBody>
-          <a:bodyPr rtlCol="0" anchor="ctr"/>
-          <a:lstStyle/>
-          <a:p>
-            <a:pPr algn="ctr"/>
-          </a:p>
-        </p:txBody>
-      </p:sp>
-      <p:sp>
-        <p:nvSpPr>
-          <p:cNvPr id="15" name="Rounded Rectangle 14"/>
-          <p:cNvSpPr/>
-          <p:nvPr/>
-        </p:nvSpPr>
-        <p:spPr>
-          <a:xfrm>
-            <a:off x="667512" y="4828032"/>
-            <a:ext cx="2377440" cy="54864"/>
-          </a:xfrm>
-          <a:prstGeom prst="roundRect">
-            <a:avLst>
-              <a:gd name="adj" fmla="val 50000"/>
-            </a:avLst>
-          </a:prstGeom>
-          <a:solidFill>
-            <a:srgbClr val="2563EB"/>
-          </a:solidFill>
-          <a:ln>
-            <a:noFill/>
-          </a:ln>
-          <a:effectLst/>
-        </p:spPr>
-        <p:style>
-          <a:lnRef idx="1">
-            <a:schemeClr val="accent1"/>
-          </a:lnRef>
-          <a:fillRef idx="3">
-            <a:schemeClr val="accent1"/>
-          </a:fillRef>
-          <a:effectRef idx="2">
-            <a:schemeClr val="accent1"/>
-          </a:effectRef>
-          <a:fontRef idx="minor">
-            <a:schemeClr val="lt1"/>
-          </a:fontRef>
-        </p:style>
-        <p:txBody>
-          <a:bodyPr rtlCol="0" anchor="ctr"/>
-          <a:lstStyle/>
-          <a:p>
-            <a:pPr algn="ctr"/>
-          </a:p>
-        </p:txBody>
-      </p:sp>
-      <p:sp>
-        <p:nvSpPr>
-          <p:cNvPr id="16" name="TextBox 15"/>
-          <p:cNvSpPr txBox="1"/>
-          <p:nvPr/>
-        </p:nvSpPr>
-        <p:spPr>
-          <a:xfrm>
-            <a:off x="685800" y="4992624"/>
-            <a:ext cx="2340864" cy="914400"/>
+            <a:off x="859536" y="4882896"/>
+            <a:ext cx="2322576" cy="868680"/>
           </a:xfrm>
           <a:prstGeom prst="rect">
             <a:avLst/>
@@ -4317,7 +3882,7 @@
             <a:r>
               <a:rPr sz="1250" b="1">
                 <a:solidFill>
-                  <a:srgbClr val="0F172A"/>
+                  <a:srgbClr val="1F4E79"/>
                 </a:solidFill>
                 <a:latin typeface="Segoe UI"/>
               </a:rPr>
@@ -4333,7 +3898,7 @@
             <a:r>
               <a:rPr sz="1050" b="0">
                 <a:solidFill>
-                  <a:srgbClr val="64748B"/>
+                  <a:srgbClr val="7A7A7A"/>
                 </a:solidFill>
                 <a:latin typeface="Segoe UI"/>
               </a:rPr>
@@ -4344,27 +3909,23 @@
       </p:sp>
       <p:sp>
         <p:nvSpPr>
-          <p:cNvPr id="17" name="Rounded Rectangle 16"/>
+          <p:cNvPr id="12" name="Rectangle 11"/>
           <p:cNvSpPr/>
           <p:nvPr/>
         </p:nvSpPr>
         <p:spPr>
           <a:xfrm>
-            <a:off x="3300984" y="4681728"/>
-            <a:ext cx="2706624" cy="1325880"/>
-          </a:xfrm>
-          <a:prstGeom prst="roundRect">
-            <a:avLst>
-              <a:gd name="adj" fmla="val 7000"/>
-            </a:avLst>
+            <a:off x="3435400" y="4663440"/>
+            <a:ext cx="2706624" cy="1234440"/>
+          </a:xfrm>
+          <a:prstGeom prst="rect">
+            <a:avLst/>
           </a:prstGeom>
           <a:solidFill>
-            <a:srgbClr val="EEF2FF"/>
+            <a:srgbClr val="ECF0F3"/>
           </a:solidFill>
-          <a:ln w="15875">
-            <a:solidFill>
-              <a:srgbClr val="C7D2FE"/>
-            </a:solidFill>
+          <a:ln>
+            <a:noFill/>
           </a:ln>
           <a:effectLst/>
         </p:spPr>
@@ -4392,22 +3953,20 @@
       </p:sp>
       <p:sp>
         <p:nvSpPr>
-          <p:cNvPr id="18" name="Rounded Rectangle 17"/>
+          <p:cNvPr id="13" name="Rectangle 12"/>
           <p:cNvSpPr/>
           <p:nvPr/>
         </p:nvSpPr>
         <p:spPr>
           <a:xfrm>
-            <a:off x="3465576" y="4828032"/>
-            <a:ext cx="2377440" cy="54864"/>
-          </a:xfrm>
-          <a:prstGeom prst="roundRect">
-            <a:avLst>
-              <a:gd name="adj" fmla="val 50000"/>
-            </a:avLst>
+            <a:off x="3435400" y="4663440"/>
+            <a:ext cx="64008" cy="1234440"/>
+          </a:xfrm>
+          <a:prstGeom prst="rect">
+            <a:avLst/>
           </a:prstGeom>
           <a:solidFill>
-            <a:srgbClr val="4F46E5"/>
+            <a:srgbClr val="E8741E"/>
           </a:solidFill>
           <a:ln>
             <a:noFill/>
@@ -4438,14 +3997,14 @@
       </p:sp>
       <p:sp>
         <p:nvSpPr>
-          <p:cNvPr id="19" name="TextBox 18"/>
+          <p:cNvPr id="14" name="TextBox 13"/>
           <p:cNvSpPr txBox="1"/>
           <p:nvPr/>
         </p:nvSpPr>
         <p:spPr>
           <a:xfrm>
-            <a:off x="3483864" y="4992624"/>
-            <a:ext cx="2340864" cy="914400"/>
+            <a:off x="3654856" y="4882896"/>
+            <a:ext cx="2322576" cy="868680"/>
           </a:xfrm>
           <a:prstGeom prst="rect">
             <a:avLst/>
@@ -4469,7 +4028,7 @@
             <a:r>
               <a:rPr sz="1250" b="1">
                 <a:solidFill>
-                  <a:srgbClr val="0F172A"/>
+                  <a:srgbClr val="1F4E79"/>
                 </a:solidFill>
                 <a:latin typeface="Segoe UI"/>
               </a:rPr>
@@ -4485,38 +4044,34 @@
             <a:r>
               <a:rPr sz="1050" b="0">
                 <a:solidFill>
-                  <a:srgbClr val="64748B"/>
-                </a:solidFill>
-                <a:latin typeface="Segoe UI"/>
-              </a:rPr>
-              <a:t>Desde catálogo de ejercicios</a:t>
-            </a:r>
-          </a:p>
-        </p:txBody>
-      </p:sp>
-      <p:sp>
-        <p:nvSpPr>
-          <p:cNvPr id="20" name="Rounded Rectangle 19"/>
+                  <a:srgbClr val="7A7A7A"/>
+                </a:solidFill>
+                <a:latin typeface="Segoe UI"/>
+              </a:rPr>
+              <a:t>Sobre catálogo de ejercicios</a:t>
+            </a:r>
+          </a:p>
+        </p:txBody>
+      </p:sp>
+      <p:sp>
+        <p:nvSpPr>
+          <p:cNvPr id="15" name="Rectangle 14"/>
           <p:cNvSpPr/>
           <p:nvPr/>
         </p:nvSpPr>
         <p:spPr>
           <a:xfrm>
-            <a:off x="6099048" y="4681728"/>
-            <a:ext cx="2706624" cy="1325880"/>
-          </a:xfrm>
-          <a:prstGeom prst="roundRect">
-            <a:avLst>
-              <a:gd name="adj" fmla="val 7000"/>
-            </a:avLst>
+            <a:off x="6230721" y="4663440"/>
+            <a:ext cx="2706624" cy="1234440"/>
+          </a:xfrm>
+          <a:prstGeom prst="rect">
+            <a:avLst/>
           </a:prstGeom>
           <a:solidFill>
-            <a:srgbClr val="ECFDF5"/>
+            <a:srgbClr val="ECF0F3"/>
           </a:solidFill>
-          <a:ln w="15875">
-            <a:solidFill>
-              <a:srgbClr val="A7F3D0"/>
-            </a:solidFill>
+          <a:ln>
+            <a:noFill/>
           </a:ln>
           <a:effectLst/>
         </p:spPr>
@@ -4544,22 +4099,20 @@
       </p:sp>
       <p:sp>
         <p:nvSpPr>
-          <p:cNvPr id="21" name="Rounded Rectangle 20"/>
+          <p:cNvPr id="16" name="Rectangle 15"/>
           <p:cNvSpPr/>
           <p:nvPr/>
         </p:nvSpPr>
         <p:spPr>
           <a:xfrm>
-            <a:off x="6263640" y="4828032"/>
-            <a:ext cx="2377440" cy="54864"/>
-          </a:xfrm>
-          <a:prstGeom prst="roundRect">
-            <a:avLst>
-              <a:gd name="adj" fmla="val 50000"/>
-            </a:avLst>
+            <a:off x="6230721" y="4663440"/>
+            <a:ext cx="64008" cy="1234440"/>
+          </a:xfrm>
+          <a:prstGeom prst="rect">
+            <a:avLst/>
           </a:prstGeom>
           <a:solidFill>
-            <a:srgbClr val="059669"/>
+            <a:srgbClr val="E8741E"/>
           </a:solidFill>
           <a:ln>
             <a:noFill/>
@@ -4590,14 +4143,14 @@
       </p:sp>
       <p:sp>
         <p:nvSpPr>
-          <p:cNvPr id="22" name="TextBox 21"/>
+          <p:cNvPr id="17" name="TextBox 16"/>
           <p:cNvSpPr txBox="1"/>
           <p:nvPr/>
         </p:nvSpPr>
         <p:spPr>
           <a:xfrm>
-            <a:off x="6281928" y="4992624"/>
-            <a:ext cx="2340864" cy="914400"/>
+            <a:off x="6450177" y="4882896"/>
+            <a:ext cx="2322576" cy="868680"/>
           </a:xfrm>
           <a:prstGeom prst="rect">
             <a:avLst/>
@@ -4621,7 +4174,7 @@
             <a:r>
               <a:rPr sz="1250" b="1">
                 <a:solidFill>
-                  <a:srgbClr val="0F172A"/>
+                  <a:srgbClr val="1F4E79"/>
                 </a:solidFill>
                 <a:latin typeface="Segoe UI"/>
               </a:rPr>
@@ -4637,7 +4190,7 @@
             <a:r>
               <a:rPr sz="1050" b="0">
                 <a:solidFill>
-                  <a:srgbClr val="64748B"/>
+                  <a:srgbClr val="7A7A7A"/>
                 </a:solidFill>
                 <a:latin typeface="Segoe UI"/>
               </a:rPr>
@@ -4648,27 +4201,23 @@
       </p:sp>
       <p:sp>
         <p:nvSpPr>
-          <p:cNvPr id="23" name="Rounded Rectangle 22"/>
+          <p:cNvPr id="18" name="Rectangle 17"/>
           <p:cNvSpPr/>
           <p:nvPr/>
         </p:nvSpPr>
         <p:spPr>
           <a:xfrm>
-            <a:off x="8897112" y="4681728"/>
-            <a:ext cx="2706624" cy="1325880"/>
-          </a:xfrm>
-          <a:prstGeom prst="roundRect">
-            <a:avLst>
-              <a:gd name="adj" fmla="val 7000"/>
-            </a:avLst>
+            <a:off x="9026042" y="4663440"/>
+            <a:ext cx="2706624" cy="1234440"/>
+          </a:xfrm>
+          <a:prstGeom prst="rect">
+            <a:avLst/>
           </a:prstGeom>
           <a:solidFill>
-            <a:srgbClr val="FEF3C7"/>
+            <a:srgbClr val="ECF0F3"/>
           </a:solidFill>
-          <a:ln w="15875">
-            <a:solidFill>
-              <a:srgbClr val="FDE68A"/>
-            </a:solidFill>
+          <a:ln>
+            <a:noFill/>
           </a:ln>
           <a:effectLst/>
         </p:spPr>
@@ -4696,22 +4245,20 @@
       </p:sp>
       <p:sp>
         <p:nvSpPr>
-          <p:cNvPr id="24" name="Rounded Rectangle 23"/>
+          <p:cNvPr id="19" name="Rectangle 18"/>
           <p:cNvSpPr/>
           <p:nvPr/>
         </p:nvSpPr>
         <p:spPr>
           <a:xfrm>
-            <a:off x="9061704" y="4828032"/>
-            <a:ext cx="2377440" cy="54864"/>
-          </a:xfrm>
-          <a:prstGeom prst="roundRect">
-            <a:avLst>
-              <a:gd name="adj" fmla="val 50000"/>
-            </a:avLst>
+            <a:off x="9026042" y="4663440"/>
+            <a:ext cx="64008" cy="1234440"/>
+          </a:xfrm>
+          <a:prstGeom prst="rect">
+            <a:avLst/>
           </a:prstGeom>
           <a:solidFill>
-            <a:srgbClr val="D97706"/>
+            <a:srgbClr val="E8741E"/>
           </a:solidFill>
           <a:ln>
             <a:noFill/>
@@ -4742,14 +4289,14 @@
       </p:sp>
       <p:sp>
         <p:nvSpPr>
-          <p:cNvPr id="25" name="TextBox 24"/>
+          <p:cNvPr id="20" name="TextBox 19"/>
           <p:cNvSpPr txBox="1"/>
           <p:nvPr/>
         </p:nvSpPr>
         <p:spPr>
           <a:xfrm>
-            <a:off x="9079992" y="4992624"/>
-            <a:ext cx="2340864" cy="914400"/>
+            <a:off x="9245498" y="4882896"/>
+            <a:ext cx="2322576" cy="868680"/>
           </a:xfrm>
           <a:prstGeom prst="rect">
             <a:avLst/>
@@ -4773,7 +4320,7 @@
             <a:r>
               <a:rPr sz="1250" b="1">
                 <a:solidFill>
-                  <a:srgbClr val="0F172A"/>
+                  <a:srgbClr val="1F4E79"/>
                 </a:solidFill>
                 <a:latin typeface="Segoe UI"/>
               </a:rPr>
@@ -4789,31 +4336,31 @@
             <a:r>
               <a:rPr sz="1050" b="0">
                 <a:solidFill>
-                  <a:srgbClr val="64748B"/>
-                </a:solidFill>
-                <a:latin typeface="Segoe UI"/>
-              </a:rPr>
-              <a:t>Membresías y alertas de venc.</a:t>
-            </a:r>
-          </a:p>
-        </p:txBody>
-      </p:sp>
-      <p:sp>
-        <p:nvSpPr>
-          <p:cNvPr id="26" name="Rectangle 25"/>
+                  <a:srgbClr val="7A7A7A"/>
+                </a:solidFill>
+                <a:latin typeface="Segoe UI"/>
+              </a:rPr>
+              <a:t>Membresías y alertas</a:t>
+            </a:r>
+          </a:p>
+        </p:txBody>
+      </p:sp>
+      <p:sp>
+        <p:nvSpPr>
+          <p:cNvPr id="21" name="Rectangle 20"/>
           <p:cNvSpPr/>
           <p:nvPr/>
         </p:nvSpPr>
         <p:spPr>
           <a:xfrm>
-            <a:off x="502920" y="6437376"/>
-            <a:ext cx="11183112" cy="10972"/>
+            <a:off x="0" y="6739128"/>
+            <a:ext cx="12191695" cy="118872"/>
           </a:xfrm>
           <a:prstGeom prst="rect">
             <a:avLst/>
           </a:prstGeom>
           <a:solidFill>
-            <a:srgbClr val="E2E8F0"/>
+            <a:srgbClr val="E8741E"/>
           </a:solidFill>
           <a:ln>
             <a:noFill/>
@@ -4844,14 +4391,14 @@
       </p:sp>
       <p:sp>
         <p:nvSpPr>
-          <p:cNvPr id="27" name="TextBox 26"/>
+          <p:cNvPr id="22" name="TextBox 21"/>
           <p:cNvSpPr txBox="1"/>
           <p:nvPr/>
         </p:nvSpPr>
         <p:spPr>
           <a:xfrm>
-            <a:off x="502920" y="6492240"/>
-            <a:ext cx="7315200" cy="274320"/>
+            <a:off x="7315200" y="6437376"/>
+            <a:ext cx="4370832" cy="256032"/>
           </a:xfrm>
           <a:prstGeom prst="rect">
             <a:avLst/>
@@ -4864,50 +4411,15 @@
           </a:bodyPr>
           <a:lstStyle/>
           <a:p>
-            <a:pPr algn="l"/>
+            <a:pPr algn="r"/>
             <a:r>
               <a:rPr sz="950" b="0">
                 <a:solidFill>
-                  <a:srgbClr val="94A3B8"/>
-                </a:solidFill>
-                <a:latin typeface="Segoe UI"/>
-              </a:rPr>
-              <a:t>TrainerOS — TFI Desarrollo de Aplicaciones Web</a:t>
-            </a:r>
-          </a:p>
-        </p:txBody>
-      </p:sp>
-      <p:sp>
-        <p:nvSpPr>
-          <p:cNvPr id="28" name="TextBox 27"/>
-          <p:cNvSpPr txBox="1"/>
-          <p:nvPr/>
-        </p:nvSpPr>
-        <p:spPr>
-          <a:xfrm>
-            <a:off x="7315200" y="6492240"/>
-            <a:ext cx="4370832" cy="274320"/>
-          </a:xfrm>
-          <a:prstGeom prst="rect">
-            <a:avLst/>
-          </a:prstGeom>
-          <a:noFill/>
-        </p:spPr>
-        <p:txBody>
-          <a:bodyPr wrap="square" anchor="t" lIns="0" rIns="0" tIns="0" bIns="0">
-            <a:spAutoFit/>
-          </a:bodyPr>
-          <a:lstStyle/>
-          <a:p>
-            <a:pPr algn="r"/>
-            <a:r>
-              <a:rPr sz="950" b="1">
-                <a:solidFill>
-                  <a:srgbClr val="64748B"/>
-                </a:solidFill>
-                <a:latin typeface="Segoe UI"/>
-              </a:rPr>
-              <a:t>Expone: Conrado Gómez    ·    2 / 12</a:t>
+                  <a:srgbClr val="9AA6B2"/>
+                </a:solidFill>
+                <a:latin typeface="Segoe UI"/>
+              </a:rPr>
+              <a:t>2 / 12   ·   Expone: Conrado Gómez</a:t>
             </a:r>
           </a:p>
         </p:txBody>
@@ -4946,14 +4458,93 @@
         </p:blipFill>
         <p:spPr>
           <a:xfrm>
-            <a:off x="0" y="0"/>
-            <a:ext cx="12191695" cy="6858000"/>
+            <a:off x="1394214" y="201168"/>
+            <a:ext cx="9400522" cy="6309360"/>
           </a:xfrm>
           <a:prstGeom prst="rect">
             <a:avLst/>
           </a:prstGeom>
         </p:spPr>
       </p:pic>
+      <p:sp>
+        <p:nvSpPr>
+          <p:cNvPr id="3" name="Rectangle 2"/>
+          <p:cNvSpPr/>
+          <p:nvPr/>
+        </p:nvSpPr>
+        <p:spPr>
+          <a:xfrm>
+            <a:off x="0" y="6739128"/>
+            <a:ext cx="12191695" cy="118872"/>
+          </a:xfrm>
+          <a:prstGeom prst="rect">
+            <a:avLst/>
+          </a:prstGeom>
+          <a:solidFill>
+            <a:srgbClr val="E8741E"/>
+          </a:solidFill>
+          <a:ln>
+            <a:noFill/>
+          </a:ln>
+          <a:effectLst/>
+        </p:spPr>
+        <p:style>
+          <a:lnRef idx="1">
+            <a:schemeClr val="accent1"/>
+          </a:lnRef>
+          <a:fillRef idx="3">
+            <a:schemeClr val="accent1"/>
+          </a:fillRef>
+          <a:effectRef idx="2">
+            <a:schemeClr val="accent1"/>
+          </a:effectRef>
+          <a:fontRef idx="minor">
+            <a:schemeClr val="lt1"/>
+          </a:fontRef>
+        </p:style>
+        <p:txBody>
+          <a:bodyPr rtlCol="0" anchor="ctr"/>
+          <a:lstStyle/>
+          <a:p>
+            <a:pPr algn="ctr"/>
+          </a:p>
+        </p:txBody>
+      </p:sp>
+      <p:sp>
+        <p:nvSpPr>
+          <p:cNvPr id="4" name="TextBox 3"/>
+          <p:cNvSpPr txBox="1"/>
+          <p:nvPr/>
+        </p:nvSpPr>
+        <p:spPr>
+          <a:xfrm>
+            <a:off x="7315200" y="6437376"/>
+            <a:ext cx="4370832" cy="256032"/>
+          </a:xfrm>
+          <a:prstGeom prst="rect">
+            <a:avLst/>
+          </a:prstGeom>
+          <a:noFill/>
+        </p:spPr>
+        <p:txBody>
+          <a:bodyPr wrap="square" anchor="t" lIns="0" rIns="0" tIns="0" bIns="0">
+            <a:spAutoFit/>
+          </a:bodyPr>
+          <a:lstStyle/>
+          <a:p>
+            <a:pPr algn="r"/>
+            <a:r>
+              <a:rPr sz="950" b="0">
+                <a:solidFill>
+                  <a:srgbClr val="9AA6B2"/>
+                </a:solidFill>
+                <a:latin typeface="Segoe UI"/>
+              </a:rPr>
+              <a:t>   ·   Expone: Nicolás Zyngale</a:t>
+            </a:r>
+          </a:p>
+        </p:txBody>
+      </p:sp>
     </p:spTree>
   </p:cSld>
   <p:clrMapOvr>
@@ -4974,20 +4565,90 @@
       <p:grpSpPr/>
       <p:sp>
         <p:nvSpPr>
-          <p:cNvPr id="2" name="Rectangle 1"/>
+          <p:cNvPr id="2" name="TextBox 1"/>
+          <p:cNvSpPr txBox="1"/>
+          <p:nvPr/>
+        </p:nvSpPr>
+        <p:spPr>
+          <a:xfrm>
+            <a:off x="640080" y="502920"/>
+            <a:ext cx="10972800" cy="640080"/>
+          </a:xfrm>
+          <a:prstGeom prst="rect">
+            <a:avLst/>
+          </a:prstGeom>
+          <a:noFill/>
+        </p:spPr>
+        <p:txBody>
+          <a:bodyPr wrap="square" anchor="t" lIns="0" rIns="0" tIns="0" bIns="0">
+            <a:spAutoFit/>
+          </a:bodyPr>
+          <a:lstStyle/>
+          <a:p>
+            <a:pPr algn="l"/>
+            <a:r>
+              <a:rPr sz="3000" b="1">
+                <a:solidFill>
+                  <a:srgbClr val="1F4E79"/>
+                </a:solidFill>
+                <a:latin typeface="Segoe UI"/>
+              </a:rPr>
+              <a:t>¿Por qué alcanza para arrancar? ¿Cuáles son sus límites?</a:t>
+            </a:r>
+          </a:p>
+        </p:txBody>
+      </p:sp>
+      <p:sp>
+        <p:nvSpPr>
+          <p:cNvPr id="3" name="TextBox 2"/>
+          <p:cNvSpPr txBox="1"/>
+          <p:nvPr/>
+        </p:nvSpPr>
+        <p:spPr>
+          <a:xfrm>
+            <a:off x="658368" y="1170432"/>
+            <a:ext cx="10972800" cy="365760"/>
+          </a:xfrm>
+          <a:prstGeom prst="rect">
+            <a:avLst/>
+          </a:prstGeom>
+          <a:noFill/>
+        </p:spPr>
+        <p:txBody>
+          <a:bodyPr wrap="square" anchor="t" lIns="0" rIns="0" tIns="0" bIns="0">
+            <a:spAutoFit/>
+          </a:bodyPr>
+          <a:lstStyle/>
+          <a:p>
+            <a:pPr algn="l"/>
+            <a:r>
+              <a:rPr sz="1450" b="0">
+                <a:solidFill>
+                  <a:srgbClr val="7A7A7A"/>
+                </a:solidFill>
+                <a:latin typeface="Segoe UI"/>
+              </a:rPr>
+              <a:t>El monolito como decisión deliberada, no como pecado</a:t>
+            </a:r>
+          </a:p>
+        </p:txBody>
+      </p:sp>
+      <p:sp>
+        <p:nvSpPr>
+          <p:cNvPr id="4" name="Rectangle 3"/>
           <p:cNvSpPr/>
           <p:nvPr/>
         </p:nvSpPr>
         <p:spPr>
           <a:xfrm>
-            <a:off x="0" y="0"/>
-            <a:ext cx="12191695" cy="6858000"/>
+            <a:off x="640080" y="1783080"/>
+            <a:ext cx="5394960" cy="4160520"/>
           </a:xfrm>
           <a:prstGeom prst="rect">
             <a:avLst/>
           </a:prstGeom>
           <a:solidFill>
-            <a:srgbClr val="F8FAFC"/>
+            <a:srgbClr val="ECF0F3"/>
           </a:solidFill>
           <a:ln>
             <a:noFill/>
@@ -5018,20 +4679,20 @@
       </p:sp>
       <p:sp>
         <p:nvSpPr>
-          <p:cNvPr id="3" name="Rectangle 2"/>
+          <p:cNvPr id="5" name="Rectangle 4"/>
           <p:cNvSpPr/>
           <p:nvPr/>
         </p:nvSpPr>
         <p:spPr>
           <a:xfrm>
-            <a:off x="0" y="0"/>
-            <a:ext cx="146304" cy="6858000"/>
+            <a:off x="640080" y="1783080"/>
+            <a:ext cx="5394960" cy="82296"/>
           </a:xfrm>
           <a:prstGeom prst="rect">
             <a:avLst/>
           </a:prstGeom>
           <a:solidFill>
-            <a:srgbClr val="2563EB"/>
+            <a:srgbClr val="1F4E79"/>
           </a:solidFill>
           <a:ln>
             <a:noFill/>
@@ -5062,95 +4723,14 @@
       </p:sp>
       <p:sp>
         <p:nvSpPr>
-          <p:cNvPr id="4" name="Rounded Rectangle 3"/>
-          <p:cNvSpPr/>
-          <p:nvPr/>
-        </p:nvSpPr>
-        <p:spPr>
-          <a:xfrm>
-            <a:off x="502920" y="384048"/>
-            <a:ext cx="1911096" cy="301752"/>
-          </a:xfrm>
-          <a:prstGeom prst="roundRect">
-            <a:avLst>
-              <a:gd name="adj" fmla="val 50000"/>
-            </a:avLst>
-          </a:prstGeom>
-          <a:solidFill>
-            <a:srgbClr val="2563EB"/>
-          </a:solidFill>
-          <a:ln>
-            <a:noFill/>
-          </a:ln>
-          <a:effectLst/>
-        </p:spPr>
-        <p:style>
-          <a:lnRef idx="1">
-            <a:schemeClr val="accent1"/>
-          </a:lnRef>
-          <a:fillRef idx="3">
-            <a:schemeClr val="accent1"/>
-          </a:fillRef>
-          <a:effectRef idx="2">
-            <a:schemeClr val="accent1"/>
-          </a:effectRef>
-          <a:fontRef idx="minor">
-            <a:schemeClr val="lt1"/>
-          </a:fontRef>
-        </p:style>
-        <p:txBody>
-          <a:bodyPr rtlCol="0" anchor="ctr"/>
-          <a:lstStyle/>
-          <a:p>
-            <a:pPr algn="ctr"/>
-          </a:p>
-        </p:txBody>
-      </p:sp>
-      <p:sp>
-        <p:nvSpPr>
-          <p:cNvPr id="5" name="TextBox 4"/>
-          <p:cNvSpPr txBox="1"/>
-          <p:nvPr/>
-        </p:nvSpPr>
-        <p:spPr>
-          <a:xfrm>
-            <a:off x="502920" y="384048"/>
-            <a:ext cx="1911096" cy="301752"/>
-          </a:xfrm>
-          <a:prstGeom prst="rect">
-            <a:avLst/>
-          </a:prstGeom>
-          <a:noFill/>
-        </p:spPr>
-        <p:txBody>
-          <a:bodyPr wrap="square" anchor="ctr" lIns="0" rIns="0" tIns="0" bIns="0">
-            <a:spAutoFit/>
-          </a:bodyPr>
-          <a:lstStyle/>
-          <a:p>
-            <a:pPr algn="ctr"/>
-            <a:r>
-              <a:rPr sz="1100" b="1">
-                <a:solidFill>
-                  <a:srgbClr val="FFFFFF"/>
-                </a:solidFill>
-                <a:latin typeface="Segoe UI"/>
-              </a:rPr>
-              <a:t>FASE 1 · JUSTIFICACIÓN</a:t>
-            </a:r>
-          </a:p>
-        </p:txBody>
-      </p:sp>
-      <p:sp>
-        <p:nvSpPr>
           <p:cNvPr id="6" name="TextBox 5"/>
           <p:cNvSpPr txBox="1"/>
           <p:nvPr/>
         </p:nvSpPr>
         <p:spPr>
           <a:xfrm>
-            <a:off x="502920" y="694944"/>
-            <a:ext cx="11155680" cy="914400"/>
+            <a:off x="914400" y="2011680"/>
+            <a:ext cx="4892040" cy="365760"/>
           </a:xfrm>
           <a:prstGeom prst="rect">
             <a:avLst/>
@@ -5163,174 +4743,29 @@
           </a:bodyPr>
           <a:lstStyle/>
           <a:p>
-            <a:pPr algn="l">
-              <a:spcAft>
-                <a:spcPts val="200"/>
-              </a:spcAft>
-            </a:pPr>
-            <a:r>
-              <a:rPr sz="2600" b="1">
-                <a:solidFill>
-                  <a:srgbClr val="0F172A"/>
-                </a:solidFill>
-                <a:latin typeface="Segoe UI"/>
-              </a:rPr>
-              <a:t>¿Por qué alcanza para arrancar? ¿Cuáles son sus límites?</a:t>
-            </a:r>
-          </a:p>
-          <a:p>
             <a:pPr algn="l"/>
             <a:r>
-              <a:rPr sz="1400" b="0">
-                <a:solidFill>
-                  <a:srgbClr val="64748B"/>
-                </a:solidFill>
-                <a:latin typeface="Segoe UI"/>
-              </a:rPr>
-              <a:t>El monolito como decisión deliberada, no como pecado</a:t>
-            </a:r>
-          </a:p>
-        </p:txBody>
-      </p:sp>
-      <p:sp>
-        <p:nvSpPr>
-          <p:cNvPr id="7" name="Rounded Rectangle 6"/>
-          <p:cNvSpPr/>
-          <p:nvPr/>
-        </p:nvSpPr>
-        <p:spPr>
-          <a:xfrm>
-            <a:off x="502920" y="1691640"/>
-            <a:ext cx="5486400" cy="4160520"/>
-          </a:xfrm>
-          <a:prstGeom prst="roundRect">
-            <a:avLst>
-              <a:gd name="adj" fmla="val 4000"/>
-            </a:avLst>
-          </a:prstGeom>
-          <a:solidFill>
-            <a:srgbClr val="FFFFFF"/>
-          </a:solidFill>
-          <a:ln w="15875">
-            <a:solidFill>
-              <a:srgbClr val="A7F3D0"/>
-            </a:solidFill>
-          </a:ln>
-          <a:effectLst/>
-        </p:spPr>
-        <p:style>
-          <a:lnRef idx="1">
-            <a:schemeClr val="accent1"/>
-          </a:lnRef>
-          <a:fillRef idx="3">
-            <a:schemeClr val="accent1"/>
-          </a:fillRef>
-          <a:effectRef idx="2">
-            <a:schemeClr val="accent1"/>
-          </a:effectRef>
-          <a:fontRef idx="minor">
-            <a:schemeClr val="lt1"/>
-          </a:fontRef>
-        </p:style>
-        <p:txBody>
-          <a:bodyPr rtlCol="0" anchor="ctr"/>
-          <a:lstStyle/>
-          <a:p>
-            <a:pPr algn="ctr"/>
-          </a:p>
-        </p:txBody>
-      </p:sp>
-      <p:sp>
-        <p:nvSpPr>
-          <p:cNvPr id="8" name="Rounded Rectangle 7"/>
-          <p:cNvSpPr/>
-          <p:nvPr/>
-        </p:nvSpPr>
-        <p:spPr>
-          <a:xfrm>
-            <a:off x="731520" y="1856231"/>
-            <a:ext cx="5029200" cy="54864"/>
-          </a:xfrm>
-          <a:prstGeom prst="roundRect">
-            <a:avLst>
-              <a:gd name="adj" fmla="val 50000"/>
-            </a:avLst>
-          </a:prstGeom>
-          <a:solidFill>
-            <a:srgbClr val="059669"/>
-          </a:solidFill>
-          <a:ln>
-            <a:noFill/>
-          </a:ln>
-          <a:effectLst/>
-        </p:spPr>
-        <p:style>
-          <a:lnRef idx="1">
-            <a:schemeClr val="accent1"/>
-          </a:lnRef>
-          <a:fillRef idx="3">
-            <a:schemeClr val="accent1"/>
-          </a:fillRef>
-          <a:effectRef idx="2">
-            <a:schemeClr val="accent1"/>
-          </a:effectRef>
-          <a:fontRef idx="minor">
-            <a:schemeClr val="lt1"/>
-          </a:fontRef>
-        </p:style>
-        <p:txBody>
-          <a:bodyPr rtlCol="0" anchor="ctr"/>
-          <a:lstStyle/>
-          <a:p>
-            <a:pPr algn="ctr"/>
-          </a:p>
-        </p:txBody>
-      </p:sp>
-      <p:sp>
-        <p:nvSpPr>
-          <p:cNvPr id="9" name="TextBox 8"/>
+              <a:rPr sz="1350" b="1">
+                <a:solidFill>
+                  <a:srgbClr val="1F4E79"/>
+                </a:solidFill>
+                <a:latin typeface="Segoe UI"/>
+              </a:rPr>
+              <a:t>POR QUÉ ALCANZA PARA ARRANCAR</a:t>
+            </a:r>
+          </a:p>
+        </p:txBody>
+      </p:sp>
+      <p:sp>
+        <p:nvSpPr>
+          <p:cNvPr id="7" name="TextBox 6"/>
           <p:cNvSpPr txBox="1"/>
           <p:nvPr/>
         </p:nvSpPr>
         <p:spPr>
           <a:xfrm>
-            <a:off x="777240" y="2011680"/>
-            <a:ext cx="4937760" cy="365760"/>
-          </a:xfrm>
-          <a:prstGeom prst="rect">
-            <a:avLst/>
-          </a:prstGeom>
-          <a:noFill/>
-        </p:spPr>
-        <p:txBody>
-          <a:bodyPr wrap="square" anchor="t" lIns="0" rIns="0" tIns="0" bIns="0">
-            <a:spAutoFit/>
-          </a:bodyPr>
-          <a:lstStyle/>
-          <a:p>
-            <a:pPr algn="l"/>
-            <a:r>
-              <a:rPr sz="1400" b="1">
-                <a:solidFill>
-                  <a:srgbClr val="059669"/>
-                </a:solidFill>
-                <a:latin typeface="Segoe UI"/>
-              </a:rPr>
-              <a:t>SUFICIENTE PARA ARRANCAR</a:t>
-            </a:r>
-          </a:p>
-        </p:txBody>
-      </p:sp>
-      <p:sp>
-        <p:nvSpPr>
-          <p:cNvPr id="10" name="TextBox 9"/>
-          <p:cNvSpPr txBox="1"/>
-          <p:nvPr/>
-        </p:nvSpPr>
-        <p:spPr>
-          <a:xfrm>
-            <a:off x="868680" y="2487168"/>
-            <a:ext cx="4892040" cy="777240"/>
+            <a:off x="914400" y="2542032"/>
+            <a:ext cx="4846320" cy="822960"/>
           </a:xfrm>
           <a:prstGeom prst="rect">
             <a:avLst/>
@@ -5352,18 +4787,18 @@
               </a:spcAft>
             </a:pPr>
             <a:r>
-              <a:rPr sz="1100" b="1">
-                <a:solidFill>
-                  <a:srgbClr val="059669"/>
-                </a:solidFill>
-                <a:latin typeface="Segoe UI"/>
-              </a:rPr>
-              <a:t>●  </a:t>
+              <a:rPr sz="1050" b="1">
+                <a:solidFill>
+                  <a:srgbClr val="1F4E79"/>
+                </a:solidFill>
+                <a:latin typeface="Segoe UI"/>
+              </a:rPr>
+              <a:t>■  </a:t>
             </a:r>
             <a:r>
               <a:rPr sz="1200" b="1">
                 <a:solidFill>
-                  <a:srgbClr val="0F172A"/>
+                  <a:srgbClr val="404040"/>
                 </a:solidFill>
                 <a:latin typeface="Segoe UI"/>
               </a:rPr>
@@ -5379,25 +4814,25 @@
             <a:r>
               <a:rPr sz="1080" b="0">
                 <a:solidFill>
-                  <a:srgbClr val="334155"/>
-                </a:solidFill>
-                <a:latin typeface="Segoe UI"/>
-              </a:rPr>
-              <a:t>      Un solo despliegue, una base y un pipeline. Costo fijo USD 7–16/mes; se itera en sprints semanales.</a:t>
-            </a:r>
-          </a:p>
-        </p:txBody>
-      </p:sp>
-      <p:sp>
-        <p:nvSpPr>
-          <p:cNvPr id="11" name="TextBox 10"/>
+                  <a:srgbClr val="7A7A7A"/>
+                </a:solidFill>
+                <a:latin typeface="Segoe UI"/>
+              </a:rPr>
+              <a:t>      Un deploy, una base y un pipeline. USD 7–16/mes; sprints semanales.</a:t>
+            </a:r>
+          </a:p>
+        </p:txBody>
+      </p:sp>
+      <p:sp>
+        <p:nvSpPr>
+          <p:cNvPr id="8" name="TextBox 7"/>
           <p:cNvSpPr txBox="1"/>
           <p:nvPr/>
         </p:nvSpPr>
         <p:spPr>
           <a:xfrm>
-            <a:off x="868680" y="3310128"/>
-            <a:ext cx="4892040" cy="777240"/>
+            <a:off x="914400" y="3383279"/>
+            <a:ext cx="4846320" cy="822960"/>
           </a:xfrm>
           <a:prstGeom prst="rect">
             <a:avLst/>
@@ -5419,18 +4854,18 @@
               </a:spcAft>
             </a:pPr>
             <a:r>
-              <a:rPr sz="1100" b="1">
-                <a:solidFill>
-                  <a:srgbClr val="059669"/>
-                </a:solidFill>
-                <a:latin typeface="Segoe UI"/>
-              </a:rPr>
-              <a:t>●  </a:t>
+              <a:rPr sz="1050" b="1">
+                <a:solidFill>
+                  <a:srgbClr val="1F4E79"/>
+                </a:solidFill>
+                <a:latin typeface="Segoe UI"/>
+              </a:rPr>
+              <a:t>■  </a:t>
             </a:r>
             <a:r>
               <a:rPr sz="1200" b="1">
                 <a:solidFill>
-                  <a:srgbClr val="0F172A"/>
+                  <a:srgbClr val="404040"/>
                 </a:solidFill>
                 <a:latin typeface="Segoe UI"/>
               </a:rPr>
@@ -5446,25 +4881,25 @@
             <a:r>
               <a:rPr sz="1080" b="0">
                 <a:solidFill>
-                  <a:srgbClr val="334155"/>
-                </a:solidFill>
-                <a:latin typeface="Segoe UI"/>
-              </a:rPr>
-              <a:t>      Node.js comparte ecosistema con el frontend (TypeScript full-stack): menos fricción, más velocidad.</a:t>
-            </a:r>
-          </a:p>
-        </p:txBody>
-      </p:sp>
-      <p:sp>
-        <p:nvSpPr>
-          <p:cNvPr id="12" name="TextBox 11"/>
+                  <a:srgbClr val="7A7A7A"/>
+                </a:solidFill>
+                <a:latin typeface="Segoe UI"/>
+              </a:rPr>
+              <a:t>      Node.js comparte ecosistema con el frontend (TypeScript full-stack).</a:t>
+            </a:r>
+          </a:p>
+        </p:txBody>
+      </p:sp>
+      <p:sp>
+        <p:nvSpPr>
+          <p:cNvPr id="9" name="TextBox 8"/>
           <p:cNvSpPr txBox="1"/>
           <p:nvPr/>
         </p:nvSpPr>
         <p:spPr>
           <a:xfrm>
-            <a:off x="868680" y="4133088"/>
-            <a:ext cx="4892040" cy="777240"/>
+            <a:off x="914400" y="4224528"/>
+            <a:ext cx="4846320" cy="822960"/>
           </a:xfrm>
           <a:prstGeom prst="rect">
             <a:avLst/>
@@ -5486,18 +4921,18 @@
               </a:spcAft>
             </a:pPr>
             <a:r>
-              <a:rPr sz="1100" b="1">
-                <a:solidFill>
-                  <a:srgbClr val="059669"/>
-                </a:solidFill>
-                <a:latin typeface="Segoe UI"/>
-              </a:rPr>
-              <a:t>●  </a:t>
+              <a:rPr sz="1050" b="1">
+                <a:solidFill>
+                  <a:srgbClr val="1F4E79"/>
+                </a:solidFill>
+                <a:latin typeface="Segoe UI"/>
+              </a:rPr>
+              <a:t>■  </a:t>
             </a:r>
             <a:r>
               <a:rPr sz="1200" b="1">
                 <a:solidFill>
-                  <a:srgbClr val="0F172A"/>
+                  <a:srgbClr val="404040"/>
                 </a:solidFill>
                 <a:latin typeface="Segoe UI"/>
               </a:rPr>
@@ -5513,25 +4948,25 @@
             <a:r>
               <a:rPr sz="1080" b="0">
                 <a:solidFill>
-                  <a:srgbClr val="334155"/>
-                </a:solidFill>
-                <a:latin typeface="Segoe UI"/>
-              </a:rPr>
-              <a:t>      El sistema es 95% lecturas/escrituras, sin cómputo pesado: Express + Prisma rinde de sobra.</a:t>
-            </a:r>
-          </a:p>
-        </p:txBody>
-      </p:sp>
-      <p:sp>
-        <p:nvSpPr>
-          <p:cNvPr id="13" name="TextBox 12"/>
+                  <a:srgbClr val="7A7A7A"/>
+                </a:solidFill>
+                <a:latin typeface="Segoe UI"/>
+              </a:rPr>
+              <a:t>      95% lecturas/escrituras, sin cómputo pesado: Express + Prisma rinde.</a:t>
+            </a:r>
+          </a:p>
+        </p:txBody>
+      </p:sp>
+      <p:sp>
+        <p:nvSpPr>
+          <p:cNvPr id="10" name="TextBox 9"/>
           <p:cNvSpPr txBox="1"/>
           <p:nvPr/>
         </p:nvSpPr>
         <p:spPr>
           <a:xfrm>
-            <a:off x="868680" y="4956048"/>
-            <a:ext cx="4892040" cy="777240"/>
+            <a:off x="914400" y="5065776"/>
+            <a:ext cx="4846320" cy="822960"/>
           </a:xfrm>
           <a:prstGeom prst="rect">
             <a:avLst/>
@@ -5553,18 +4988,18 @@
               </a:spcAft>
             </a:pPr>
             <a:r>
-              <a:rPr sz="1100" b="1">
-                <a:solidFill>
-                  <a:srgbClr val="059669"/>
-                </a:solidFill>
-                <a:latin typeface="Segoe UI"/>
-              </a:rPr>
-              <a:t>●  </a:t>
+              <a:rPr sz="1050" b="1">
+                <a:solidFill>
+                  <a:srgbClr val="1F4E79"/>
+                </a:solidFill>
+                <a:latin typeface="Segoe UI"/>
+              </a:rPr>
+              <a:t>■  </a:t>
             </a:r>
             <a:r>
               <a:rPr sz="1200" b="1">
                 <a:solidFill>
-                  <a:srgbClr val="0F172A"/>
+                  <a:srgbClr val="404040"/>
                 </a:solidFill>
                 <a:latin typeface="Segoe UI"/>
               </a:rPr>
@@ -5580,38 +5015,34 @@
             <a:r>
               <a:rPr sz="1080" b="0">
                 <a:solidFill>
-                  <a:srgbClr val="334155"/>
-                </a:solidFill>
-                <a:latin typeface="Segoe UI"/>
-              </a:rPr>
-              <a:t>      Los módulos ya tienen límites claros: son los futuros microservicios. Abarata la Fase 2.</a:t>
-            </a:r>
-          </a:p>
-        </p:txBody>
-      </p:sp>
-      <p:sp>
-        <p:nvSpPr>
-          <p:cNvPr id="14" name="Rounded Rectangle 13"/>
+                  <a:srgbClr val="7A7A7A"/>
+                </a:solidFill>
+                <a:latin typeface="Segoe UI"/>
+              </a:rPr>
+              <a:t>      Los módulos ya son los futuros microservicios. Abarata la Fase 2.</a:t>
+            </a:r>
+          </a:p>
+        </p:txBody>
+      </p:sp>
+      <p:sp>
+        <p:nvSpPr>
+          <p:cNvPr id="11" name="Rectangle 10"/>
           <p:cNvSpPr/>
           <p:nvPr/>
         </p:nvSpPr>
         <p:spPr>
           <a:xfrm>
-            <a:off x="6217920" y="1691640"/>
-            <a:ext cx="5468112" cy="4160520"/>
-          </a:xfrm>
-          <a:prstGeom prst="roundRect">
-            <a:avLst>
-              <a:gd name="adj" fmla="val 4000"/>
-            </a:avLst>
+            <a:off x="6172200" y="1783080"/>
+            <a:ext cx="5376672" cy="4160520"/>
+          </a:xfrm>
+          <a:prstGeom prst="rect">
+            <a:avLst/>
           </a:prstGeom>
           <a:solidFill>
-            <a:srgbClr val="FFFFFF"/>
+            <a:srgbClr val="ECF0F3"/>
           </a:solidFill>
-          <a:ln w="15875">
-            <a:solidFill>
-              <a:srgbClr val="FECACA"/>
-            </a:solidFill>
+          <a:ln>
+            <a:noFill/>
           </a:ln>
           <a:effectLst/>
         </p:spPr>
@@ -5639,22 +5070,20 @@
       </p:sp>
       <p:sp>
         <p:nvSpPr>
-          <p:cNvPr id="15" name="Rounded Rectangle 14"/>
+          <p:cNvPr id="12" name="Rectangle 11"/>
           <p:cNvSpPr/>
           <p:nvPr/>
         </p:nvSpPr>
         <p:spPr>
           <a:xfrm>
-            <a:off x="6446520" y="1856231"/>
-            <a:ext cx="5010912" cy="54864"/>
-          </a:xfrm>
-          <a:prstGeom prst="roundRect">
-            <a:avLst>
-              <a:gd name="adj" fmla="val 50000"/>
-            </a:avLst>
+            <a:off x="6172200" y="1783080"/>
+            <a:ext cx="5376672" cy="82296"/>
+          </a:xfrm>
+          <a:prstGeom prst="rect">
+            <a:avLst/>
           </a:prstGeom>
           <a:solidFill>
-            <a:srgbClr val="DC2626"/>
+            <a:srgbClr val="E8741E"/>
           </a:solidFill>
           <a:ln>
             <a:noFill/>
@@ -5685,14 +5114,14 @@
       </p:sp>
       <p:sp>
         <p:nvSpPr>
-          <p:cNvPr id="16" name="TextBox 15"/>
+          <p:cNvPr id="13" name="TextBox 12"/>
           <p:cNvSpPr txBox="1"/>
           <p:nvPr/>
         </p:nvSpPr>
         <p:spPr>
           <a:xfrm>
-            <a:off x="6492240" y="2011680"/>
-            <a:ext cx="4937760" cy="365760"/>
+            <a:off x="6446520" y="2011680"/>
+            <a:ext cx="4892040" cy="365760"/>
           </a:xfrm>
           <a:prstGeom prst="rect">
             <a:avLst/>
@@ -5707,9 +5136,9 @@
           <a:p>
             <a:pPr algn="l"/>
             <a:r>
-              <a:rPr sz="1400" b="1">
-                <a:solidFill>
-                  <a:srgbClr val="DC2626"/>
+              <a:rPr sz="1350" b="1">
+                <a:solidFill>
+                  <a:srgbClr val="C75F12"/>
                 </a:solidFill>
                 <a:latin typeface="Segoe UI"/>
               </a:rPr>
@@ -5720,14 +5149,14 @@
       </p:sp>
       <p:sp>
         <p:nvSpPr>
-          <p:cNvPr id="17" name="TextBox 16"/>
+          <p:cNvPr id="14" name="TextBox 13"/>
           <p:cNvSpPr txBox="1"/>
           <p:nvPr/>
         </p:nvSpPr>
         <p:spPr>
           <a:xfrm>
-            <a:off x="6583680" y="2487168"/>
-            <a:ext cx="4846320" cy="640080"/>
+            <a:off x="6446520" y="2542032"/>
+            <a:ext cx="4846320" cy="658368"/>
           </a:xfrm>
           <a:prstGeom prst="rect">
             <a:avLst/>
@@ -5749,18 +5178,18 @@
               </a:spcAft>
             </a:pPr>
             <a:r>
-              <a:rPr sz="1100" b="1">
-                <a:solidFill>
-                  <a:srgbClr val="DC2626"/>
-                </a:solidFill>
-                <a:latin typeface="Segoe UI"/>
-              </a:rPr>
-              <a:t>●  </a:t>
+              <a:rPr sz="1050" b="1">
+                <a:solidFill>
+                  <a:srgbClr val="E8741E"/>
+                </a:solidFill>
+                <a:latin typeface="Segoe UI"/>
+              </a:rPr>
+              <a:t>■  </a:t>
             </a:r>
             <a:r>
               <a:rPr sz="1200" b="1">
                 <a:solidFill>
-                  <a:srgbClr val="0F172A"/>
+                  <a:srgbClr val="404040"/>
                 </a:solidFill>
                 <a:latin typeface="Segoe UI"/>
               </a:rPr>
@@ -5776,25 +5205,25 @@
             <a:r>
               <a:rPr sz="1080" b="0">
                 <a:solidFill>
-                  <a:srgbClr val="334155"/>
-                </a:solidFill>
-                <a:latin typeface="Segoe UI"/>
-              </a:rPr>
-              <a:t>      Un pico en Rutinas obliga a escalar TODO el monolito.</a:t>
-            </a:r>
-          </a:p>
-        </p:txBody>
-      </p:sp>
-      <p:sp>
-        <p:nvSpPr>
-          <p:cNvPr id="18" name="TextBox 17"/>
+                  <a:srgbClr val="7A7A7A"/>
+                </a:solidFill>
+                <a:latin typeface="Segoe UI"/>
+              </a:rPr>
+              <a:t>      Un pico en Rutinas obliga a escalar todo el monolito.</a:t>
+            </a:r>
+          </a:p>
+        </p:txBody>
+      </p:sp>
+      <p:sp>
+        <p:nvSpPr>
+          <p:cNvPr id="15" name="TextBox 14"/>
           <p:cNvSpPr txBox="1"/>
           <p:nvPr/>
         </p:nvSpPr>
         <p:spPr>
           <a:xfrm>
-            <a:off x="6583680" y="3145536"/>
-            <a:ext cx="4846320" cy="640080"/>
+            <a:off x="6446520" y="3214115"/>
+            <a:ext cx="4846320" cy="658368"/>
           </a:xfrm>
           <a:prstGeom prst="rect">
             <a:avLst/>
@@ -5816,18 +5245,18 @@
               </a:spcAft>
             </a:pPr>
             <a:r>
-              <a:rPr sz="1100" b="1">
-                <a:solidFill>
-                  <a:srgbClr val="DC2626"/>
-                </a:solidFill>
-                <a:latin typeface="Segoe UI"/>
-              </a:rPr>
-              <a:t>●  </a:t>
+              <a:rPr sz="1050" b="1">
+                <a:solidFill>
+                  <a:srgbClr val="E8741E"/>
+                </a:solidFill>
+                <a:latin typeface="Segoe UI"/>
+              </a:rPr>
+              <a:t>■  </a:t>
             </a:r>
             <a:r>
               <a:rPr sz="1200" b="1">
                 <a:solidFill>
-                  <a:srgbClr val="0F172A"/>
+                  <a:srgbClr val="404040"/>
                 </a:solidFill>
                 <a:latin typeface="Segoe UI"/>
               </a:rPr>
@@ -5843,25 +5272,25 @@
             <a:r>
               <a:rPr sz="1080" b="0">
                 <a:solidFill>
-                  <a:srgbClr val="334155"/>
-                </a:solidFill>
-                <a:latin typeface="Segoe UI"/>
-              </a:rPr>
-              <a:t>      Un deploy defectuoso de cualquier módulo tumba el sistema completo.</a:t>
-            </a:r>
-          </a:p>
-        </p:txBody>
-      </p:sp>
-      <p:sp>
-        <p:nvSpPr>
-          <p:cNvPr id="19" name="TextBox 18"/>
+                  <a:srgbClr val="7A7A7A"/>
+                </a:solidFill>
+                <a:latin typeface="Segoe UI"/>
+              </a:rPr>
+              <a:t>      Un deploy defectuoso de un módulo tumba todo el sistema.</a:t>
+            </a:r>
+          </a:p>
+        </p:txBody>
+      </p:sp>
+      <p:sp>
+        <p:nvSpPr>
+          <p:cNvPr id="16" name="TextBox 15"/>
           <p:cNvSpPr txBox="1"/>
           <p:nvPr/>
         </p:nvSpPr>
         <p:spPr>
           <a:xfrm>
-            <a:off x="6583680" y="3803904"/>
-            <a:ext cx="4846320" cy="640080"/>
+            <a:off x="6446520" y="3886200"/>
+            <a:ext cx="4846320" cy="658368"/>
           </a:xfrm>
           <a:prstGeom prst="rect">
             <a:avLst/>
@@ -5883,18 +5312,18 @@
               </a:spcAft>
             </a:pPr>
             <a:r>
-              <a:rPr sz="1100" b="1">
-                <a:solidFill>
-                  <a:srgbClr val="DC2626"/>
-                </a:solidFill>
-                <a:latin typeface="Segoe UI"/>
-              </a:rPr>
-              <a:t>●  </a:t>
+              <a:rPr sz="1050" b="1">
+                <a:solidFill>
+                  <a:srgbClr val="E8741E"/>
+                </a:solidFill>
+                <a:latin typeface="Segoe UI"/>
+              </a:rPr>
+              <a:t>■  </a:t>
             </a:r>
             <a:r>
               <a:rPr sz="1200" b="1">
                 <a:solidFill>
-                  <a:srgbClr val="0F172A"/>
+                  <a:srgbClr val="404040"/>
                 </a:solidFill>
                 <a:latin typeface="Segoe UI"/>
               </a:rPr>
@@ -5910,25 +5339,25 @@
             <a:r>
               <a:rPr sz="1080" b="0">
                 <a:solidFill>
-                  <a:srgbClr val="334155"/>
-                </a:solidFill>
-                <a:latin typeface="Segoe UI"/>
-              </a:rPr>
-              <a:t>      Una query pesada de reportes degrada las operaciones transaccionales.</a:t>
-            </a:r>
-          </a:p>
-        </p:txBody>
-      </p:sp>
-      <p:sp>
-        <p:nvSpPr>
-          <p:cNvPr id="20" name="TextBox 19"/>
+                  <a:srgbClr val="7A7A7A"/>
+                </a:solidFill>
+                <a:latin typeface="Segoe UI"/>
+              </a:rPr>
+              <a:t>      Una query pesada de reportes degrada lo transaccional.</a:t>
+            </a:r>
+          </a:p>
+        </p:txBody>
+      </p:sp>
+      <p:sp>
+        <p:nvSpPr>
+          <p:cNvPr id="17" name="TextBox 16"/>
           <p:cNvSpPr txBox="1"/>
           <p:nvPr/>
         </p:nvSpPr>
         <p:spPr>
           <a:xfrm>
-            <a:off x="6583680" y="4462272"/>
-            <a:ext cx="4846320" cy="640080"/>
+            <a:off x="6446520" y="4558284"/>
+            <a:ext cx="4846320" cy="658368"/>
           </a:xfrm>
           <a:prstGeom prst="rect">
             <a:avLst/>
@@ -5950,18 +5379,18 @@
               </a:spcAft>
             </a:pPr>
             <a:r>
-              <a:rPr sz="1100" b="1">
-                <a:solidFill>
-                  <a:srgbClr val="DC2626"/>
-                </a:solidFill>
-                <a:latin typeface="Segoe UI"/>
-              </a:rPr>
-              <a:t>●  </a:t>
+              <a:rPr sz="1050" b="1">
+                <a:solidFill>
+                  <a:srgbClr val="E8741E"/>
+                </a:solidFill>
+                <a:latin typeface="Segoe UI"/>
+              </a:rPr>
+              <a:t>■  </a:t>
             </a:r>
             <a:r>
               <a:rPr sz="1200" b="1">
                 <a:solidFill>
-                  <a:srgbClr val="0F172A"/>
+                  <a:srgbClr val="404040"/>
                 </a:solidFill>
                 <a:latin typeface="Segoe UI"/>
               </a:rPr>
@@ -5977,25 +5406,25 @@
             <a:r>
               <a:rPr sz="1080" b="0">
                 <a:solidFill>
-                  <a:srgbClr val="334155"/>
-                </a:solidFill>
-                <a:latin typeface="Segoe UI"/>
-              </a:rPr>
-              <a:t>      Varios equipos generan merge conflicts y releases que coordinar.</a:t>
-            </a:r>
-          </a:p>
-        </p:txBody>
-      </p:sp>
-      <p:sp>
-        <p:nvSpPr>
-          <p:cNvPr id="21" name="TextBox 20"/>
+                  <a:srgbClr val="7A7A7A"/>
+                </a:solidFill>
+                <a:latin typeface="Segoe UI"/>
+              </a:rPr>
+              <a:t>      Varios equipos: merge conflicts y releases que coordinar.</a:t>
+            </a:r>
+          </a:p>
+        </p:txBody>
+      </p:sp>
+      <p:sp>
+        <p:nvSpPr>
+          <p:cNvPr id="18" name="TextBox 17"/>
           <p:cNvSpPr txBox="1"/>
           <p:nvPr/>
         </p:nvSpPr>
         <p:spPr>
           <a:xfrm>
-            <a:off x="6583680" y="5120640"/>
-            <a:ext cx="4846320" cy="640080"/>
+            <a:off x="6446520" y="5230368"/>
+            <a:ext cx="4846320" cy="658368"/>
           </a:xfrm>
           <a:prstGeom prst="rect">
             <a:avLst/>
@@ -6017,18 +5446,18 @@
               </a:spcAft>
             </a:pPr>
             <a:r>
-              <a:rPr sz="1100" b="1">
-                <a:solidFill>
-                  <a:srgbClr val="DC2626"/>
-                </a:solidFill>
-                <a:latin typeface="Segoe UI"/>
-              </a:rPr>
-              <a:t>●  </a:t>
+              <a:rPr sz="1050" b="1">
+                <a:solidFill>
+                  <a:srgbClr val="E8741E"/>
+                </a:solidFill>
+                <a:latin typeface="Segoe UI"/>
+              </a:rPr>
+              <a:t>■  </a:t>
             </a:r>
             <a:r>
               <a:rPr sz="1200" b="1">
                 <a:solidFill>
-                  <a:srgbClr val="0F172A"/>
+                  <a:srgbClr val="404040"/>
                 </a:solidFill>
                 <a:latin typeface="Segoe UI"/>
               </a:rPr>
@@ -6044,31 +5473,31 @@
             <a:r>
               <a:rPr sz="1080" b="0">
                 <a:solidFill>
-                  <a:srgbClr val="334155"/>
-                </a:solidFill>
-                <a:latin typeface="Segoe UI"/>
-              </a:rPr>
-              <a:t>      Render/Railway no ofrecen autoscaling granular ni SLAs.</a:t>
-            </a:r>
-          </a:p>
-        </p:txBody>
-      </p:sp>
-      <p:sp>
-        <p:nvSpPr>
-          <p:cNvPr id="22" name="Rectangle 21"/>
+                  <a:srgbClr val="7A7A7A"/>
+                </a:solidFill>
+                <a:latin typeface="Segoe UI"/>
+              </a:rPr>
+              <a:t>      Render/Railway no dan autoscaling granular ni SLAs.</a:t>
+            </a:r>
+          </a:p>
+        </p:txBody>
+      </p:sp>
+      <p:sp>
+        <p:nvSpPr>
+          <p:cNvPr id="19" name="Rectangle 18"/>
           <p:cNvSpPr/>
           <p:nvPr/>
         </p:nvSpPr>
         <p:spPr>
           <a:xfrm>
-            <a:off x="502920" y="6437376"/>
-            <a:ext cx="11183112" cy="10972"/>
+            <a:off x="0" y="6739128"/>
+            <a:ext cx="12191695" cy="118872"/>
           </a:xfrm>
           <a:prstGeom prst="rect">
             <a:avLst/>
           </a:prstGeom>
           <a:solidFill>
-            <a:srgbClr val="E2E8F0"/>
+            <a:srgbClr val="E8741E"/>
           </a:solidFill>
           <a:ln>
             <a:noFill/>
@@ -6099,14 +5528,14 @@
       </p:sp>
       <p:sp>
         <p:nvSpPr>
-          <p:cNvPr id="23" name="TextBox 22"/>
+          <p:cNvPr id="20" name="TextBox 19"/>
           <p:cNvSpPr txBox="1"/>
           <p:nvPr/>
         </p:nvSpPr>
         <p:spPr>
           <a:xfrm>
-            <a:off x="502920" y="6492240"/>
-            <a:ext cx="7315200" cy="274320"/>
+            <a:off x="7315200" y="6437376"/>
+            <a:ext cx="4370832" cy="256032"/>
           </a:xfrm>
           <a:prstGeom prst="rect">
             <a:avLst/>
@@ -6119,50 +5548,15 @@
           </a:bodyPr>
           <a:lstStyle/>
           <a:p>
-            <a:pPr algn="l"/>
+            <a:pPr algn="r"/>
             <a:r>
               <a:rPr sz="950" b="0">
                 <a:solidFill>
-                  <a:srgbClr val="94A3B8"/>
-                </a:solidFill>
-                <a:latin typeface="Segoe UI"/>
-              </a:rPr>
-              <a:t>TrainerOS — TFI Desarrollo de Aplicaciones Web</a:t>
-            </a:r>
-          </a:p>
-        </p:txBody>
-      </p:sp>
-      <p:sp>
-        <p:nvSpPr>
-          <p:cNvPr id="24" name="TextBox 23"/>
-          <p:cNvSpPr txBox="1"/>
-          <p:nvPr/>
-        </p:nvSpPr>
-        <p:spPr>
-          <a:xfrm>
-            <a:off x="7315200" y="6492240"/>
-            <a:ext cx="4370832" cy="274320"/>
-          </a:xfrm>
-          <a:prstGeom prst="rect">
-            <a:avLst/>
-          </a:prstGeom>
-          <a:noFill/>
-        </p:spPr>
-        <p:txBody>
-          <a:bodyPr wrap="square" anchor="t" lIns="0" rIns="0" tIns="0" bIns="0">
-            <a:spAutoFit/>
-          </a:bodyPr>
-          <a:lstStyle/>
-          <a:p>
-            <a:pPr algn="r"/>
-            <a:r>
-              <a:rPr sz="950" b="1">
-                <a:solidFill>
-                  <a:srgbClr val="64748B"/>
-                </a:solidFill>
-                <a:latin typeface="Segoe UI"/>
-              </a:rPr>
-              <a:t>Expone: Nicolás Zyngale    ·    4 / 12</a:t>
+                  <a:srgbClr val="9AA6B2"/>
+                </a:solidFill>
+                <a:latin typeface="Segoe UI"/>
+              </a:rPr>
+              <a:t>4 / 12   ·   Expone: Nicolás Zyngale</a:t>
             </a:r>
           </a:p>
         </p:txBody>
@@ -6187,20 +5581,90 @@
       <p:grpSpPr/>
       <p:sp>
         <p:nvSpPr>
-          <p:cNvPr id="2" name="Rectangle 1"/>
+          <p:cNvPr id="2" name="TextBox 1"/>
+          <p:cNvSpPr txBox="1"/>
+          <p:nvPr/>
+        </p:nvSpPr>
+        <p:spPr>
+          <a:xfrm>
+            <a:off x="640080" y="502920"/>
+            <a:ext cx="10972800" cy="640080"/>
+          </a:xfrm>
+          <a:prstGeom prst="rect">
+            <a:avLst/>
+          </a:prstGeom>
+          <a:noFill/>
+        </p:spPr>
+        <p:txBody>
+          <a:bodyPr wrap="square" anchor="t" lIns="0" rIns="0" tIns="0" bIns="0">
+            <a:spAutoFit/>
+          </a:bodyPr>
+          <a:lstStyle/>
+          <a:p>
+            <a:pPr algn="l"/>
+            <a:r>
+              <a:rPr sz="3000" b="1">
+                <a:solidFill>
+                  <a:srgbClr val="1F4E79"/>
+                </a:solidFill>
+                <a:latin typeface="Segoe UI"/>
+              </a:rPr>
+              <a:t>El negocio fuerza la evolución a microservicios</a:t>
+            </a:r>
+          </a:p>
+        </p:txBody>
+      </p:sp>
+      <p:sp>
+        <p:nvSpPr>
+          <p:cNvPr id="3" name="TextBox 2"/>
+          <p:cNvSpPr txBox="1"/>
+          <p:nvPr/>
+        </p:nvSpPr>
+        <p:spPr>
+          <a:xfrm>
+            <a:off x="658368" y="1170432"/>
+            <a:ext cx="10972800" cy="365760"/>
+          </a:xfrm>
+          <a:prstGeom prst="rect">
+            <a:avLst/>
+          </a:prstGeom>
+          <a:noFill/>
+        </p:spPr>
+        <p:txBody>
+          <a:bodyPr wrap="square" anchor="t" lIns="0" rIns="0" tIns="0" bIns="0">
+            <a:spAutoFit/>
+          </a:bodyPr>
+          <a:lstStyle/>
+          <a:p>
+            <a:pPr algn="l"/>
+            <a:r>
+              <a:rPr sz="1450" b="0">
+                <a:solidFill>
+                  <a:srgbClr val="7A7A7A"/>
+                </a:solidFill>
+                <a:latin typeface="Segoe UI"/>
+              </a:rPr>
+              <a:t>12 meses después: convenios B2B con dos cadenas regionales de gimnasios</a:t>
+            </a:r>
+          </a:p>
+        </p:txBody>
+      </p:sp>
+      <p:sp>
+        <p:nvSpPr>
+          <p:cNvPr id="4" name="Rectangle 3"/>
           <p:cNvSpPr/>
           <p:nvPr/>
         </p:nvSpPr>
         <p:spPr>
           <a:xfrm>
-            <a:off x="0" y="0"/>
-            <a:ext cx="12191695" cy="6858000"/>
+            <a:off x="640080" y="1737360"/>
+            <a:ext cx="10908792" cy="868680"/>
           </a:xfrm>
           <a:prstGeom prst="rect">
             <a:avLst/>
           </a:prstGeom>
           <a:solidFill>
-            <a:srgbClr val="F8FAFC"/>
+            <a:srgbClr val="1F4E79"/>
           </a:solidFill>
           <a:ln>
             <a:noFill/>
@@ -6231,20 +5695,210 @@
       </p:sp>
       <p:sp>
         <p:nvSpPr>
-          <p:cNvPr id="3" name="Rectangle 2"/>
+          <p:cNvPr id="5" name="TextBox 4"/>
+          <p:cNvSpPr txBox="1"/>
+          <p:nvPr/>
+        </p:nvSpPr>
+        <p:spPr>
+          <a:xfrm>
+            <a:off x="914400" y="1737360"/>
+            <a:ext cx="4572000" cy="868680"/>
+          </a:xfrm>
+          <a:prstGeom prst="rect">
+            <a:avLst/>
+          </a:prstGeom>
+          <a:noFill/>
+        </p:spPr>
+        <p:txBody>
+          <a:bodyPr wrap="square" anchor="ctr" lIns="0" rIns="0" tIns="0" bIns="0">
+            <a:spAutoFit/>
+          </a:bodyPr>
+          <a:lstStyle/>
+          <a:p>
+            <a:pPr algn="l">
+              <a:spcAft>
+                <a:spcPts val="100"/>
+              </a:spcAft>
+            </a:pPr>
+            <a:r>
+              <a:rPr sz="1300" b="0">
+                <a:solidFill>
+                  <a:srgbClr val="AEBFCE"/>
+                </a:solidFill>
+                <a:latin typeface="Segoe UI"/>
+              </a:rPr>
+              <a:t>De </a:t>
+            </a:r>
+            <a:r>
+              <a:rPr sz="1800" b="1">
+                <a:solidFill>
+                  <a:srgbClr val="FFFFFF"/>
+                </a:solidFill>
+                <a:latin typeface="Segoe UI"/>
+              </a:rPr>
+              <a:t>100 entrenadores</a:t>
+            </a:r>
+          </a:p>
+          <a:p>
+            <a:pPr algn="l"/>
+            <a:r>
+              <a:rPr sz="1100" b="0">
+                <a:solidFill>
+                  <a:srgbClr val="AEBFCE"/>
+                </a:solidFill>
+                <a:latin typeface="Segoe UI"/>
+              </a:rPr>
+              <a:t>monolito · ~5.000 alumnos</a:t>
+            </a:r>
+          </a:p>
+        </p:txBody>
+      </p:sp>
+      <p:sp>
+        <p:nvSpPr>
+          <p:cNvPr id="6" name="TextBox 5"/>
+          <p:cNvSpPr txBox="1"/>
+          <p:nvPr/>
+        </p:nvSpPr>
+        <p:spPr>
+          <a:xfrm>
+            <a:off x="5486400" y="1737360"/>
+            <a:ext cx="914400" cy="868680"/>
+          </a:xfrm>
+          <a:prstGeom prst="rect">
+            <a:avLst/>
+          </a:prstGeom>
+          <a:noFill/>
+        </p:spPr>
+        <p:txBody>
+          <a:bodyPr wrap="square" anchor="ctr" lIns="0" rIns="0" tIns="0" bIns="0">
+            <a:spAutoFit/>
+          </a:bodyPr>
+          <a:lstStyle/>
+          <a:p>
+            <a:pPr algn="ctr"/>
+            <a:r>
+              <a:rPr sz="2600" b="1">
+                <a:solidFill>
+                  <a:srgbClr val="E8741E"/>
+                </a:solidFill>
+                <a:latin typeface="Segoe UI"/>
+              </a:rPr>
+              <a:t>→</a:t>
+            </a:r>
+          </a:p>
+        </p:txBody>
+      </p:sp>
+      <p:sp>
+        <p:nvSpPr>
+          <p:cNvPr id="7" name="TextBox 6"/>
+          <p:cNvSpPr txBox="1"/>
+          <p:nvPr/>
+        </p:nvSpPr>
+        <p:spPr>
+          <a:xfrm>
+            <a:off x="6400800" y="1737360"/>
+            <a:ext cx="4937760" cy="868680"/>
+          </a:xfrm>
+          <a:prstGeom prst="rect">
+            <a:avLst/>
+          </a:prstGeom>
+          <a:noFill/>
+        </p:spPr>
+        <p:txBody>
+          <a:bodyPr wrap="square" anchor="ctr" lIns="0" rIns="0" tIns="0" bIns="0">
+            <a:spAutoFit/>
+          </a:bodyPr>
+          <a:lstStyle/>
+          <a:p>
+            <a:pPr algn="l">
+              <a:spcAft>
+                <a:spcPts val="100"/>
+              </a:spcAft>
+            </a:pPr>
+            <a:r>
+              <a:rPr sz="1300" b="0">
+                <a:solidFill>
+                  <a:srgbClr val="AEBFCE"/>
+                </a:solidFill>
+                <a:latin typeface="Segoe UI"/>
+              </a:rPr>
+              <a:t>A </a:t>
+            </a:r>
+            <a:r>
+              <a:rPr sz="1800" b="1">
+                <a:solidFill>
+                  <a:srgbClr val="E8741E"/>
+                </a:solidFill>
+                <a:latin typeface="Segoe UI"/>
+              </a:rPr>
+              <a:t>5.000 entrenadores</a:t>
+            </a:r>
+          </a:p>
+          <a:p>
+            <a:pPr algn="l"/>
+            <a:r>
+              <a:rPr sz="1100" b="0">
+                <a:solidFill>
+                  <a:srgbClr val="AEBFCE"/>
+                </a:solidFill>
+                <a:latin typeface="Segoe UI"/>
+              </a:rPr>
+              <a:t>~120.000 alumnos activos · equipos independientes</a:t>
+            </a:r>
+          </a:p>
+        </p:txBody>
+      </p:sp>
+      <p:sp>
+        <p:nvSpPr>
+          <p:cNvPr id="8" name="TextBox 7"/>
+          <p:cNvSpPr txBox="1"/>
+          <p:nvPr/>
+        </p:nvSpPr>
+        <p:spPr>
+          <a:xfrm>
+            <a:off x="640080" y="2834640"/>
+            <a:ext cx="7315200" cy="320040"/>
+          </a:xfrm>
+          <a:prstGeom prst="rect">
+            <a:avLst/>
+          </a:prstGeom>
+          <a:noFill/>
+        </p:spPr>
+        <p:txBody>
+          <a:bodyPr wrap="square" anchor="t" lIns="0" rIns="0" tIns="0" bIns="0">
+            <a:spAutoFit/>
+          </a:bodyPr>
+          <a:lstStyle/>
+          <a:p>
+            <a:pPr algn="l"/>
+            <a:r>
+              <a:rPr sz="1500" b="1">
+                <a:solidFill>
+                  <a:srgbClr val="1F4E79"/>
+                </a:solidFill>
+                <a:latin typeface="Segoe UI"/>
+              </a:rPr>
+              <a:t>Tres presiones que el monolito no resuelve</a:t>
+            </a:r>
+          </a:p>
+        </p:txBody>
+      </p:sp>
+      <p:sp>
+        <p:nvSpPr>
+          <p:cNvPr id="9" name="Rectangle 8"/>
           <p:cNvSpPr/>
           <p:nvPr/>
         </p:nvSpPr>
         <p:spPr>
           <a:xfrm>
-            <a:off x="0" y="0"/>
-            <a:ext cx="146304" cy="6858000"/>
+            <a:off x="640080" y="3291840"/>
+            <a:ext cx="3602736" cy="2468880"/>
           </a:xfrm>
           <a:prstGeom prst="rect">
             <a:avLst/>
           </a:prstGeom>
           <a:solidFill>
-            <a:srgbClr val="4F46E5"/>
+            <a:srgbClr val="ECF0F3"/>
           </a:solidFill>
           <a:ln>
             <a:noFill/>
@@ -6275,22 +5929,20 @@
       </p:sp>
       <p:sp>
         <p:nvSpPr>
-          <p:cNvPr id="4" name="Rounded Rectangle 3"/>
+          <p:cNvPr id="10" name="Rectangle 9"/>
           <p:cNvSpPr/>
           <p:nvPr/>
         </p:nvSpPr>
         <p:spPr>
           <a:xfrm>
-            <a:off x="502920" y="384048"/>
-            <a:ext cx="2299716" cy="301752"/>
-          </a:xfrm>
-          <a:prstGeom prst="roundRect">
-            <a:avLst>
-              <a:gd name="adj" fmla="val 50000"/>
-            </a:avLst>
+            <a:off x="896112" y="3520440"/>
+            <a:ext cx="548640" cy="548640"/>
+          </a:xfrm>
+          <a:prstGeom prst="rect">
+            <a:avLst/>
           </a:prstGeom>
           <a:solidFill>
-            <a:srgbClr val="4F46E5"/>
+            <a:srgbClr val="E8741E"/>
           </a:solidFill>
           <a:ln>
             <a:noFill/>
@@ -6321,14 +5973,14 @@
       </p:sp>
       <p:sp>
         <p:nvSpPr>
-          <p:cNvPr id="5" name="TextBox 4"/>
+          <p:cNvPr id="11" name="TextBox 10"/>
           <p:cNvSpPr txBox="1"/>
           <p:nvPr/>
         </p:nvSpPr>
         <p:spPr>
           <a:xfrm>
-            <a:off x="502920" y="384048"/>
-            <a:ext cx="2299716" cy="301752"/>
+            <a:off x="896112" y="3520440"/>
+            <a:ext cx="548640" cy="548640"/>
           </a:xfrm>
           <a:prstGeom prst="rect">
             <a:avLst/>
@@ -6343,489 +5995,27 @@
           <a:p>
             <a:pPr algn="ctr"/>
             <a:r>
-              <a:rPr sz="1100" b="1">
+              <a:rPr sz="2000" b="1">
                 <a:solidFill>
                   <a:srgbClr val="FFFFFF"/>
                 </a:solidFill>
                 <a:latin typeface="Segoe UI"/>
               </a:rPr>
-              <a:t>FASE 2 · CAMBIO DE CONTEXTO</a:t>
-            </a:r>
-          </a:p>
-        </p:txBody>
-      </p:sp>
-      <p:sp>
-        <p:nvSpPr>
-          <p:cNvPr id="6" name="TextBox 5"/>
+              <a:t>1</a:t>
+            </a:r>
+          </a:p>
+        </p:txBody>
+      </p:sp>
+      <p:sp>
+        <p:nvSpPr>
+          <p:cNvPr id="12" name="TextBox 11"/>
           <p:cNvSpPr txBox="1"/>
           <p:nvPr/>
         </p:nvSpPr>
         <p:spPr>
           <a:xfrm>
-            <a:off x="502920" y="694944"/>
-            <a:ext cx="11155680" cy="914400"/>
-          </a:xfrm>
-          <a:prstGeom prst="rect">
-            <a:avLst/>
-          </a:prstGeom>
-          <a:noFill/>
-        </p:spPr>
-        <p:txBody>
-          <a:bodyPr wrap="square" anchor="t" lIns="0" rIns="0" tIns="0" bIns="0">
-            <a:spAutoFit/>
-          </a:bodyPr>
-          <a:lstStyle/>
-          <a:p>
-            <a:pPr algn="l">
-              <a:spcAft>
-                <a:spcPts val="200"/>
-              </a:spcAft>
-            </a:pPr>
-            <a:r>
-              <a:rPr sz="2600" b="1">
-                <a:solidFill>
-                  <a:srgbClr val="0F172A"/>
-                </a:solidFill>
-                <a:latin typeface="Segoe UI"/>
-              </a:rPr>
-              <a:t>El negocio fuerza la evolución a microservicios</a:t>
-            </a:r>
-          </a:p>
-          <a:p>
-            <a:pPr algn="l"/>
-            <a:r>
-              <a:rPr sz="1400" b="0">
-                <a:solidFill>
-                  <a:srgbClr val="64748B"/>
-                </a:solidFill>
-                <a:latin typeface="Segoe UI"/>
-              </a:rPr>
-              <a:t>12 meses después: convenios B2B con dos cadenas regionales de gimnasios</a:t>
-            </a:r>
-          </a:p>
-        </p:txBody>
-      </p:sp>
-      <p:sp>
-        <p:nvSpPr>
-          <p:cNvPr id="7" name="Rounded Rectangle 6"/>
-          <p:cNvSpPr/>
-          <p:nvPr/>
-        </p:nvSpPr>
-        <p:spPr>
-          <a:xfrm>
-            <a:off x="502920" y="1691640"/>
-            <a:ext cx="11183112" cy="868680"/>
-          </a:xfrm>
-          <a:prstGeom prst="roundRect">
-            <a:avLst>
-              <a:gd name="adj" fmla="val 5000"/>
-            </a:avLst>
-          </a:prstGeom>
-          <a:solidFill>
-            <a:srgbClr val="0F172A"/>
-          </a:solidFill>
-          <a:ln>
-            <a:noFill/>
-          </a:ln>
-          <a:effectLst/>
-        </p:spPr>
-        <p:style>
-          <a:lnRef idx="1">
-            <a:schemeClr val="accent1"/>
-          </a:lnRef>
-          <a:fillRef idx="3">
-            <a:schemeClr val="accent1"/>
-          </a:fillRef>
-          <a:effectRef idx="2">
-            <a:schemeClr val="accent1"/>
-          </a:effectRef>
-          <a:fontRef idx="minor">
-            <a:schemeClr val="lt1"/>
-          </a:fontRef>
-        </p:style>
-        <p:txBody>
-          <a:bodyPr rtlCol="0" anchor="ctr"/>
-          <a:lstStyle/>
-          <a:p>
-            <a:pPr algn="ctr"/>
-          </a:p>
-        </p:txBody>
-      </p:sp>
-      <p:sp>
-        <p:nvSpPr>
-          <p:cNvPr id="8" name="TextBox 7"/>
-          <p:cNvSpPr txBox="1"/>
-          <p:nvPr/>
-        </p:nvSpPr>
-        <p:spPr>
-          <a:xfrm>
-            <a:off x="777240" y="1691640"/>
-            <a:ext cx="4846320" cy="868680"/>
-          </a:xfrm>
-          <a:prstGeom prst="rect">
-            <a:avLst/>
-          </a:prstGeom>
-          <a:noFill/>
-        </p:spPr>
-        <p:txBody>
-          <a:bodyPr wrap="square" anchor="ctr" lIns="0" rIns="0" tIns="0" bIns="0">
-            <a:spAutoFit/>
-          </a:bodyPr>
-          <a:lstStyle/>
-          <a:p>
-            <a:pPr algn="l">
-              <a:spcAft>
-                <a:spcPts val="100"/>
-              </a:spcAft>
-            </a:pPr>
-            <a:r>
-              <a:rPr sz="1300" b="0">
-                <a:solidFill>
-                  <a:srgbClr val="94A3B8"/>
-                </a:solidFill>
-                <a:latin typeface="Segoe UI"/>
-              </a:rPr>
-              <a:t>De</a:t>
-            </a:r>
-            <a:r>
-              <a:rPr sz="1700" b="1">
-                <a:solidFill>
-                  <a:srgbClr val="FFFFFF"/>
-                </a:solidFill>
-                <a:latin typeface="Segoe UI"/>
-              </a:rPr>
-              <a:t>   100 entrenadores</a:t>
-            </a:r>
-          </a:p>
-          <a:p>
-            <a:pPr algn="l"/>
-            <a:r>
-              <a:rPr sz="1100" b="0">
-                <a:solidFill>
-                  <a:srgbClr val="94A3B8"/>
-                </a:solidFill>
-                <a:latin typeface="Segoe UI"/>
-              </a:rPr>
-              <a:t>monolito · ~5.000 alumnos</a:t>
-            </a:r>
-          </a:p>
-        </p:txBody>
-      </p:sp>
-      <p:sp>
-        <p:nvSpPr>
-          <p:cNvPr id="9" name="TextBox 8"/>
-          <p:cNvSpPr txBox="1"/>
-          <p:nvPr/>
-        </p:nvSpPr>
-        <p:spPr>
-          <a:xfrm>
-            <a:off x="5394960" y="1691640"/>
-            <a:ext cx="1097280" cy="868680"/>
-          </a:xfrm>
-          <a:prstGeom prst="rect">
-            <a:avLst/>
-          </a:prstGeom>
-          <a:noFill/>
-        </p:spPr>
-        <p:txBody>
-          <a:bodyPr wrap="square" anchor="ctr" lIns="0" rIns="0" tIns="0" bIns="0">
-            <a:spAutoFit/>
-          </a:bodyPr>
-          <a:lstStyle/>
-          <a:p>
-            <a:pPr algn="ctr"/>
-            <a:r>
-              <a:rPr sz="2600" b="1">
-                <a:solidFill>
-                  <a:srgbClr val="059669"/>
-                </a:solidFill>
-                <a:latin typeface="Segoe UI"/>
-              </a:rPr>
-              <a:t>→</a:t>
-            </a:r>
-          </a:p>
-        </p:txBody>
-      </p:sp>
-      <p:sp>
-        <p:nvSpPr>
-          <p:cNvPr id="10" name="TextBox 9"/>
-          <p:cNvSpPr txBox="1"/>
-          <p:nvPr/>
-        </p:nvSpPr>
-        <p:spPr>
-          <a:xfrm>
-            <a:off x="6492240" y="1691640"/>
-            <a:ext cx="5029200" cy="868680"/>
-          </a:xfrm>
-          <a:prstGeom prst="rect">
-            <a:avLst/>
-          </a:prstGeom>
-          <a:noFill/>
-        </p:spPr>
-        <p:txBody>
-          <a:bodyPr wrap="square" anchor="ctr" lIns="0" rIns="0" tIns="0" bIns="0">
-            <a:spAutoFit/>
-          </a:bodyPr>
-          <a:lstStyle/>
-          <a:p>
-            <a:pPr algn="l">
-              <a:spcAft>
-                <a:spcPts val="100"/>
-              </a:spcAft>
-            </a:pPr>
-            <a:r>
-              <a:rPr sz="1300" b="0">
-                <a:solidFill>
-                  <a:srgbClr val="94A3B8"/>
-                </a:solidFill>
-                <a:latin typeface="Segoe UI"/>
-              </a:rPr>
-              <a:t>A</a:t>
-            </a:r>
-            <a:r>
-              <a:rPr sz="1700" b="1">
-                <a:solidFill>
-                  <a:srgbClr val="059669"/>
-                </a:solidFill>
-                <a:latin typeface="Segoe UI"/>
-              </a:rPr>
-              <a:t>   5.000 entrenadores</a:t>
-            </a:r>
-          </a:p>
-          <a:p>
-            <a:pPr algn="l"/>
-            <a:r>
-              <a:rPr sz="1100" b="0">
-                <a:solidFill>
-                  <a:srgbClr val="94A3B8"/>
-                </a:solidFill>
-                <a:latin typeface="Segoe UI"/>
-              </a:rPr>
-              <a:t>~120.000 alumnos activos · equipos independientes</a:t>
-            </a:r>
-          </a:p>
-        </p:txBody>
-      </p:sp>
-      <p:sp>
-        <p:nvSpPr>
-          <p:cNvPr id="11" name="TextBox 10"/>
-          <p:cNvSpPr txBox="1"/>
-          <p:nvPr/>
-        </p:nvSpPr>
-        <p:spPr>
-          <a:xfrm>
-            <a:off x="502920" y="2743200"/>
-            <a:ext cx="7315200" cy="320040"/>
-          </a:xfrm>
-          <a:prstGeom prst="rect">
-            <a:avLst/>
-          </a:prstGeom>
-          <a:noFill/>
-        </p:spPr>
-        <p:txBody>
-          <a:bodyPr wrap="square" anchor="t" lIns="0" rIns="0" tIns="0" bIns="0">
-            <a:spAutoFit/>
-          </a:bodyPr>
-          <a:lstStyle/>
-          <a:p>
-            <a:pPr algn="l"/>
-            <a:r>
-              <a:rPr sz="1450" b="1">
-                <a:solidFill>
-                  <a:srgbClr val="0F172A"/>
-                </a:solidFill>
-                <a:latin typeface="Segoe UI"/>
-              </a:rPr>
-              <a:t>Tres presiones que el monolito no resuelve</a:t>
-            </a:r>
-          </a:p>
-        </p:txBody>
-      </p:sp>
-      <p:sp>
-        <p:nvSpPr>
-          <p:cNvPr id="12" name="Rounded Rectangle 11"/>
-          <p:cNvSpPr/>
-          <p:nvPr/>
-        </p:nvSpPr>
-        <p:spPr>
-          <a:xfrm>
-            <a:off x="502920" y="3200400"/>
-            <a:ext cx="3630168" cy="2606040"/>
-          </a:xfrm>
-          <a:prstGeom prst="roundRect">
-            <a:avLst>
-              <a:gd name="adj" fmla="val 5000"/>
-            </a:avLst>
-          </a:prstGeom>
-          <a:solidFill>
-            <a:srgbClr val="FFFFFF"/>
-          </a:solidFill>
-          <a:ln w="15875">
-            <a:solidFill>
-              <a:srgbClr val="BFDBFE"/>
-            </a:solidFill>
-          </a:ln>
-          <a:effectLst/>
-        </p:spPr>
-        <p:style>
-          <a:lnRef idx="1">
-            <a:schemeClr val="accent1"/>
-          </a:lnRef>
-          <a:fillRef idx="3">
-            <a:schemeClr val="accent1"/>
-          </a:fillRef>
-          <a:effectRef idx="2">
-            <a:schemeClr val="accent1"/>
-          </a:effectRef>
-          <a:fontRef idx="minor">
-            <a:schemeClr val="lt1"/>
-          </a:fontRef>
-        </p:style>
-        <p:txBody>
-          <a:bodyPr rtlCol="0" anchor="ctr"/>
-          <a:lstStyle/>
-          <a:p>
-            <a:pPr algn="ctr"/>
-          </a:p>
-        </p:txBody>
-      </p:sp>
-      <p:sp>
-        <p:nvSpPr>
-          <p:cNvPr id="13" name="Rounded Rectangle 12"/>
-          <p:cNvSpPr/>
-          <p:nvPr/>
-        </p:nvSpPr>
-        <p:spPr>
-          <a:xfrm>
-            <a:off x="731520" y="3383280"/>
-            <a:ext cx="3172968" cy="54864"/>
-          </a:xfrm>
-          <a:prstGeom prst="roundRect">
-            <a:avLst>
-              <a:gd name="adj" fmla="val 50000"/>
-            </a:avLst>
-          </a:prstGeom>
-          <a:solidFill>
-            <a:srgbClr val="2563EB"/>
-          </a:solidFill>
-          <a:ln>
-            <a:noFill/>
-          </a:ln>
-          <a:effectLst/>
-        </p:spPr>
-        <p:style>
-          <a:lnRef idx="1">
-            <a:schemeClr val="accent1"/>
-          </a:lnRef>
-          <a:fillRef idx="3">
-            <a:schemeClr val="accent1"/>
-          </a:fillRef>
-          <a:effectRef idx="2">
-            <a:schemeClr val="accent1"/>
-          </a:effectRef>
-          <a:fontRef idx="minor">
-            <a:schemeClr val="lt1"/>
-          </a:fontRef>
-        </p:style>
-        <p:txBody>
-          <a:bodyPr rtlCol="0" anchor="ctr"/>
-          <a:lstStyle/>
-          <a:p>
-            <a:pPr algn="ctr"/>
-          </a:p>
-        </p:txBody>
-      </p:sp>
-      <p:sp>
-        <p:nvSpPr>
-          <p:cNvPr id="14" name="Rounded Rectangle 13"/>
-          <p:cNvSpPr/>
-          <p:nvPr/>
-        </p:nvSpPr>
-        <p:spPr>
-          <a:xfrm>
-            <a:off x="777240" y="3584448"/>
-            <a:ext cx="502920" cy="502920"/>
-          </a:xfrm>
-          <a:prstGeom prst="roundRect">
-            <a:avLst>
-              <a:gd name="adj" fmla="val 20000"/>
-            </a:avLst>
-          </a:prstGeom>
-          <a:solidFill>
-            <a:srgbClr val="EFF6FF"/>
-          </a:solidFill>
-          <a:ln>
-            <a:noFill/>
-          </a:ln>
-          <a:effectLst/>
-        </p:spPr>
-        <p:style>
-          <a:lnRef idx="1">
-            <a:schemeClr val="accent1"/>
-          </a:lnRef>
-          <a:fillRef idx="3">
-            <a:schemeClr val="accent1"/>
-          </a:fillRef>
-          <a:effectRef idx="2">
-            <a:schemeClr val="accent1"/>
-          </a:effectRef>
-          <a:fontRef idx="minor">
-            <a:schemeClr val="lt1"/>
-          </a:fontRef>
-        </p:style>
-        <p:txBody>
-          <a:bodyPr rtlCol="0" anchor="ctr"/>
-          <a:lstStyle/>
-          <a:p>
-            <a:pPr algn="ctr"/>
-          </a:p>
-        </p:txBody>
-      </p:sp>
-      <p:sp>
-        <p:nvSpPr>
-          <p:cNvPr id="15" name="TextBox 14"/>
-          <p:cNvSpPr txBox="1"/>
-          <p:nvPr/>
-        </p:nvSpPr>
-        <p:spPr>
-          <a:xfrm>
-            <a:off x="777240" y="3584448"/>
-            <a:ext cx="502920" cy="502920"/>
-          </a:xfrm>
-          <a:prstGeom prst="rect">
-            <a:avLst/>
-          </a:prstGeom>
-          <a:noFill/>
-        </p:spPr>
-        <p:txBody>
-          <a:bodyPr wrap="square" anchor="ctr" lIns="0" rIns="0" tIns="0" bIns="0">
-            <a:spAutoFit/>
-          </a:bodyPr>
-          <a:lstStyle/>
-          <a:p>
-            <a:pPr algn="ctr"/>
-            <a:r>
-              <a:rPr sz="2000" b="1">
-                <a:solidFill>
-                  <a:srgbClr val="2563EB"/>
-                </a:solidFill>
-                <a:latin typeface="Segoe UI"/>
-              </a:rPr>
-              <a:t>1</a:t>
-            </a:r>
-          </a:p>
-        </p:txBody>
-      </p:sp>
-      <p:sp>
-        <p:nvSpPr>
-          <p:cNvPr id="16" name="TextBox 15"/>
-          <p:cNvSpPr txBox="1"/>
-          <p:nvPr/>
-        </p:nvSpPr>
-        <p:spPr>
-          <a:xfrm>
-            <a:off x="777240" y="4224528"/>
-            <a:ext cx="3081528" cy="1463040"/>
+            <a:off x="896112" y="4224528"/>
+            <a:ext cx="3090672" cy="1417320"/>
           </a:xfrm>
           <a:prstGeom prst="rect">
             <a:avLst/>
@@ -6849,7 +6039,7 @@
             <a:r>
               <a:rPr sz="1400" b="1">
                 <a:solidFill>
-                  <a:srgbClr val="0F172A"/>
+                  <a:srgbClr val="1F4E79"/>
                 </a:solidFill>
                 <a:latin typeface="Segoe UI"/>
               </a:rPr>
@@ -6865,38 +6055,34 @@
             <a:r>
               <a:rPr sz="1100" b="0">
                 <a:solidFill>
-                  <a:srgbClr val="334155"/>
-                </a:solidFill>
-                <a:latin typeface="Segoe UI"/>
-              </a:rPr>
-              <a:t>De 18 a 21 h los alumnos consultan su rutina desde el gimnasio (lecturas masivas) mientras los entrenadores planifican. Los lunes el pico se triplica.</a:t>
-            </a:r>
-          </a:p>
-        </p:txBody>
-      </p:sp>
-      <p:sp>
-        <p:nvSpPr>
-          <p:cNvPr id="17" name="Rounded Rectangle 16"/>
+                  <a:srgbClr val="404040"/>
+                </a:solidFill>
+                <a:latin typeface="Segoe UI"/>
+              </a:rPr>
+              <a:t>De 18 a 21 h los alumnos consultan su rutina desde el gimnasio (lecturas masivas). Los lunes el pico se triplica.</a:t>
+            </a:r>
+          </a:p>
+        </p:txBody>
+      </p:sp>
+      <p:sp>
+        <p:nvSpPr>
+          <p:cNvPr id="13" name="Rectangle 12"/>
           <p:cNvSpPr/>
           <p:nvPr/>
         </p:nvSpPr>
         <p:spPr>
           <a:xfrm>
-            <a:off x="4279392" y="3200400"/>
-            <a:ext cx="3630168" cy="2606040"/>
-          </a:xfrm>
-          <a:prstGeom prst="roundRect">
-            <a:avLst>
-              <a:gd name="adj" fmla="val 5000"/>
-            </a:avLst>
+            <a:off x="4384548" y="3291840"/>
+            <a:ext cx="3602736" cy="2468880"/>
+          </a:xfrm>
+          <a:prstGeom prst="rect">
+            <a:avLst/>
           </a:prstGeom>
           <a:solidFill>
-            <a:srgbClr val="FFFFFF"/>
+            <a:srgbClr val="ECF0F3"/>
           </a:solidFill>
-          <a:ln w="15875">
-            <a:solidFill>
-              <a:srgbClr val="C7D2FE"/>
-            </a:solidFill>
+          <a:ln>
+            <a:noFill/>
           </a:ln>
           <a:effectLst/>
         </p:spPr>
@@ -6924,22 +6110,20 @@
       </p:sp>
       <p:sp>
         <p:nvSpPr>
-          <p:cNvPr id="18" name="Rounded Rectangle 17"/>
+          <p:cNvPr id="14" name="Rectangle 13"/>
           <p:cNvSpPr/>
           <p:nvPr/>
         </p:nvSpPr>
         <p:spPr>
           <a:xfrm>
-            <a:off x="4507992" y="3383280"/>
-            <a:ext cx="3172968" cy="54864"/>
-          </a:xfrm>
-          <a:prstGeom prst="roundRect">
-            <a:avLst>
-              <a:gd name="adj" fmla="val 50000"/>
-            </a:avLst>
+            <a:off x="4640580" y="3520440"/>
+            <a:ext cx="548640" cy="548640"/>
+          </a:xfrm>
+          <a:prstGeom prst="rect">
+            <a:avLst/>
           </a:prstGeom>
           <a:solidFill>
-            <a:srgbClr val="4F46E5"/>
+            <a:srgbClr val="E8741E"/>
           </a:solidFill>
           <a:ln>
             <a:noFill/>
@@ -6970,60 +6154,14 @@
       </p:sp>
       <p:sp>
         <p:nvSpPr>
-          <p:cNvPr id="19" name="Rounded Rectangle 18"/>
-          <p:cNvSpPr/>
-          <p:nvPr/>
-        </p:nvSpPr>
-        <p:spPr>
-          <a:xfrm>
-            <a:off x="4553712" y="3584448"/>
-            <a:ext cx="502920" cy="502920"/>
-          </a:xfrm>
-          <a:prstGeom prst="roundRect">
-            <a:avLst>
-              <a:gd name="adj" fmla="val 20000"/>
-            </a:avLst>
-          </a:prstGeom>
-          <a:solidFill>
-            <a:srgbClr val="EEF2FF"/>
-          </a:solidFill>
-          <a:ln>
-            <a:noFill/>
-          </a:ln>
-          <a:effectLst/>
-        </p:spPr>
-        <p:style>
-          <a:lnRef idx="1">
-            <a:schemeClr val="accent1"/>
-          </a:lnRef>
-          <a:fillRef idx="3">
-            <a:schemeClr val="accent1"/>
-          </a:fillRef>
-          <a:effectRef idx="2">
-            <a:schemeClr val="accent1"/>
-          </a:effectRef>
-          <a:fontRef idx="minor">
-            <a:schemeClr val="lt1"/>
-          </a:fontRef>
-        </p:style>
-        <p:txBody>
-          <a:bodyPr rtlCol="0" anchor="ctr"/>
-          <a:lstStyle/>
-          <a:p>
-            <a:pPr algn="ctr"/>
-          </a:p>
-        </p:txBody>
-      </p:sp>
-      <p:sp>
-        <p:nvSpPr>
-          <p:cNvPr id="20" name="TextBox 19"/>
+          <p:cNvPr id="15" name="TextBox 14"/>
           <p:cNvSpPr txBox="1"/>
           <p:nvPr/>
         </p:nvSpPr>
         <p:spPr>
           <a:xfrm>
-            <a:off x="4553712" y="3584448"/>
-            <a:ext cx="502920" cy="502920"/>
+            <a:off x="4640580" y="3520440"/>
+            <a:ext cx="548640" cy="548640"/>
           </a:xfrm>
           <a:prstGeom prst="rect">
             <a:avLst/>
@@ -7040,7 +6178,7 @@
             <a:r>
               <a:rPr sz="2000" b="1">
                 <a:solidFill>
-                  <a:srgbClr val="4F46E5"/>
+                  <a:srgbClr val="FFFFFF"/>
                 </a:solidFill>
                 <a:latin typeface="Segoe UI"/>
               </a:rPr>
@@ -7051,14 +6189,14 @@
       </p:sp>
       <p:sp>
         <p:nvSpPr>
-          <p:cNvPr id="21" name="TextBox 20"/>
+          <p:cNvPr id="16" name="TextBox 15"/>
           <p:cNvSpPr txBox="1"/>
           <p:nvPr/>
         </p:nvSpPr>
         <p:spPr>
           <a:xfrm>
-            <a:off x="4553712" y="4224528"/>
-            <a:ext cx="3081528" cy="1463040"/>
+            <a:off x="4640580" y="4224528"/>
+            <a:ext cx="3090672" cy="1417320"/>
           </a:xfrm>
           <a:prstGeom prst="rect">
             <a:avLst/>
@@ -7082,7 +6220,7 @@
             <a:r>
               <a:rPr sz="1400" b="1">
                 <a:solidFill>
-                  <a:srgbClr val="0F172A"/>
+                  <a:srgbClr val="1F4E79"/>
                 </a:solidFill>
                 <a:latin typeface="Segoe UI"/>
               </a:rPr>
@@ -7098,38 +6236,34 @@
             <a:r>
               <a:rPr sz="1100" b="0">
                 <a:solidFill>
-                  <a:srgbClr val="334155"/>
-                </a:solidFill>
-                <a:latin typeface="Segoe UI"/>
-              </a:rPr>
-              <a:t>La empresa crece a tres equipos (Core de rutinas, Pagos/B2B, Experiencia del alumno) que necesitan desplegar sin coordinarse.</a:t>
-            </a:r>
-          </a:p>
-        </p:txBody>
-      </p:sp>
-      <p:sp>
-        <p:nvSpPr>
-          <p:cNvPr id="22" name="Rounded Rectangle 21"/>
+                  <a:srgbClr val="404040"/>
+                </a:solidFill>
+                <a:latin typeface="Segoe UI"/>
+              </a:rPr>
+              <a:t>Tres equipos (Core de rutinas, Pagos/B2B, Experiencia del alumno) que necesitan desplegar sin coordinarse.</a:t>
+            </a:r>
+          </a:p>
+        </p:txBody>
+      </p:sp>
+      <p:sp>
+        <p:nvSpPr>
+          <p:cNvPr id="17" name="Rectangle 16"/>
           <p:cNvSpPr/>
           <p:nvPr/>
         </p:nvSpPr>
         <p:spPr>
           <a:xfrm>
-            <a:off x="8055864" y="3200400"/>
-            <a:ext cx="3630168" cy="2606040"/>
-          </a:xfrm>
-          <a:prstGeom prst="roundRect">
-            <a:avLst>
-              <a:gd name="adj" fmla="val 5000"/>
-            </a:avLst>
+            <a:off x="8129015" y="3291840"/>
+            <a:ext cx="3602736" cy="2468880"/>
+          </a:xfrm>
+          <a:prstGeom prst="rect">
+            <a:avLst/>
           </a:prstGeom>
           <a:solidFill>
-            <a:srgbClr val="FFFFFF"/>
+            <a:srgbClr val="ECF0F3"/>
           </a:solidFill>
-          <a:ln w="15875">
-            <a:solidFill>
-              <a:srgbClr val="DDD6FE"/>
-            </a:solidFill>
+          <a:ln>
+            <a:noFill/>
           </a:ln>
           <a:effectLst/>
         </p:spPr>
@@ -7157,22 +6291,20 @@
       </p:sp>
       <p:sp>
         <p:nvSpPr>
-          <p:cNvPr id="23" name="Rounded Rectangle 22"/>
+          <p:cNvPr id="18" name="Rectangle 17"/>
           <p:cNvSpPr/>
           <p:nvPr/>
         </p:nvSpPr>
         <p:spPr>
           <a:xfrm>
-            <a:off x="8284464" y="3383280"/>
-            <a:ext cx="3172968" cy="54864"/>
-          </a:xfrm>
-          <a:prstGeom prst="roundRect">
-            <a:avLst>
-              <a:gd name="adj" fmla="val 50000"/>
-            </a:avLst>
+            <a:off x="8385047" y="3520440"/>
+            <a:ext cx="548640" cy="548640"/>
+          </a:xfrm>
+          <a:prstGeom prst="rect">
+            <a:avLst/>
           </a:prstGeom>
           <a:solidFill>
-            <a:srgbClr val="7C3AED"/>
+            <a:srgbClr val="E8741E"/>
           </a:solidFill>
           <a:ln>
             <a:noFill/>
@@ -7203,60 +6335,14 @@
       </p:sp>
       <p:sp>
         <p:nvSpPr>
-          <p:cNvPr id="24" name="Rounded Rectangle 23"/>
-          <p:cNvSpPr/>
-          <p:nvPr/>
-        </p:nvSpPr>
-        <p:spPr>
-          <a:xfrm>
-            <a:off x="8330184" y="3584448"/>
-            <a:ext cx="502920" cy="502920"/>
-          </a:xfrm>
-          <a:prstGeom prst="roundRect">
-            <a:avLst>
-              <a:gd name="adj" fmla="val 20000"/>
-            </a:avLst>
-          </a:prstGeom>
-          <a:solidFill>
-            <a:srgbClr val="F5F3FF"/>
-          </a:solidFill>
-          <a:ln>
-            <a:noFill/>
-          </a:ln>
-          <a:effectLst/>
-        </p:spPr>
-        <p:style>
-          <a:lnRef idx="1">
-            <a:schemeClr val="accent1"/>
-          </a:lnRef>
-          <a:fillRef idx="3">
-            <a:schemeClr val="accent1"/>
-          </a:fillRef>
-          <a:effectRef idx="2">
-            <a:schemeClr val="accent1"/>
-          </a:effectRef>
-          <a:fontRef idx="minor">
-            <a:schemeClr val="lt1"/>
-          </a:fontRef>
-        </p:style>
-        <p:txBody>
-          <a:bodyPr rtlCol="0" anchor="ctr"/>
-          <a:lstStyle/>
-          <a:p>
-            <a:pPr algn="ctr"/>
-          </a:p>
-        </p:txBody>
-      </p:sp>
-      <p:sp>
-        <p:nvSpPr>
-          <p:cNvPr id="25" name="TextBox 24"/>
+          <p:cNvPr id="19" name="TextBox 18"/>
           <p:cNvSpPr txBox="1"/>
           <p:nvPr/>
         </p:nvSpPr>
         <p:spPr>
           <a:xfrm>
-            <a:off x="8330184" y="3584448"/>
-            <a:ext cx="502920" cy="502920"/>
+            <a:off x="8385047" y="3520440"/>
+            <a:ext cx="548640" cy="548640"/>
           </a:xfrm>
           <a:prstGeom prst="rect">
             <a:avLst/>
@@ -7273,7 +6359,7 @@
             <a:r>
               <a:rPr sz="2000" b="1">
                 <a:solidFill>
-                  <a:srgbClr val="7C3AED"/>
+                  <a:srgbClr val="FFFFFF"/>
                 </a:solidFill>
                 <a:latin typeface="Segoe UI"/>
               </a:rPr>
@@ -7284,14 +6370,14 @@
       </p:sp>
       <p:sp>
         <p:nvSpPr>
-          <p:cNvPr id="26" name="TextBox 25"/>
+          <p:cNvPr id="20" name="TextBox 19"/>
           <p:cNvSpPr txBox="1"/>
           <p:nvPr/>
         </p:nvSpPr>
         <p:spPr>
           <a:xfrm>
-            <a:off x="8330184" y="4224528"/>
-            <a:ext cx="3081528" cy="1463040"/>
+            <a:off x="8385047" y="4224528"/>
+            <a:ext cx="3090672" cy="1417320"/>
           </a:xfrm>
           <a:prstGeom prst="rect">
             <a:avLst/>
@@ -7315,7 +6401,7 @@
             <a:r>
               <a:rPr sz="1400" b="1">
                 <a:solidFill>
-                  <a:srgbClr val="0F172A"/>
+                  <a:srgbClr val="1F4E79"/>
                 </a:solidFill>
                 <a:latin typeface="Segoe UI"/>
               </a:rPr>
@@ -7331,31 +6417,31 @@
             <a:r>
               <a:rPr sz="1100" b="0">
                 <a:solidFill>
-                  <a:srgbClr val="334155"/>
-                </a:solidFill>
-                <a:latin typeface="Segoe UI"/>
-              </a:rPr>
-              <a:t>Las cadenas exigen SLA de disponibilidad, facturación consolidada y notificaciones masivas que no pueden competir por recursos con el flujo crítico.</a:t>
-            </a:r>
-          </a:p>
-        </p:txBody>
-      </p:sp>
-      <p:sp>
-        <p:nvSpPr>
-          <p:cNvPr id="27" name="Rectangle 26"/>
+                  <a:srgbClr val="404040"/>
+                </a:solidFill>
+                <a:latin typeface="Segoe UI"/>
+              </a:rPr>
+              <a:t>Las cadenas exigen SLA, facturación consolidada y notificaciones masivas que no pueden competir con el flujo crítico.</a:t>
+            </a:r>
+          </a:p>
+        </p:txBody>
+      </p:sp>
+      <p:sp>
+        <p:nvSpPr>
+          <p:cNvPr id="21" name="Rectangle 20"/>
           <p:cNvSpPr/>
           <p:nvPr/>
         </p:nvSpPr>
         <p:spPr>
           <a:xfrm>
-            <a:off x="502920" y="6437376"/>
-            <a:ext cx="11183112" cy="10972"/>
+            <a:off x="0" y="6739128"/>
+            <a:ext cx="12191695" cy="118872"/>
           </a:xfrm>
           <a:prstGeom prst="rect">
             <a:avLst/>
           </a:prstGeom>
           <a:solidFill>
-            <a:srgbClr val="E2E8F0"/>
+            <a:srgbClr val="E8741E"/>
           </a:solidFill>
           <a:ln>
             <a:noFill/>
@@ -7386,14 +6472,14 @@
       </p:sp>
       <p:sp>
         <p:nvSpPr>
-          <p:cNvPr id="28" name="TextBox 27"/>
+          <p:cNvPr id="22" name="TextBox 21"/>
           <p:cNvSpPr txBox="1"/>
           <p:nvPr/>
         </p:nvSpPr>
         <p:spPr>
           <a:xfrm>
-            <a:off x="502920" y="6492240"/>
-            <a:ext cx="7315200" cy="274320"/>
+            <a:off x="7315200" y="6437376"/>
+            <a:ext cx="4370832" cy="256032"/>
           </a:xfrm>
           <a:prstGeom prst="rect">
             <a:avLst/>
@@ -7406,50 +6492,15 @@
           </a:bodyPr>
           <a:lstStyle/>
           <a:p>
-            <a:pPr algn="l"/>
+            <a:pPr algn="r"/>
             <a:r>
               <a:rPr sz="950" b="0">
                 <a:solidFill>
-                  <a:srgbClr val="94A3B8"/>
-                </a:solidFill>
-                <a:latin typeface="Segoe UI"/>
-              </a:rPr>
-              <a:t>TrainerOS — TFI Desarrollo de Aplicaciones Web</a:t>
-            </a:r>
-          </a:p>
-        </p:txBody>
-      </p:sp>
-      <p:sp>
-        <p:nvSpPr>
-          <p:cNvPr id="29" name="TextBox 28"/>
-          <p:cNvSpPr txBox="1"/>
-          <p:nvPr/>
-        </p:nvSpPr>
-        <p:spPr>
-          <a:xfrm>
-            <a:off x="7315200" y="6492240"/>
-            <a:ext cx="4370832" cy="274320"/>
-          </a:xfrm>
-          <a:prstGeom prst="rect">
-            <a:avLst/>
-          </a:prstGeom>
-          <a:noFill/>
-        </p:spPr>
-        <p:txBody>
-          <a:bodyPr wrap="square" anchor="t" lIns="0" rIns="0" tIns="0" bIns="0">
-            <a:spAutoFit/>
-          </a:bodyPr>
-          <a:lstStyle/>
-          <a:p>
-            <a:pPr algn="r"/>
-            <a:r>
-              <a:rPr sz="950" b="1">
-                <a:solidFill>
-                  <a:srgbClr val="64748B"/>
-                </a:solidFill>
-                <a:latin typeface="Segoe UI"/>
-              </a:rPr>
-              <a:t>Expone: Matías Saravia    ·    5 / 12</a:t>
+                  <a:srgbClr val="9AA6B2"/>
+                </a:solidFill>
+                <a:latin typeface="Segoe UI"/>
+              </a:rPr>
+              <a:t>5 / 12   ·   Expone: Matías Saravia</a:t>
             </a:r>
           </a:p>
         </p:txBody>
@@ -7488,14 +6539,93 @@
         </p:blipFill>
         <p:spPr>
           <a:xfrm>
-            <a:off x="0" y="0"/>
-            <a:ext cx="12191695" cy="6858000"/>
+            <a:off x="228600" y="467695"/>
+            <a:ext cx="11731752" cy="5776305"/>
           </a:xfrm>
           <a:prstGeom prst="rect">
             <a:avLst/>
           </a:prstGeom>
         </p:spPr>
       </p:pic>
+      <p:sp>
+        <p:nvSpPr>
+          <p:cNvPr id="3" name="Rectangle 2"/>
+          <p:cNvSpPr/>
+          <p:nvPr/>
+        </p:nvSpPr>
+        <p:spPr>
+          <a:xfrm>
+            <a:off x="0" y="6739128"/>
+            <a:ext cx="12191695" cy="118872"/>
+          </a:xfrm>
+          <a:prstGeom prst="rect">
+            <a:avLst/>
+          </a:prstGeom>
+          <a:solidFill>
+            <a:srgbClr val="E8741E"/>
+          </a:solidFill>
+          <a:ln>
+            <a:noFill/>
+          </a:ln>
+          <a:effectLst/>
+        </p:spPr>
+        <p:style>
+          <a:lnRef idx="1">
+            <a:schemeClr val="accent1"/>
+          </a:lnRef>
+          <a:fillRef idx="3">
+            <a:schemeClr val="accent1"/>
+          </a:fillRef>
+          <a:effectRef idx="2">
+            <a:schemeClr val="accent1"/>
+          </a:effectRef>
+          <a:fontRef idx="minor">
+            <a:schemeClr val="lt1"/>
+          </a:fontRef>
+        </p:style>
+        <p:txBody>
+          <a:bodyPr rtlCol="0" anchor="ctr"/>
+          <a:lstStyle/>
+          <a:p>
+            <a:pPr algn="ctr"/>
+          </a:p>
+        </p:txBody>
+      </p:sp>
+      <p:sp>
+        <p:nvSpPr>
+          <p:cNvPr id="4" name="TextBox 3"/>
+          <p:cNvSpPr txBox="1"/>
+          <p:nvPr/>
+        </p:nvSpPr>
+        <p:spPr>
+          <a:xfrm>
+            <a:off x="7315200" y="6437376"/>
+            <a:ext cx="4370832" cy="256032"/>
+          </a:xfrm>
+          <a:prstGeom prst="rect">
+            <a:avLst/>
+          </a:prstGeom>
+          <a:noFill/>
+        </p:spPr>
+        <p:txBody>
+          <a:bodyPr wrap="square" anchor="t" lIns="0" rIns="0" tIns="0" bIns="0">
+            <a:spAutoFit/>
+          </a:bodyPr>
+          <a:lstStyle/>
+          <a:p>
+            <a:pPr algn="r"/>
+            <a:r>
+              <a:rPr sz="950" b="0">
+                <a:solidFill>
+                  <a:srgbClr val="9AA6B2"/>
+                </a:solidFill>
+                <a:latin typeface="Segoe UI"/>
+              </a:rPr>
+              <a:t>   ·   Expone: Matías Saravia</a:t>
+            </a:r>
+          </a:p>
+        </p:txBody>
+      </p:sp>
     </p:spTree>
   </p:cSld>
   <p:clrMapOvr>
@@ -7530,14 +6660,93 @@
         </p:blipFill>
         <p:spPr>
           <a:xfrm>
-            <a:off x="0" y="0"/>
-            <a:ext cx="12191695" cy="6858000"/>
+            <a:off x="228600" y="624086"/>
+            <a:ext cx="11731752" cy="5463523"/>
           </a:xfrm>
           <a:prstGeom prst="rect">
             <a:avLst/>
           </a:prstGeom>
         </p:spPr>
       </p:pic>
+      <p:sp>
+        <p:nvSpPr>
+          <p:cNvPr id="3" name="Rectangle 2"/>
+          <p:cNvSpPr/>
+          <p:nvPr/>
+        </p:nvSpPr>
+        <p:spPr>
+          <a:xfrm>
+            <a:off x="0" y="6739128"/>
+            <a:ext cx="12191695" cy="118872"/>
+          </a:xfrm>
+          <a:prstGeom prst="rect">
+            <a:avLst/>
+          </a:prstGeom>
+          <a:solidFill>
+            <a:srgbClr val="E8741E"/>
+          </a:solidFill>
+          <a:ln>
+            <a:noFill/>
+          </a:ln>
+          <a:effectLst/>
+        </p:spPr>
+        <p:style>
+          <a:lnRef idx="1">
+            <a:schemeClr val="accent1"/>
+          </a:lnRef>
+          <a:fillRef idx="3">
+            <a:schemeClr val="accent1"/>
+          </a:fillRef>
+          <a:effectRef idx="2">
+            <a:schemeClr val="accent1"/>
+          </a:effectRef>
+          <a:fontRef idx="minor">
+            <a:schemeClr val="lt1"/>
+          </a:fontRef>
+        </p:style>
+        <p:txBody>
+          <a:bodyPr rtlCol="0" anchor="ctr"/>
+          <a:lstStyle/>
+          <a:p>
+            <a:pPr algn="ctr"/>
+          </a:p>
+        </p:txBody>
+      </p:sp>
+      <p:sp>
+        <p:nvSpPr>
+          <p:cNvPr id="4" name="TextBox 3"/>
+          <p:cNvSpPr txBox="1"/>
+          <p:nvPr/>
+        </p:nvSpPr>
+        <p:spPr>
+          <a:xfrm>
+            <a:off x="7315200" y="6437376"/>
+            <a:ext cx="4370832" cy="256032"/>
+          </a:xfrm>
+          <a:prstGeom prst="rect">
+            <a:avLst/>
+          </a:prstGeom>
+          <a:noFill/>
+        </p:spPr>
+        <p:txBody>
+          <a:bodyPr wrap="square" anchor="t" lIns="0" rIns="0" tIns="0" bIns="0">
+            <a:spAutoFit/>
+          </a:bodyPr>
+          <a:lstStyle/>
+          <a:p>
+            <a:pPr algn="r"/>
+            <a:r>
+              <a:rPr sz="950" b="0">
+                <a:solidFill>
+                  <a:srgbClr val="9AA6B2"/>
+                </a:solidFill>
+                <a:latin typeface="Segoe UI"/>
+              </a:rPr>
+              <a:t>   ·   Expone: Lautaro Naglieri</a:t>
+            </a:r>
+          </a:p>
+        </p:txBody>
+      </p:sp>
     </p:spTree>
   </p:cSld>
   <p:clrMapOvr>
@@ -7558,20 +6767,90 @@
       <p:grpSpPr/>
       <p:sp>
         <p:nvSpPr>
-          <p:cNvPr id="2" name="Rectangle 1"/>
+          <p:cNvPr id="2" name="TextBox 1"/>
+          <p:cNvSpPr txBox="1"/>
+          <p:nvPr/>
+        </p:nvSpPr>
+        <p:spPr>
+          <a:xfrm>
+            <a:off x="640080" y="502920"/>
+            <a:ext cx="10972800" cy="640080"/>
+          </a:xfrm>
+          <a:prstGeom prst="rect">
+            <a:avLst/>
+          </a:prstGeom>
+          <a:noFill/>
+        </p:spPr>
+        <p:txBody>
+          <a:bodyPr wrap="square" anchor="t" lIns="0" rIns="0" tIns="0" bIns="0">
+            <a:spAutoFit/>
+          </a:bodyPr>
+          <a:lstStyle/>
+          <a:p>
+            <a:pPr algn="l"/>
+            <a:r>
+              <a:rPr sz="3000" b="1">
+                <a:solidFill>
+                  <a:srgbClr val="1F4E79"/>
+                </a:solidFill>
+                <a:latin typeface="Segoe UI"/>
+              </a:rPr>
+              <a:t>Patrones aplicados y su justificación</a:t>
+            </a:r>
+          </a:p>
+        </p:txBody>
+      </p:sp>
+      <p:sp>
+        <p:nvSpPr>
+          <p:cNvPr id="3" name="TextBox 2"/>
+          <p:cNvSpPr txBox="1"/>
+          <p:nvPr/>
+        </p:nvSpPr>
+        <p:spPr>
+          <a:xfrm>
+            <a:off x="658368" y="1170432"/>
+            <a:ext cx="10972800" cy="365760"/>
+          </a:xfrm>
+          <a:prstGeom prst="rect">
+            <a:avLst/>
+          </a:prstGeom>
+          <a:noFill/>
+        </p:spPr>
+        <p:txBody>
+          <a:bodyPr wrap="square" anchor="t" lIns="0" rIns="0" tIns="0" bIns="0">
+            <a:spAutoFit/>
+          </a:bodyPr>
+          <a:lstStyle/>
+          <a:p>
+            <a:pPr algn="l"/>
+            <a:r>
+              <a:rPr sz="1450" b="0">
+                <a:solidFill>
+                  <a:srgbClr val="7A7A7A"/>
+                </a:solidFill>
+                <a:latin typeface="Segoe UI"/>
+              </a:rPr>
+              <a:t>Cada patrón responde a un problema concreto del negocio — no se usa “porque sí”</a:t>
+            </a:r>
+          </a:p>
+        </p:txBody>
+      </p:sp>
+      <p:sp>
+        <p:nvSpPr>
+          <p:cNvPr id="4" name="Rectangle 3"/>
           <p:cNvSpPr/>
           <p:nvPr/>
         </p:nvSpPr>
         <p:spPr>
           <a:xfrm>
-            <a:off x="0" y="0"/>
-            <a:ext cx="12191695" cy="6858000"/>
+            <a:off x="640080" y="1783080"/>
+            <a:ext cx="10908792" cy="402336"/>
           </a:xfrm>
           <a:prstGeom prst="rect">
             <a:avLst/>
           </a:prstGeom>
           <a:solidFill>
-            <a:srgbClr val="F8FAFC"/>
+            <a:srgbClr val="1F4E79"/>
           </a:solidFill>
           <a:ln>
             <a:noFill/>
@@ -7602,20 +6881,125 @@
       </p:sp>
       <p:sp>
         <p:nvSpPr>
-          <p:cNvPr id="3" name="Rectangle 2"/>
+          <p:cNvPr id="5" name="TextBox 4"/>
+          <p:cNvSpPr txBox="1"/>
+          <p:nvPr/>
+        </p:nvSpPr>
+        <p:spPr>
+          <a:xfrm>
+            <a:off x="841248" y="1783080"/>
+            <a:ext cx="2468880" cy="402336"/>
+          </a:xfrm>
+          <a:prstGeom prst="rect">
+            <a:avLst/>
+          </a:prstGeom>
+          <a:noFill/>
+        </p:spPr>
+        <p:txBody>
+          <a:bodyPr wrap="square" anchor="ctr" lIns="0" rIns="0" tIns="0" bIns="0">
+            <a:spAutoFit/>
+          </a:bodyPr>
+          <a:lstStyle/>
+          <a:p>
+            <a:pPr algn="l"/>
+            <a:r>
+              <a:rPr sz="1050" b="1">
+                <a:solidFill>
+                  <a:srgbClr val="FFFFFF"/>
+                </a:solidFill>
+                <a:latin typeface="Segoe UI"/>
+              </a:rPr>
+              <a:t>PATRÓN</a:t>
+            </a:r>
+          </a:p>
+        </p:txBody>
+      </p:sp>
+      <p:sp>
+        <p:nvSpPr>
+          <p:cNvPr id="6" name="TextBox 5"/>
+          <p:cNvSpPr txBox="1"/>
+          <p:nvPr/>
+        </p:nvSpPr>
+        <p:spPr>
+          <a:xfrm>
+            <a:off x="3383280" y="1783080"/>
+            <a:ext cx="3657600" cy="402336"/>
+          </a:xfrm>
+          <a:prstGeom prst="rect">
+            <a:avLst/>
+          </a:prstGeom>
+          <a:noFill/>
+        </p:spPr>
+        <p:txBody>
+          <a:bodyPr wrap="square" anchor="ctr" lIns="0" rIns="0" tIns="0" bIns="0">
+            <a:spAutoFit/>
+          </a:bodyPr>
+          <a:lstStyle/>
+          <a:p>
+            <a:pPr algn="l"/>
+            <a:r>
+              <a:rPr sz="1050" b="1">
+                <a:solidFill>
+                  <a:srgbClr val="FFFFFF"/>
+                </a:solidFill>
+                <a:latin typeface="Segoe UI"/>
+              </a:rPr>
+              <a:t>DÓNDE SE APLICA</a:t>
+            </a:r>
+          </a:p>
+        </p:txBody>
+      </p:sp>
+      <p:sp>
+        <p:nvSpPr>
+          <p:cNvPr id="7" name="TextBox 6"/>
+          <p:cNvSpPr txBox="1"/>
+          <p:nvPr/>
+        </p:nvSpPr>
+        <p:spPr>
+          <a:xfrm>
+            <a:off x="7178040" y="1783080"/>
+            <a:ext cx="4206240" cy="402336"/>
+          </a:xfrm>
+          <a:prstGeom prst="rect">
+            <a:avLst/>
+          </a:prstGeom>
+          <a:noFill/>
+        </p:spPr>
+        <p:txBody>
+          <a:bodyPr wrap="square" anchor="ctr" lIns="0" rIns="0" tIns="0" bIns="0">
+            <a:spAutoFit/>
+          </a:bodyPr>
+          <a:lstStyle/>
+          <a:p>
+            <a:pPr algn="l"/>
+            <a:r>
+              <a:rPr sz="1050" b="1">
+                <a:solidFill>
+                  <a:srgbClr val="FFFFFF"/>
+                </a:solidFill>
+                <a:latin typeface="Segoe UI"/>
+              </a:rPr>
+              <a:t>POR QUÉ</a:t>
+            </a:r>
+          </a:p>
+        </p:txBody>
+      </p:sp>
+      <p:sp>
+        <p:nvSpPr>
+          <p:cNvPr id="8" name="Rectangle 7"/>
           <p:cNvSpPr/>
           <p:nvPr/>
         </p:nvSpPr>
         <p:spPr>
           <a:xfrm>
-            <a:off x="0" y="0"/>
-            <a:ext cx="146304" cy="6858000"/>
+            <a:off x="640080" y="2185416"/>
+            <a:ext cx="10908792" cy="658368"/>
           </a:xfrm>
           <a:prstGeom prst="rect">
             <a:avLst/>
           </a:prstGeom>
           <a:solidFill>
-            <a:srgbClr val="059669"/>
+            <a:srgbClr val="FFFFFF"/>
           </a:solidFill>
           <a:ln>
             <a:noFill/>
@@ -7646,22 +7030,20 @@
       </p:sp>
       <p:sp>
         <p:nvSpPr>
-          <p:cNvPr id="4" name="Rounded Rectangle 3"/>
+          <p:cNvPr id="9" name="Rectangle 8"/>
           <p:cNvSpPr/>
           <p:nvPr/>
         </p:nvSpPr>
         <p:spPr>
           <a:xfrm>
-            <a:off x="502920" y="384048"/>
-            <a:ext cx="1522476" cy="301752"/>
-          </a:xfrm>
-          <a:prstGeom prst="roundRect">
-            <a:avLst>
-              <a:gd name="adj" fmla="val 50000"/>
-            </a:avLst>
+            <a:off x="640080" y="2185416"/>
+            <a:ext cx="54864" cy="658368"/>
+          </a:xfrm>
+          <a:prstGeom prst="rect">
+            <a:avLst/>
           </a:prstGeom>
           <a:solidFill>
-            <a:srgbClr val="059669"/>
+            <a:srgbClr val="E8741E"/>
           </a:solidFill>
           <a:ln>
             <a:noFill/>
@@ -7692,14 +7074,14 @@
       </p:sp>
       <p:sp>
         <p:nvSpPr>
-          <p:cNvPr id="5" name="TextBox 4"/>
+          <p:cNvPr id="10" name="TextBox 9"/>
           <p:cNvSpPr txBox="1"/>
           <p:nvPr/>
         </p:nvSpPr>
         <p:spPr>
           <a:xfrm>
-            <a:off x="502920" y="384048"/>
-            <a:ext cx="1522476" cy="301752"/>
+            <a:off x="841248" y="2185416"/>
+            <a:ext cx="2514600" cy="658368"/>
           </a:xfrm>
           <a:prstGeom prst="rect">
             <a:avLst/>
@@ -7712,29 +7094,29 @@
           </a:bodyPr>
           <a:lstStyle/>
           <a:p>
-            <a:pPr algn="ctr"/>
-            <a:r>
-              <a:rPr sz="1100" b="1">
-                <a:solidFill>
-                  <a:srgbClr val="FFFFFF"/>
-                </a:solidFill>
-                <a:latin typeface="Segoe UI"/>
-              </a:rPr>
-              <a:t>FASE 2 · PATRONES</a:t>
-            </a:r>
-          </a:p>
-        </p:txBody>
-      </p:sp>
-      <p:sp>
-        <p:nvSpPr>
-          <p:cNvPr id="6" name="TextBox 5"/>
+            <a:pPr algn="l"/>
+            <a:r>
+              <a:rPr sz="1200" b="1">
+                <a:solidFill>
+                  <a:srgbClr val="1F4E79"/>
+                </a:solidFill>
+                <a:latin typeface="Segoe UI"/>
+              </a:rPr>
+              <a:t>API Gateway</a:t>
+            </a:r>
+          </a:p>
+        </p:txBody>
+      </p:sp>
+      <p:sp>
+        <p:nvSpPr>
+          <p:cNvPr id="11" name="TextBox 10"/>
           <p:cNvSpPr txBox="1"/>
           <p:nvPr/>
         </p:nvSpPr>
         <p:spPr>
           <a:xfrm>
-            <a:off x="502920" y="694944"/>
-            <a:ext cx="11155680" cy="914400"/>
+            <a:off x="3383280" y="2185416"/>
+            <a:ext cx="3703320" cy="658368"/>
           </a:xfrm>
           <a:prstGeom prst="rect">
             <a:avLst/>
@@ -7742,58 +7124,83 @@
           <a:noFill/>
         </p:spPr>
         <p:txBody>
-          <a:bodyPr wrap="square" anchor="t" lIns="0" rIns="0" tIns="0" bIns="0">
+          <a:bodyPr wrap="square" anchor="ctr" lIns="0" rIns="0" tIns="0" bIns="0">
             <a:spAutoFit/>
           </a:bodyPr>
           <a:lstStyle/>
           <a:p>
             <a:pPr algn="l">
-              <a:spcAft>
-                <a:spcPts val="200"/>
-              </a:spcAft>
+              <a:lnSpc>
+                <a:spcPct val="110000"/>
+              </a:lnSpc>
             </a:pPr>
             <a:r>
-              <a:rPr sz="2600" b="1">
-                <a:solidFill>
-                  <a:srgbClr val="0F172A"/>
-                </a:solidFill>
-                <a:latin typeface="Segoe UI"/>
-              </a:rPr>
-              <a:t>Patrones aplicados y su justificación</a:t>
-            </a:r>
-          </a:p>
-          <a:p>
-            <a:pPr algn="l"/>
-            <a:r>
-              <a:rPr sz="1400" b="0">
-                <a:solidFill>
-                  <a:srgbClr val="64748B"/>
-                </a:solidFill>
-                <a:latin typeface="Segoe UI"/>
-              </a:rPr>
-              <a:t>Cada patrón responde a un problema concreto del negocio — no se usa “porque sí”</a:t>
-            </a:r>
-          </a:p>
-        </p:txBody>
-      </p:sp>
-      <p:sp>
-        <p:nvSpPr>
-          <p:cNvPr id="7" name="Rounded Rectangle 6"/>
+              <a:rPr sz="1030" b="0">
+                <a:solidFill>
+                  <a:srgbClr val="404040"/>
+                </a:solidFill>
+                <a:latin typeface="Segoe UI"/>
+              </a:rPr>
+              <a:t>Punto único de entrada (Kong / Cloud Endpoints)</a:t>
+            </a:r>
+          </a:p>
+        </p:txBody>
+      </p:sp>
+      <p:sp>
+        <p:nvSpPr>
+          <p:cNvPr id="12" name="TextBox 11"/>
+          <p:cNvSpPr txBox="1"/>
+          <p:nvPr/>
+        </p:nvSpPr>
+        <p:spPr>
+          <a:xfrm>
+            <a:off x="7178040" y="2185416"/>
+            <a:ext cx="4206240" cy="658368"/>
+          </a:xfrm>
+          <a:prstGeom prst="rect">
+            <a:avLst/>
+          </a:prstGeom>
+          <a:noFill/>
+        </p:spPr>
+        <p:txBody>
+          <a:bodyPr wrap="square" anchor="ctr" lIns="0" rIns="0" tIns="0" bIns="0">
+            <a:spAutoFit/>
+          </a:bodyPr>
+          <a:lstStyle/>
+          <a:p>
+            <a:pPr algn="l">
+              <a:lnSpc>
+                <a:spcPct val="110000"/>
+              </a:lnSpc>
+            </a:pPr>
+            <a:r>
+              <a:rPr sz="1030" b="0">
+                <a:solidFill>
+                  <a:srgbClr val="404040"/>
+                </a:solidFill>
+                <a:latin typeface="Segoe UI"/>
+              </a:rPr>
+              <a:t>Centraliza JWT, rate limiting y versionado; oculta la topología interna.</a:t>
+            </a:r>
+          </a:p>
+        </p:txBody>
+      </p:sp>
+      <p:sp>
+        <p:nvSpPr>
+          <p:cNvPr id="13" name="Rectangle 12"/>
           <p:cNvSpPr/>
           <p:nvPr/>
         </p:nvSpPr>
         <p:spPr>
           <a:xfrm>
-            <a:off x="502920" y="1783080"/>
-            <a:ext cx="11183112" cy="384048"/>
-          </a:xfrm>
-          <a:prstGeom prst="roundRect">
-            <a:avLst>
-              <a:gd name="adj" fmla="val 4000"/>
-            </a:avLst>
+            <a:off x="640080" y="2843784"/>
+            <a:ext cx="10908792" cy="658368"/>
+          </a:xfrm>
+          <a:prstGeom prst="rect">
+            <a:avLst/>
           </a:prstGeom>
           <a:solidFill>
-            <a:srgbClr val="0F172A"/>
+            <a:srgbClr val="ECF0F3"/>
           </a:solidFill>
           <a:ln>
             <a:noFill/>
@@ -7824,130 +7231,23 @@
       </p:sp>
       <p:sp>
         <p:nvSpPr>
-          <p:cNvPr id="8" name="TextBox 7"/>
-          <p:cNvSpPr txBox="1"/>
-          <p:nvPr/>
-        </p:nvSpPr>
-        <p:spPr>
-          <a:xfrm>
-            <a:off x="685800" y="1783080"/>
-            <a:ext cx="2468880" cy="384048"/>
-          </a:xfrm>
-          <a:prstGeom prst="rect">
-            <a:avLst/>
-          </a:prstGeom>
-          <a:noFill/>
-        </p:spPr>
-        <p:txBody>
-          <a:bodyPr wrap="square" anchor="ctr" lIns="0" rIns="0" tIns="0" bIns="0">
-            <a:spAutoFit/>
-          </a:bodyPr>
-          <a:lstStyle/>
-          <a:p>
-            <a:pPr algn="l"/>
-            <a:r>
-              <a:rPr sz="1050" b="1">
-                <a:solidFill>
-                  <a:srgbClr val="FFFFFF"/>
-                </a:solidFill>
-                <a:latin typeface="Segoe UI"/>
-              </a:rPr>
-              <a:t>PATRÓN</a:t>
-            </a:r>
-          </a:p>
-        </p:txBody>
-      </p:sp>
-      <p:sp>
-        <p:nvSpPr>
-          <p:cNvPr id="9" name="TextBox 8"/>
-          <p:cNvSpPr txBox="1"/>
-          <p:nvPr/>
-        </p:nvSpPr>
-        <p:spPr>
-          <a:xfrm>
-            <a:off x="3246120" y="1783080"/>
-            <a:ext cx="3840480" cy="384048"/>
-          </a:xfrm>
-          <a:prstGeom prst="rect">
-            <a:avLst/>
-          </a:prstGeom>
-          <a:noFill/>
-        </p:spPr>
-        <p:txBody>
-          <a:bodyPr wrap="square" anchor="ctr" lIns="0" rIns="0" tIns="0" bIns="0">
-            <a:spAutoFit/>
-          </a:bodyPr>
-          <a:lstStyle/>
-          <a:p>
-            <a:pPr algn="l"/>
-            <a:r>
-              <a:rPr sz="1050" b="1">
-                <a:solidFill>
-                  <a:srgbClr val="FFFFFF"/>
-                </a:solidFill>
-                <a:latin typeface="Segoe UI"/>
-              </a:rPr>
-              <a:t>DÓNDE SE APLICA</a:t>
-            </a:r>
-          </a:p>
-        </p:txBody>
-      </p:sp>
-      <p:sp>
-        <p:nvSpPr>
-          <p:cNvPr id="10" name="TextBox 9"/>
-          <p:cNvSpPr txBox="1"/>
-          <p:nvPr/>
-        </p:nvSpPr>
-        <p:spPr>
-          <a:xfrm>
-            <a:off x="7223760" y="1783080"/>
-            <a:ext cx="4343400" cy="384048"/>
-          </a:xfrm>
-          <a:prstGeom prst="rect">
-            <a:avLst/>
-          </a:prstGeom>
-          <a:noFill/>
-        </p:spPr>
-        <p:txBody>
-          <a:bodyPr wrap="square" anchor="ctr" lIns="0" rIns="0" tIns="0" bIns="0">
-            <a:spAutoFit/>
-          </a:bodyPr>
-          <a:lstStyle/>
-          <a:p>
-            <a:pPr algn="l"/>
-            <a:r>
-              <a:rPr sz="1050" b="1">
-                <a:solidFill>
-                  <a:srgbClr val="FFFFFF"/>
-                </a:solidFill>
-                <a:latin typeface="Segoe UI"/>
-              </a:rPr>
-              <a:t>POR QUÉ</a:t>
-            </a:r>
-          </a:p>
-        </p:txBody>
-      </p:sp>
-      <p:sp>
-        <p:nvSpPr>
-          <p:cNvPr id="11" name="Rectangle 10"/>
+          <p:cNvPr id="14" name="Rectangle 13"/>
           <p:cNvSpPr/>
           <p:nvPr/>
         </p:nvSpPr>
         <p:spPr>
           <a:xfrm>
-            <a:off x="502920" y="2167128"/>
-            <a:ext cx="11183112" cy="676656"/>
+            <a:off x="640080" y="2843784"/>
+            <a:ext cx="54864" cy="658368"/>
           </a:xfrm>
           <a:prstGeom prst="rect">
             <a:avLst/>
           </a:prstGeom>
           <a:solidFill>
-            <a:srgbClr val="FFFFFF"/>
+            <a:srgbClr val="E8741E"/>
           </a:solidFill>
-          <a:ln w="9525">
-            <a:solidFill>
-              <a:srgbClr val="E2E8F0"/>
-            </a:solidFill>
+          <a:ln>
+            <a:noFill/>
           </a:ln>
           <a:effectLst/>
         </p:spPr>
@@ -7975,20 +7275,133 @@
       </p:sp>
       <p:sp>
         <p:nvSpPr>
-          <p:cNvPr id="12" name="Rectangle 11"/>
+          <p:cNvPr id="15" name="TextBox 14"/>
+          <p:cNvSpPr txBox="1"/>
+          <p:nvPr/>
+        </p:nvSpPr>
+        <p:spPr>
+          <a:xfrm>
+            <a:off x="841248" y="2843784"/>
+            <a:ext cx="2514600" cy="658368"/>
+          </a:xfrm>
+          <a:prstGeom prst="rect">
+            <a:avLst/>
+          </a:prstGeom>
+          <a:noFill/>
+        </p:spPr>
+        <p:txBody>
+          <a:bodyPr wrap="square" anchor="ctr" lIns="0" rIns="0" tIns="0" bIns="0">
+            <a:spAutoFit/>
+          </a:bodyPr>
+          <a:lstStyle/>
+          <a:p>
+            <a:pPr algn="l"/>
+            <a:r>
+              <a:rPr sz="1200" b="1">
+                <a:solidFill>
+                  <a:srgbClr val="1F4E79"/>
+                </a:solidFill>
+                <a:latin typeface="Segoe UI"/>
+              </a:rPr>
+              <a:t>Database per Service</a:t>
+            </a:r>
+          </a:p>
+        </p:txBody>
+      </p:sp>
+      <p:sp>
+        <p:nvSpPr>
+          <p:cNvPr id="16" name="TextBox 15"/>
+          <p:cNvSpPr txBox="1"/>
+          <p:nvPr/>
+        </p:nvSpPr>
+        <p:spPr>
+          <a:xfrm>
+            <a:off x="3383280" y="2843784"/>
+            <a:ext cx="3703320" cy="658368"/>
+          </a:xfrm>
+          <a:prstGeom prst="rect">
+            <a:avLst/>
+          </a:prstGeom>
+          <a:noFill/>
+        </p:spPr>
+        <p:txBody>
+          <a:bodyPr wrap="square" anchor="ctr" lIns="0" rIns="0" tIns="0" bIns="0">
+            <a:spAutoFit/>
+          </a:bodyPr>
+          <a:lstStyle/>
+          <a:p>
+            <a:pPr algn="l">
+              <a:lnSpc>
+                <a:spcPct val="110000"/>
+              </a:lnSpc>
+            </a:pPr>
+            <a:r>
+              <a:rPr sz="1030" b="0">
+                <a:solidFill>
+                  <a:srgbClr val="404040"/>
+                </a:solidFill>
+                <a:latin typeface="Segoe UI"/>
+              </a:rPr>
+              <a:t>Cada microservicio con su propia base</a:t>
+            </a:r>
+          </a:p>
+        </p:txBody>
+      </p:sp>
+      <p:sp>
+        <p:nvSpPr>
+          <p:cNvPr id="17" name="TextBox 16"/>
+          <p:cNvSpPr txBox="1"/>
+          <p:nvPr/>
+        </p:nvSpPr>
+        <p:spPr>
+          <a:xfrm>
+            <a:off x="7178040" y="2843784"/>
+            <a:ext cx="4206240" cy="658368"/>
+          </a:xfrm>
+          <a:prstGeom prst="rect">
+            <a:avLst/>
+          </a:prstGeom>
+          <a:noFill/>
+        </p:spPr>
+        <p:txBody>
+          <a:bodyPr wrap="square" anchor="ctr" lIns="0" rIns="0" tIns="0" bIns="0">
+            <a:spAutoFit/>
+          </a:bodyPr>
+          <a:lstStyle/>
+          <a:p>
+            <a:pPr algn="l">
+              <a:lnSpc>
+                <a:spcPct val="110000"/>
+              </a:lnSpc>
+            </a:pPr>
+            <a:r>
+              <a:rPr sz="1030" b="0">
+                <a:solidFill>
+                  <a:srgbClr val="404040"/>
+                </a:solidFill>
+                <a:latin typeface="Segoe UI"/>
+              </a:rPr>
+              <a:t>Autonomía de esquema y de despliegue; evita el acoplamiento por datos.</a:t>
+            </a:r>
+          </a:p>
+        </p:txBody>
+      </p:sp>
+      <p:sp>
+        <p:nvSpPr>
+          <p:cNvPr id="18" name="Rectangle 17"/>
           <p:cNvSpPr/>
           <p:nvPr/>
         </p:nvSpPr>
         <p:spPr>
           <a:xfrm>
-            <a:off x="502920" y="2167128"/>
-            <a:ext cx="64008" cy="676656"/>
+            <a:off x="640080" y="3502152"/>
+            <a:ext cx="10908792" cy="658368"/>
           </a:xfrm>
           <a:prstGeom prst="rect">
             <a:avLst/>
           </a:prstGeom>
           <a:solidFill>
-            <a:srgbClr val="D97706"/>
+            <a:srgbClr val="FFFFFF"/>
           </a:solidFill>
           <a:ln>
             <a:noFill/>
@@ -8019,14 +7432,58 @@
       </p:sp>
       <p:sp>
         <p:nvSpPr>
-          <p:cNvPr id="13" name="TextBox 12"/>
+          <p:cNvPr id="19" name="Rectangle 18"/>
+          <p:cNvSpPr/>
+          <p:nvPr/>
+        </p:nvSpPr>
+        <p:spPr>
+          <a:xfrm>
+            <a:off x="640080" y="3502152"/>
+            <a:ext cx="54864" cy="658368"/>
+          </a:xfrm>
+          <a:prstGeom prst="rect">
+            <a:avLst/>
+          </a:prstGeom>
+          <a:solidFill>
+            <a:srgbClr val="E8741E"/>
+          </a:solidFill>
+          <a:ln>
+            <a:noFill/>
+          </a:ln>
+          <a:effectLst/>
+        </p:spPr>
+        <p:style>
+          <a:lnRef idx="1">
+            <a:schemeClr val="accent1"/>
+          </a:lnRef>
+          <a:fillRef idx="3">
+            <a:schemeClr val="accent1"/>
+          </a:fillRef>
+          <a:effectRef idx="2">
+            <a:schemeClr val="accent1"/>
+          </a:effectRef>
+          <a:fontRef idx="minor">
+            <a:schemeClr val="lt1"/>
+          </a:fontRef>
+        </p:style>
+        <p:txBody>
+          <a:bodyPr rtlCol="0" anchor="ctr"/>
+          <a:lstStyle/>
+          <a:p>
+            <a:pPr algn="ctr"/>
+          </a:p>
+        </p:txBody>
+      </p:sp>
+      <p:sp>
+        <p:nvSpPr>
+          <p:cNvPr id="20" name="TextBox 19"/>
           <p:cNvSpPr txBox="1"/>
           <p:nvPr/>
         </p:nvSpPr>
         <p:spPr>
           <a:xfrm>
-            <a:off x="713232" y="2167128"/>
-            <a:ext cx="2468880" cy="676656"/>
+            <a:off x="841248" y="3502152"/>
+            <a:ext cx="2514600" cy="658368"/>
           </a:xfrm>
           <a:prstGeom prst="rect">
             <a:avLst/>
@@ -8043,25 +7500,25 @@
             <a:r>
               <a:rPr sz="1200" b="1">
                 <a:solidFill>
-                  <a:srgbClr val="D97706"/>
-                </a:solidFill>
-                <a:latin typeface="Segoe UI"/>
-              </a:rPr>
-              <a:t>API Gateway</a:t>
-            </a:r>
-          </a:p>
-        </p:txBody>
-      </p:sp>
-      <p:sp>
-        <p:nvSpPr>
-          <p:cNvPr id="14" name="TextBox 13"/>
+                  <a:srgbClr val="1F4E79"/>
+                </a:solidFill>
+                <a:latin typeface="Segoe UI"/>
+              </a:rPr>
+              <a:t>Pub/Sub (eventos)</a:t>
+            </a:r>
+          </a:p>
+        </p:txBody>
+      </p:sp>
+      <p:sp>
+        <p:nvSpPr>
+          <p:cNvPr id="21" name="TextBox 20"/>
           <p:cNvSpPr txBox="1"/>
           <p:nvPr/>
         </p:nvSpPr>
         <p:spPr>
           <a:xfrm>
-            <a:off x="3246120" y="2167128"/>
-            <a:ext cx="3840480" cy="676656"/>
+            <a:off x="3383280" y="3502152"/>
+            <a:ext cx="3703320" cy="658368"/>
           </a:xfrm>
           <a:prstGeom prst="rect">
             <a:avLst/>
@@ -8082,25 +7539,25 @@
             <a:r>
               <a:rPr sz="1030" b="0">
                 <a:solidFill>
-                  <a:srgbClr val="334155"/>
-                </a:solidFill>
-                <a:latin typeface="Segoe UI"/>
-              </a:rPr>
-              <a:t>Punto único de entrada (Kong / Cloud Endpoints)</a:t>
-            </a:r>
-          </a:p>
-        </p:txBody>
-      </p:sp>
-      <p:sp>
-        <p:nvSpPr>
-          <p:cNvPr id="15" name="TextBox 14"/>
+                  <a:srgbClr val="404040"/>
+                </a:solidFill>
+                <a:latin typeface="Segoe UI"/>
+              </a:rPr>
+              <a:t>Rutinas y Pagos publican; Notif./Analytics/Query suscriben</a:t>
+            </a:r>
+          </a:p>
+        </p:txBody>
+      </p:sp>
+      <p:sp>
+        <p:nvSpPr>
+          <p:cNvPr id="22" name="TextBox 21"/>
           <p:cNvSpPr txBox="1"/>
           <p:nvPr/>
         </p:nvSpPr>
         <p:spPr>
           <a:xfrm>
-            <a:off x="7223760" y="2167128"/>
-            <a:ext cx="4343400" cy="676656"/>
+            <a:off x="7178040" y="3502152"/>
+            <a:ext cx="4206240" cy="658368"/>
           </a:xfrm>
           <a:prstGeom prst="rect">
             <a:avLst/>
@@ -8121,36 +7578,34 @@
             <a:r>
               <a:rPr sz="1030" b="0">
                 <a:solidFill>
-                  <a:srgbClr val="334155"/>
-                </a:solidFill>
-                <a:latin typeface="Segoe UI"/>
-              </a:rPr>
-              <a:t>Centraliza JWT, rate limiting y versionado; los clientes no conocen la topología interna.</a:t>
-            </a:r>
-          </a:p>
-        </p:txBody>
-      </p:sp>
-      <p:sp>
-        <p:nvSpPr>
-          <p:cNvPr id="16" name="Rectangle 15"/>
+                  <a:srgbClr val="404040"/>
+                </a:solidFill>
+                <a:latin typeface="Segoe UI"/>
+              </a:rPr>
+              <a:t>Desacopla en el tiempo: una caída no se propaga; los eventos se reintentan.</a:t>
+            </a:r>
+          </a:p>
+        </p:txBody>
+      </p:sp>
+      <p:sp>
+        <p:nvSpPr>
+          <p:cNvPr id="23" name="Rectangle 22"/>
           <p:cNvSpPr/>
           <p:nvPr/>
         </p:nvSpPr>
         <p:spPr>
           <a:xfrm>
-            <a:off x="502920" y="2843784"/>
-            <a:ext cx="11183112" cy="676656"/>
+            <a:off x="640080" y="4160520"/>
+            <a:ext cx="10908792" cy="658368"/>
           </a:xfrm>
           <a:prstGeom prst="rect">
             <a:avLst/>
           </a:prstGeom>
           <a:solidFill>
-            <a:srgbClr val="F1F5F9"/>
+            <a:srgbClr val="ECF0F3"/>
           </a:solidFill>
-          <a:ln w="9525">
-            <a:solidFill>
-              <a:srgbClr val="E2E8F0"/>
-            </a:solidFill>
+          <a:ln>
+            <a:noFill/>
           </a:ln>
           <a:effectLst/>
         </p:spPr>
@@ -8178,20 +7633,20 @@
       </p:sp>
       <p:sp>
         <p:nvSpPr>
-          <p:cNvPr id="17" name="Rectangle 16"/>
+          <p:cNvPr id="24" name="Rectangle 23"/>
           <p:cNvSpPr/>
           <p:nvPr/>
         </p:nvSpPr>
         <p:spPr>
           <a:xfrm>
-            <a:off x="502920" y="2843784"/>
-            <a:ext cx="64008" cy="676656"/>
+            <a:off x="640080" y="4160520"/>
+            <a:ext cx="54864" cy="658368"/>
           </a:xfrm>
           <a:prstGeom prst="rect">
             <a:avLst/>
           </a:prstGeom>
           <a:solidFill>
-            <a:srgbClr val="475569"/>
+            <a:srgbClr val="E8741E"/>
           </a:solidFill>
           <a:ln>
             <a:noFill/>
@@ -8222,14 +7677,14 @@
       </p:sp>
       <p:sp>
         <p:nvSpPr>
-          <p:cNvPr id="18" name="TextBox 17"/>
+          <p:cNvPr id="25" name="TextBox 24"/>
           <p:cNvSpPr txBox="1"/>
           <p:nvPr/>
         </p:nvSpPr>
         <p:spPr>
           <a:xfrm>
-            <a:off x="713232" y="2843784"/>
-            <a:ext cx="2468880" cy="676656"/>
+            <a:off x="841248" y="4160520"/>
+            <a:ext cx="2514600" cy="658368"/>
           </a:xfrm>
           <a:prstGeom prst="rect">
             <a:avLst/>
@@ -8246,25 +7701,25 @@
             <a:r>
               <a:rPr sz="1200" b="1">
                 <a:solidFill>
-                  <a:srgbClr val="475569"/>
-                </a:solidFill>
-                <a:latin typeface="Segoe UI"/>
-              </a:rPr>
-              <a:t>Database per Service</a:t>
-            </a:r>
-          </a:p>
-        </p:txBody>
-      </p:sp>
-      <p:sp>
-        <p:nvSpPr>
-          <p:cNvPr id="19" name="TextBox 18"/>
+                  <a:srgbClr val="1F4E79"/>
+                </a:solidFill>
+                <a:latin typeface="Segoe UI"/>
+              </a:rPr>
+              <a:t>CQRS</a:t>
+            </a:r>
+          </a:p>
+        </p:txBody>
+      </p:sp>
+      <p:sp>
+        <p:nvSpPr>
+          <p:cNvPr id="26" name="TextBox 25"/>
           <p:cNvSpPr txBox="1"/>
           <p:nvPr/>
         </p:nvSpPr>
         <p:spPr>
           <a:xfrm>
-            <a:off x="3246120" y="2843784"/>
-            <a:ext cx="3840480" cy="676656"/>
+            <a:off x="3383280" y="4160520"/>
+            <a:ext cx="3703320" cy="658368"/>
           </a:xfrm>
           <a:prstGeom prst="rect">
             <a:avLst/>
@@ -8285,25 +7740,25 @@
             <a:r>
               <a:rPr sz="1030" b="0">
                 <a:solidFill>
-                  <a:srgbClr val="334155"/>
-                </a:solidFill>
-                <a:latin typeface="Segoe UI"/>
-              </a:rPr>
-              <a:t>Cada microservicio con su propia base</a:t>
-            </a:r>
-          </a:p>
-        </p:txBody>
-      </p:sp>
-      <p:sp>
-        <p:nvSpPr>
-          <p:cNvPr id="20" name="TextBox 19"/>
+                  <a:srgbClr val="404040"/>
+                </a:solidFill>
+                <a:latin typeface="Segoe UI"/>
+              </a:rPr>
+              <a:t>Escritura (Rutinas) vs. lectura (Query, vista materializada)</a:t>
+            </a:r>
+          </a:p>
+        </p:txBody>
+      </p:sp>
+      <p:sp>
+        <p:nvSpPr>
+          <p:cNvPr id="27" name="TextBox 26"/>
           <p:cNvSpPr txBox="1"/>
           <p:nvPr/>
         </p:nvSpPr>
         <p:spPr>
           <a:xfrm>
-            <a:off x="7223760" y="2843784"/>
-            <a:ext cx="4343400" cy="676656"/>
+            <a:off x="7178040" y="4160520"/>
+            <a:ext cx="4206240" cy="658368"/>
           </a:xfrm>
           <a:prstGeom prst="rect">
             <a:avLst/>
@@ -8324,25 +7779,25 @@
             <a:r>
               <a:rPr sz="1030" b="0">
                 <a:solidFill>
-                  <a:srgbClr val="334155"/>
-                </a:solidFill>
-                <a:latin typeface="Segoe UI"/>
-              </a:rPr>
-              <a:t>Autonomía de esquema y de despliegue; evita el acoplamiento por datos.</a:t>
-            </a:r>
-          </a:p>
-        </p:txBody>
-      </p:sp>
-      <p:sp>
-        <p:nvSpPr>
-          <p:cNvPr id="21" name="Rectangle 20"/>
+                  <a:srgbClr val="404040"/>
+                </a:solidFill>
+                <a:latin typeface="Segoe UI"/>
+              </a:rPr>
+              <a:t>Carga asimétrica: miles leen, pocos escriben. Se optimiza cada lado.</a:t>
+            </a:r>
+          </a:p>
+        </p:txBody>
+      </p:sp>
+      <p:sp>
+        <p:nvSpPr>
+          <p:cNvPr id="28" name="Rectangle 27"/>
           <p:cNvSpPr/>
           <p:nvPr/>
         </p:nvSpPr>
         <p:spPr>
           <a:xfrm>
-            <a:off x="502920" y="3520440"/>
-            <a:ext cx="11183112" cy="676656"/>
+            <a:off x="640080" y="4818888"/>
+            <a:ext cx="10908792" cy="658368"/>
           </a:xfrm>
           <a:prstGeom prst="rect">
             <a:avLst/>
@@ -8350,10 +7805,8 @@
           <a:solidFill>
             <a:srgbClr val="FFFFFF"/>
           </a:solidFill>
-          <a:ln w="9525">
-            <a:solidFill>
-              <a:srgbClr val="E2E8F0"/>
-            </a:solidFill>
+          <a:ln>
+            <a:noFill/>
           </a:ln>
           <a:effectLst/>
         </p:spPr>
@@ -8381,20 +7834,20 @@
       </p:sp>
       <p:sp>
         <p:nvSpPr>
-          <p:cNvPr id="22" name="Rectangle 21"/>
+          <p:cNvPr id="29" name="Rectangle 28"/>
           <p:cNvSpPr/>
           <p:nvPr/>
         </p:nvSpPr>
         <p:spPr>
           <a:xfrm>
-            <a:off x="502920" y="3520440"/>
-            <a:ext cx="64008" cy="676656"/>
+            <a:off x="640080" y="4818888"/>
+            <a:ext cx="54864" cy="658368"/>
           </a:xfrm>
           <a:prstGeom prst="rect">
             <a:avLst/>
           </a:prstGeom>
           <a:solidFill>
-            <a:srgbClr val="7C3AED"/>
+            <a:srgbClr val="E8741E"/>
           </a:solidFill>
           <a:ln>
             <a:noFill/>
@@ -8425,14 +7878,14 @@
       </p:sp>
       <p:sp>
         <p:nvSpPr>
-          <p:cNvPr id="23" name="TextBox 22"/>
+          <p:cNvPr id="30" name="TextBox 29"/>
           <p:cNvSpPr txBox="1"/>
           <p:nvPr/>
         </p:nvSpPr>
         <p:spPr>
           <a:xfrm>
-            <a:off x="713232" y="3520440"/>
-            <a:ext cx="2468880" cy="676656"/>
+            <a:off x="841248" y="4818888"/>
+            <a:ext cx="2514600" cy="658368"/>
           </a:xfrm>
           <a:prstGeom prst="rect">
             <a:avLst/>
@@ -8449,25 +7902,25 @@
             <a:r>
               <a:rPr sz="1200" b="1">
                 <a:solidFill>
-                  <a:srgbClr val="7C3AED"/>
-                </a:solidFill>
-                <a:latin typeface="Segoe UI"/>
-              </a:rPr>
-              <a:t>Pub/Sub (eventos)</a:t>
-            </a:r>
-          </a:p>
-        </p:txBody>
-      </p:sp>
-      <p:sp>
-        <p:nvSpPr>
-          <p:cNvPr id="24" name="TextBox 23"/>
+                  <a:srgbClr val="1F4E79"/>
+                </a:solidFill>
+                <a:latin typeface="Segoe UI"/>
+              </a:rPr>
+              <a:t>Saga (orquestada)</a:t>
+            </a:r>
+          </a:p>
+        </p:txBody>
+      </p:sp>
+      <p:sp>
+        <p:nvSpPr>
+          <p:cNvPr id="31" name="TextBox 30"/>
           <p:cNvSpPr txBox="1"/>
           <p:nvPr/>
         </p:nvSpPr>
         <p:spPr>
           <a:xfrm>
-            <a:off x="3246120" y="3520440"/>
-            <a:ext cx="3840480" cy="676656"/>
+            <a:off x="3383280" y="4818888"/>
+            <a:ext cx="3703320" cy="658368"/>
           </a:xfrm>
           <a:prstGeom prst="rect">
             <a:avLst/>
@@ -8488,25 +7941,25 @@
             <a:r>
               <a:rPr sz="1030" b="0">
                 <a:solidFill>
-                  <a:srgbClr val="334155"/>
-                </a:solidFill>
-                <a:latin typeface="Segoe UI"/>
-              </a:rPr>
-              <a:t>Rutinas y Pagos publican; Notif./Analytics/Query suscriben</a:t>
-            </a:r>
-          </a:p>
-        </p:txBody>
-      </p:sp>
-      <p:sp>
-        <p:nvSpPr>
-          <p:cNvPr id="25" name="TextBox 24"/>
+                  <a:srgbClr val="404040"/>
+                </a:solidFill>
+                <a:latin typeface="Segoe UI"/>
+              </a:rPr>
+              <a:t>Cobro: pago → confirmación → membresía → notificación</a:t>
+            </a:r>
+          </a:p>
+        </p:txBody>
+      </p:sp>
+      <p:sp>
+        <p:nvSpPr>
+          <p:cNvPr id="32" name="TextBox 31"/>
           <p:cNvSpPr txBox="1"/>
           <p:nvPr/>
         </p:nvSpPr>
         <p:spPr>
           <a:xfrm>
-            <a:off x="7223760" y="3520440"/>
-            <a:ext cx="4343400" cy="676656"/>
+            <a:off x="7178040" y="4818888"/>
+            <a:ext cx="4206240" cy="658368"/>
           </a:xfrm>
           <a:prstGeom prst="rect">
             <a:avLst/>
@@ -8527,36 +7980,34 @@
             <a:r>
               <a:rPr sz="1030" b="0">
                 <a:solidFill>
-                  <a:srgbClr val="334155"/>
-                </a:solidFill>
-                <a:latin typeface="Segoe UI"/>
-              </a:rPr>
-              <a:t>Desacopla en el tiempo: una caída no se propaga; los eventos se reintentan.</a:t>
-            </a:r>
-          </a:p>
-        </p:txBody>
-      </p:sp>
-      <p:sp>
-        <p:nvSpPr>
-          <p:cNvPr id="26" name="Rectangle 25"/>
+                  <a:srgbClr val="404040"/>
+                </a:solidFill>
+                <a:latin typeface="Segoe UI"/>
+              </a:rPr>
+              <a:t>Consistencia eventual con compensaciones (rollback), sin trans. distribuidas.</a:t>
+            </a:r>
+          </a:p>
+        </p:txBody>
+      </p:sp>
+      <p:sp>
+        <p:nvSpPr>
+          <p:cNvPr id="33" name="Rectangle 32"/>
           <p:cNvSpPr/>
           <p:nvPr/>
         </p:nvSpPr>
         <p:spPr>
           <a:xfrm>
-            <a:off x="502920" y="4197096"/>
-            <a:ext cx="11183112" cy="676656"/>
+            <a:off x="640080" y="5477255"/>
+            <a:ext cx="10908792" cy="658368"/>
           </a:xfrm>
           <a:prstGeom prst="rect">
             <a:avLst/>
           </a:prstGeom>
           <a:solidFill>
-            <a:srgbClr val="F1F5F9"/>
+            <a:srgbClr val="ECF0F3"/>
           </a:solidFill>
-          <a:ln w="9525">
-            <a:solidFill>
-              <a:srgbClr val="E2E8F0"/>
-            </a:solidFill>
+          <a:ln>
+            <a:noFill/>
           </a:ln>
           <a:effectLst/>
         </p:spPr>
@@ -8584,20 +8035,20 @@
       </p:sp>
       <p:sp>
         <p:nvSpPr>
-          <p:cNvPr id="27" name="Rectangle 26"/>
+          <p:cNvPr id="34" name="Rectangle 33"/>
           <p:cNvSpPr/>
           <p:nvPr/>
         </p:nvSpPr>
         <p:spPr>
           <a:xfrm>
-            <a:off x="502920" y="4197096"/>
-            <a:ext cx="64008" cy="676656"/>
+            <a:off x="640080" y="5477255"/>
+            <a:ext cx="54864" cy="658368"/>
           </a:xfrm>
           <a:prstGeom prst="rect">
             <a:avLst/>
           </a:prstGeom>
           <a:solidFill>
-            <a:srgbClr val="059669"/>
+            <a:srgbClr val="E8741E"/>
           </a:solidFill>
           <a:ln>
             <a:noFill/>
@@ -8628,14 +8079,14 @@
       </p:sp>
       <p:sp>
         <p:nvSpPr>
-          <p:cNvPr id="28" name="TextBox 27"/>
+          <p:cNvPr id="35" name="TextBox 34"/>
           <p:cNvSpPr txBox="1"/>
           <p:nvPr/>
         </p:nvSpPr>
         <p:spPr>
           <a:xfrm>
-            <a:off x="713232" y="4197096"/>
-            <a:ext cx="2468880" cy="676656"/>
+            <a:off x="841248" y="5477255"/>
+            <a:ext cx="2514600" cy="658368"/>
           </a:xfrm>
           <a:prstGeom prst="rect">
             <a:avLst/>
@@ -8652,25 +8103,25 @@
             <a:r>
               <a:rPr sz="1200" b="1">
                 <a:solidFill>
-                  <a:srgbClr val="059669"/>
-                </a:solidFill>
-                <a:latin typeface="Segoe UI"/>
-              </a:rPr>
-              <a:t>CQRS</a:t>
-            </a:r>
-          </a:p>
-        </p:txBody>
-      </p:sp>
-      <p:sp>
-        <p:nvSpPr>
-          <p:cNvPr id="29" name="TextBox 28"/>
+                  <a:srgbClr val="1F4E79"/>
+                </a:solidFill>
+                <a:latin typeface="Segoe UI"/>
+              </a:rPr>
+              <a:t>Circuit Breaker</a:t>
+            </a:r>
+          </a:p>
+        </p:txBody>
+      </p:sp>
+      <p:sp>
+        <p:nvSpPr>
+          <p:cNvPr id="36" name="TextBox 35"/>
           <p:cNvSpPr txBox="1"/>
           <p:nvPr/>
         </p:nvSpPr>
         <p:spPr>
           <a:xfrm>
-            <a:off x="3246120" y="4197096"/>
-            <a:ext cx="3840480" cy="676656"/>
+            <a:off x="3383280" y="5477255"/>
+            <a:ext cx="3703320" cy="658368"/>
           </a:xfrm>
           <a:prstGeom prst="rect">
             <a:avLst/>
@@ -8691,25 +8142,25 @@
             <a:r>
               <a:rPr sz="1030" b="0">
                 <a:solidFill>
-                  <a:srgbClr val="334155"/>
-                </a:solidFill>
-                <a:latin typeface="Segoe UI"/>
-              </a:rPr>
-              <a:t>Escritura (Rutinas) vs. lectura (Query, vista materializada)</a:t>
-            </a:r>
-          </a:p>
-        </p:txBody>
-      </p:sp>
-      <p:sp>
-        <p:nvSpPr>
-          <p:cNvPr id="30" name="TextBox 29"/>
+                  <a:srgbClr val="404040"/>
+                </a:solidFill>
+                <a:latin typeface="Segoe UI"/>
+              </a:rPr>
+              <a:t>Llamadas síncronas residuales (pasarela de pago externa)</a:t>
+            </a:r>
+          </a:p>
+        </p:txBody>
+      </p:sp>
+      <p:sp>
+        <p:nvSpPr>
+          <p:cNvPr id="37" name="TextBox 36"/>
           <p:cNvSpPr txBox="1"/>
           <p:nvPr/>
         </p:nvSpPr>
         <p:spPr>
           <a:xfrm>
-            <a:off x="7223760" y="4197096"/>
-            <a:ext cx="4343400" cy="676656"/>
+            <a:off x="7178040" y="5477255"/>
+            <a:ext cx="4206240" cy="658368"/>
           </a:xfrm>
           <a:prstGeom prst="rect">
             <a:avLst/>
@@ -8730,36 +8181,34 @@
             <a:r>
               <a:rPr sz="1030" b="0">
                 <a:solidFill>
-                  <a:srgbClr val="334155"/>
-                </a:solidFill>
-                <a:latin typeface="Segoe UI"/>
-              </a:rPr>
-              <a:t>Carga asimétrica: miles leen, pocos escriben. Se optimiza cada lado por separado.</a:t>
-            </a:r>
-          </a:p>
-        </p:txBody>
-      </p:sp>
-      <p:sp>
-        <p:nvSpPr>
-          <p:cNvPr id="31" name="Rectangle 30"/>
+                  <a:srgbClr val="404040"/>
+                </a:solidFill>
+                <a:latin typeface="Segoe UI"/>
+              </a:rPr>
+              <a:t>Evita el efecto dominó: ante fallos abre el circuito y responde fallback.</a:t>
+            </a:r>
+          </a:p>
+        </p:txBody>
+      </p:sp>
+      <p:sp>
+        <p:nvSpPr>
+          <p:cNvPr id="38" name="Rectangle 37"/>
           <p:cNvSpPr/>
           <p:nvPr/>
         </p:nvSpPr>
         <p:spPr>
           <a:xfrm>
-            <a:off x="502920" y="4873752"/>
-            <a:ext cx="11183112" cy="676656"/>
+            <a:off x="0" y="6739128"/>
+            <a:ext cx="12191695" cy="118872"/>
           </a:xfrm>
           <a:prstGeom prst="rect">
             <a:avLst/>
           </a:prstGeom>
           <a:solidFill>
-            <a:srgbClr val="FFFFFF"/>
+            <a:srgbClr val="E8741E"/>
           </a:solidFill>
-          <a:ln w="9525">
-            <a:solidFill>
-              <a:srgbClr val="E2E8F0"/>
-            </a:solidFill>
+          <a:ln>
+            <a:noFill/>
           </a:ln>
           <a:effectLst/>
         </p:spPr>
@@ -8787,418 +8236,14 @@
       </p:sp>
       <p:sp>
         <p:nvSpPr>
-          <p:cNvPr id="32" name="Rectangle 31"/>
-          <p:cNvSpPr/>
-          <p:nvPr/>
-        </p:nvSpPr>
-        <p:spPr>
-          <a:xfrm>
-            <a:off x="502920" y="4873752"/>
-            <a:ext cx="64008" cy="676656"/>
-          </a:xfrm>
-          <a:prstGeom prst="rect">
-            <a:avLst/>
-          </a:prstGeom>
-          <a:solidFill>
-            <a:srgbClr val="2563EB"/>
-          </a:solidFill>
-          <a:ln>
-            <a:noFill/>
-          </a:ln>
-          <a:effectLst/>
-        </p:spPr>
-        <p:style>
-          <a:lnRef idx="1">
-            <a:schemeClr val="accent1"/>
-          </a:lnRef>
-          <a:fillRef idx="3">
-            <a:schemeClr val="accent1"/>
-          </a:fillRef>
-          <a:effectRef idx="2">
-            <a:schemeClr val="accent1"/>
-          </a:effectRef>
-          <a:fontRef idx="minor">
-            <a:schemeClr val="lt1"/>
-          </a:fontRef>
-        </p:style>
-        <p:txBody>
-          <a:bodyPr rtlCol="0" anchor="ctr"/>
-          <a:lstStyle/>
-          <a:p>
-            <a:pPr algn="ctr"/>
-          </a:p>
-        </p:txBody>
-      </p:sp>
-      <p:sp>
-        <p:nvSpPr>
-          <p:cNvPr id="33" name="TextBox 32"/>
-          <p:cNvSpPr txBox="1"/>
-          <p:nvPr/>
-        </p:nvSpPr>
-        <p:spPr>
-          <a:xfrm>
-            <a:off x="713232" y="4873752"/>
-            <a:ext cx="2468880" cy="676656"/>
-          </a:xfrm>
-          <a:prstGeom prst="rect">
-            <a:avLst/>
-          </a:prstGeom>
-          <a:noFill/>
-        </p:spPr>
-        <p:txBody>
-          <a:bodyPr wrap="square" anchor="ctr" lIns="0" rIns="0" tIns="0" bIns="0">
-            <a:spAutoFit/>
-          </a:bodyPr>
-          <a:lstStyle/>
-          <a:p>
-            <a:pPr algn="l"/>
-            <a:r>
-              <a:rPr sz="1200" b="1">
-                <a:solidFill>
-                  <a:srgbClr val="2563EB"/>
-                </a:solidFill>
-                <a:latin typeface="Segoe UI"/>
-              </a:rPr>
-              <a:t>Saga (orquestada)</a:t>
-            </a:r>
-          </a:p>
-        </p:txBody>
-      </p:sp>
-      <p:sp>
-        <p:nvSpPr>
-          <p:cNvPr id="34" name="TextBox 33"/>
-          <p:cNvSpPr txBox="1"/>
-          <p:nvPr/>
-        </p:nvSpPr>
-        <p:spPr>
-          <a:xfrm>
-            <a:off x="3246120" y="4873752"/>
-            <a:ext cx="3840480" cy="676656"/>
-          </a:xfrm>
-          <a:prstGeom prst="rect">
-            <a:avLst/>
-          </a:prstGeom>
-          <a:noFill/>
-        </p:spPr>
-        <p:txBody>
-          <a:bodyPr wrap="square" anchor="ctr" lIns="0" rIns="0" tIns="0" bIns="0">
-            <a:spAutoFit/>
-          </a:bodyPr>
-          <a:lstStyle/>
-          <a:p>
-            <a:pPr algn="l">
-              <a:lnSpc>
-                <a:spcPct val="110000"/>
-              </a:lnSpc>
-            </a:pPr>
-            <a:r>
-              <a:rPr sz="1030" b="0">
-                <a:solidFill>
-                  <a:srgbClr val="334155"/>
-                </a:solidFill>
-                <a:latin typeface="Segoe UI"/>
-              </a:rPr>
-              <a:t>Cobro: pago → confirmación → membresía → notificación</a:t>
-            </a:r>
-          </a:p>
-        </p:txBody>
-      </p:sp>
-      <p:sp>
-        <p:nvSpPr>
-          <p:cNvPr id="35" name="TextBox 34"/>
-          <p:cNvSpPr txBox="1"/>
-          <p:nvPr/>
-        </p:nvSpPr>
-        <p:spPr>
-          <a:xfrm>
-            <a:off x="7223760" y="4873752"/>
-            <a:ext cx="4343400" cy="676656"/>
-          </a:xfrm>
-          <a:prstGeom prst="rect">
-            <a:avLst/>
-          </a:prstGeom>
-          <a:noFill/>
-        </p:spPr>
-        <p:txBody>
-          <a:bodyPr wrap="square" anchor="ctr" lIns="0" rIns="0" tIns="0" bIns="0">
-            <a:spAutoFit/>
-          </a:bodyPr>
-          <a:lstStyle/>
-          <a:p>
-            <a:pPr algn="l">
-              <a:lnSpc>
-                <a:spcPct val="110000"/>
-              </a:lnSpc>
-            </a:pPr>
-            <a:r>
-              <a:rPr sz="1030" b="0">
-                <a:solidFill>
-                  <a:srgbClr val="334155"/>
-                </a:solidFill>
-                <a:latin typeface="Segoe UI"/>
-              </a:rPr>
-              <a:t>Sin transacciones distribuidas: consistencia eventual con compensaciones (rollback).</a:t>
-            </a:r>
-          </a:p>
-        </p:txBody>
-      </p:sp>
-      <p:sp>
-        <p:nvSpPr>
-          <p:cNvPr id="36" name="Rectangle 35"/>
-          <p:cNvSpPr/>
-          <p:nvPr/>
-        </p:nvSpPr>
-        <p:spPr>
-          <a:xfrm>
-            <a:off x="502920" y="5550408"/>
-            <a:ext cx="11183112" cy="676656"/>
-          </a:xfrm>
-          <a:prstGeom prst="rect">
-            <a:avLst/>
-          </a:prstGeom>
-          <a:solidFill>
-            <a:srgbClr val="F1F5F9"/>
-          </a:solidFill>
-          <a:ln w="9525">
-            <a:solidFill>
-              <a:srgbClr val="E2E8F0"/>
-            </a:solidFill>
-          </a:ln>
-          <a:effectLst/>
-        </p:spPr>
-        <p:style>
-          <a:lnRef idx="1">
-            <a:schemeClr val="accent1"/>
-          </a:lnRef>
-          <a:fillRef idx="3">
-            <a:schemeClr val="accent1"/>
-          </a:fillRef>
-          <a:effectRef idx="2">
-            <a:schemeClr val="accent1"/>
-          </a:effectRef>
-          <a:fontRef idx="minor">
-            <a:schemeClr val="lt1"/>
-          </a:fontRef>
-        </p:style>
-        <p:txBody>
-          <a:bodyPr rtlCol="0" anchor="ctr"/>
-          <a:lstStyle/>
-          <a:p>
-            <a:pPr algn="ctr"/>
-          </a:p>
-        </p:txBody>
-      </p:sp>
-      <p:sp>
-        <p:nvSpPr>
-          <p:cNvPr id="37" name="Rectangle 36"/>
-          <p:cNvSpPr/>
-          <p:nvPr/>
-        </p:nvSpPr>
-        <p:spPr>
-          <a:xfrm>
-            <a:off x="502920" y="5550408"/>
-            <a:ext cx="64008" cy="676656"/>
-          </a:xfrm>
-          <a:prstGeom prst="rect">
-            <a:avLst/>
-          </a:prstGeom>
-          <a:solidFill>
-            <a:srgbClr val="DC2626"/>
-          </a:solidFill>
-          <a:ln>
-            <a:noFill/>
-          </a:ln>
-          <a:effectLst/>
-        </p:spPr>
-        <p:style>
-          <a:lnRef idx="1">
-            <a:schemeClr val="accent1"/>
-          </a:lnRef>
-          <a:fillRef idx="3">
-            <a:schemeClr val="accent1"/>
-          </a:fillRef>
-          <a:effectRef idx="2">
-            <a:schemeClr val="accent1"/>
-          </a:effectRef>
-          <a:fontRef idx="minor">
-            <a:schemeClr val="lt1"/>
-          </a:fontRef>
-        </p:style>
-        <p:txBody>
-          <a:bodyPr rtlCol="0" anchor="ctr"/>
-          <a:lstStyle/>
-          <a:p>
-            <a:pPr algn="ctr"/>
-          </a:p>
-        </p:txBody>
-      </p:sp>
-      <p:sp>
-        <p:nvSpPr>
-          <p:cNvPr id="38" name="TextBox 37"/>
-          <p:cNvSpPr txBox="1"/>
-          <p:nvPr/>
-        </p:nvSpPr>
-        <p:spPr>
-          <a:xfrm>
-            <a:off x="713232" y="5550408"/>
-            <a:ext cx="2468880" cy="676656"/>
-          </a:xfrm>
-          <a:prstGeom prst="rect">
-            <a:avLst/>
-          </a:prstGeom>
-          <a:noFill/>
-        </p:spPr>
-        <p:txBody>
-          <a:bodyPr wrap="square" anchor="ctr" lIns="0" rIns="0" tIns="0" bIns="0">
-            <a:spAutoFit/>
-          </a:bodyPr>
-          <a:lstStyle/>
-          <a:p>
-            <a:pPr algn="l"/>
-            <a:r>
-              <a:rPr sz="1200" b="1">
-                <a:solidFill>
-                  <a:srgbClr val="DC2626"/>
-                </a:solidFill>
-                <a:latin typeface="Segoe UI"/>
-              </a:rPr>
-              <a:t>Circuit Breaker</a:t>
-            </a:r>
-          </a:p>
-        </p:txBody>
-      </p:sp>
-      <p:sp>
-        <p:nvSpPr>
           <p:cNvPr id="39" name="TextBox 38"/>
           <p:cNvSpPr txBox="1"/>
           <p:nvPr/>
         </p:nvSpPr>
         <p:spPr>
           <a:xfrm>
-            <a:off x="3246120" y="5550408"/>
-            <a:ext cx="3840480" cy="676656"/>
-          </a:xfrm>
-          <a:prstGeom prst="rect">
-            <a:avLst/>
-          </a:prstGeom>
-          <a:noFill/>
-        </p:spPr>
-        <p:txBody>
-          <a:bodyPr wrap="square" anchor="ctr" lIns="0" rIns="0" tIns="0" bIns="0">
-            <a:spAutoFit/>
-          </a:bodyPr>
-          <a:lstStyle/>
-          <a:p>
-            <a:pPr algn="l">
-              <a:lnSpc>
-                <a:spcPct val="110000"/>
-              </a:lnSpc>
-            </a:pPr>
-            <a:r>
-              <a:rPr sz="1030" b="0">
-                <a:solidFill>
-                  <a:srgbClr val="334155"/>
-                </a:solidFill>
-                <a:latin typeface="Segoe UI"/>
-              </a:rPr>
-              <a:t>Llamadas síncronas residuales (pasarela de pago externa)</a:t>
-            </a:r>
-          </a:p>
-        </p:txBody>
-      </p:sp>
-      <p:sp>
-        <p:nvSpPr>
-          <p:cNvPr id="40" name="TextBox 39"/>
-          <p:cNvSpPr txBox="1"/>
-          <p:nvPr/>
-        </p:nvSpPr>
-        <p:spPr>
-          <a:xfrm>
-            <a:off x="7223760" y="5550408"/>
-            <a:ext cx="4343400" cy="676656"/>
-          </a:xfrm>
-          <a:prstGeom prst="rect">
-            <a:avLst/>
-          </a:prstGeom>
-          <a:noFill/>
-        </p:spPr>
-        <p:txBody>
-          <a:bodyPr wrap="square" anchor="ctr" lIns="0" rIns="0" tIns="0" bIns="0">
-            <a:spAutoFit/>
-          </a:bodyPr>
-          <a:lstStyle/>
-          <a:p>
-            <a:pPr algn="l">
-              <a:lnSpc>
-                <a:spcPct val="110000"/>
-              </a:lnSpc>
-            </a:pPr>
-            <a:r>
-              <a:rPr sz="1030" b="0">
-                <a:solidFill>
-                  <a:srgbClr val="334155"/>
-                </a:solidFill>
-                <a:latin typeface="Segoe UI"/>
-              </a:rPr>
-              <a:t>Evita el efecto dominó: ante fallos abre el circuito y responde con fallback.</a:t>
-            </a:r>
-          </a:p>
-        </p:txBody>
-      </p:sp>
-      <p:sp>
-        <p:nvSpPr>
-          <p:cNvPr id="41" name="Rectangle 40"/>
-          <p:cNvSpPr/>
-          <p:nvPr/>
-        </p:nvSpPr>
-        <p:spPr>
-          <a:xfrm>
-            <a:off x="502920" y="6437376"/>
-            <a:ext cx="11183112" cy="10972"/>
-          </a:xfrm>
-          <a:prstGeom prst="rect">
-            <a:avLst/>
-          </a:prstGeom>
-          <a:solidFill>
-            <a:srgbClr val="E2E8F0"/>
-          </a:solidFill>
-          <a:ln>
-            <a:noFill/>
-          </a:ln>
-          <a:effectLst/>
-        </p:spPr>
-        <p:style>
-          <a:lnRef idx="1">
-            <a:schemeClr val="accent1"/>
-          </a:lnRef>
-          <a:fillRef idx="3">
-            <a:schemeClr val="accent1"/>
-          </a:fillRef>
-          <a:effectRef idx="2">
-            <a:schemeClr val="accent1"/>
-          </a:effectRef>
-          <a:fontRef idx="minor">
-            <a:schemeClr val="lt1"/>
-          </a:fontRef>
-        </p:style>
-        <p:txBody>
-          <a:bodyPr rtlCol="0" anchor="ctr"/>
-          <a:lstStyle/>
-          <a:p>
-            <a:pPr algn="ctr"/>
-          </a:p>
-        </p:txBody>
-      </p:sp>
-      <p:sp>
-        <p:nvSpPr>
-          <p:cNvPr id="42" name="TextBox 41"/>
-          <p:cNvSpPr txBox="1"/>
-          <p:nvPr/>
-        </p:nvSpPr>
-        <p:spPr>
-          <a:xfrm>
-            <a:off x="502920" y="6492240"/>
-            <a:ext cx="7315200" cy="274320"/>
+            <a:off x="7315200" y="6437376"/>
+            <a:ext cx="4370832" cy="256032"/>
           </a:xfrm>
           <a:prstGeom prst="rect">
             <a:avLst/>
@@ -9211,50 +8256,15 @@
           </a:bodyPr>
           <a:lstStyle/>
           <a:p>
-            <a:pPr algn="l"/>
+            <a:pPr algn="r"/>
             <a:r>
               <a:rPr sz="950" b="0">
                 <a:solidFill>
-                  <a:srgbClr val="94A3B8"/>
-                </a:solidFill>
-                <a:latin typeface="Segoe UI"/>
-              </a:rPr>
-              <a:t>TrainerOS — TFI Desarrollo de Aplicaciones Web</a:t>
-            </a:r>
-          </a:p>
-        </p:txBody>
-      </p:sp>
-      <p:sp>
-        <p:nvSpPr>
-          <p:cNvPr id="43" name="TextBox 42"/>
-          <p:cNvSpPr txBox="1"/>
-          <p:nvPr/>
-        </p:nvSpPr>
-        <p:spPr>
-          <a:xfrm>
-            <a:off x="7315200" y="6492240"/>
-            <a:ext cx="4370832" cy="274320"/>
-          </a:xfrm>
-          <a:prstGeom prst="rect">
-            <a:avLst/>
-          </a:prstGeom>
-          <a:noFill/>
-        </p:spPr>
-        <p:txBody>
-          <a:bodyPr wrap="square" anchor="t" lIns="0" rIns="0" tIns="0" bIns="0">
-            <a:spAutoFit/>
-          </a:bodyPr>
-          <a:lstStyle/>
-          <a:p>
-            <a:pPr algn="r"/>
-            <a:r>
-              <a:rPr sz="950" b="1">
-                <a:solidFill>
-                  <a:srgbClr val="64748B"/>
-                </a:solidFill>
-                <a:latin typeface="Segoe UI"/>
-              </a:rPr>
-              <a:t>Expone: Lautaro Naglieri    ·    8 / 12</a:t>
+                  <a:srgbClr val="9AA6B2"/>
+                </a:solidFill>
+                <a:latin typeface="Segoe UI"/>
+              </a:rPr>
+              <a:t>8 / 12   ·   Expone: Lautaro Naglieri</a:t>
             </a:r>
           </a:p>
         </p:txBody>
@@ -9293,14 +8303,93 @@
         </p:blipFill>
         <p:spPr>
           <a:xfrm>
-            <a:off x="0" y="0"/>
-            <a:ext cx="12191695" cy="6858000"/>
+            <a:off x="228600" y="563321"/>
+            <a:ext cx="11731752" cy="5585052"/>
           </a:xfrm>
           <a:prstGeom prst="rect">
             <a:avLst/>
           </a:prstGeom>
         </p:spPr>
       </p:pic>
+      <p:sp>
+        <p:nvSpPr>
+          <p:cNvPr id="3" name="Rectangle 2"/>
+          <p:cNvSpPr/>
+          <p:nvPr/>
+        </p:nvSpPr>
+        <p:spPr>
+          <a:xfrm>
+            <a:off x="0" y="6739128"/>
+            <a:ext cx="12191695" cy="118872"/>
+          </a:xfrm>
+          <a:prstGeom prst="rect">
+            <a:avLst/>
+          </a:prstGeom>
+          <a:solidFill>
+            <a:srgbClr val="E8741E"/>
+          </a:solidFill>
+          <a:ln>
+            <a:noFill/>
+          </a:ln>
+          <a:effectLst/>
+        </p:spPr>
+        <p:style>
+          <a:lnRef idx="1">
+            <a:schemeClr val="accent1"/>
+          </a:lnRef>
+          <a:fillRef idx="3">
+            <a:schemeClr val="accent1"/>
+          </a:fillRef>
+          <a:effectRef idx="2">
+            <a:schemeClr val="accent1"/>
+          </a:effectRef>
+          <a:fontRef idx="minor">
+            <a:schemeClr val="lt1"/>
+          </a:fontRef>
+        </p:style>
+        <p:txBody>
+          <a:bodyPr rtlCol="0" anchor="ctr"/>
+          <a:lstStyle/>
+          <a:p>
+            <a:pPr algn="ctr"/>
+          </a:p>
+        </p:txBody>
+      </p:sp>
+      <p:sp>
+        <p:nvSpPr>
+          <p:cNvPr id="4" name="TextBox 3"/>
+          <p:cNvSpPr txBox="1"/>
+          <p:nvPr/>
+        </p:nvSpPr>
+        <p:spPr>
+          <a:xfrm>
+            <a:off x="7315200" y="6437376"/>
+            <a:ext cx="4370832" cy="256032"/>
+          </a:xfrm>
+          <a:prstGeom prst="rect">
+            <a:avLst/>
+          </a:prstGeom>
+          <a:noFill/>
+        </p:spPr>
+        <p:txBody>
+          <a:bodyPr wrap="square" anchor="t" lIns="0" rIns="0" tIns="0" bIns="0">
+            <a:spAutoFit/>
+          </a:bodyPr>
+          <a:lstStyle/>
+          <a:p>
+            <a:pPr algn="r"/>
+            <a:r>
+              <a:rPr sz="950" b="0">
+                <a:solidFill>
+                  <a:srgbClr val="9AA6B2"/>
+                </a:solidFill>
+                <a:latin typeface="Segoe UI"/>
+              </a:rPr>
+              <a:t/>
+            </a:r>
+          </a:p>
+        </p:txBody>
+      </p:sp>
     </p:spTree>
   </p:cSld>
   <p:clrMapOvr>

--- a/Presentacion/TrainerOS_TFI_Fase1-2.pptx
+++ b/Presentacion/TrainerOS_TFI_Fase1-2.pptx
@@ -3358,7 +3358,7 @@
                 </a:solidFill>
                 <a:latin typeface="Segoe UI"/>
               </a:rPr>
-              <a:t>TFI · Desarrollo de Aplicaciones Web · Equipo MMP-SOFTWARE</a:t>
+              <a:t>TFI · Desarrollo de Aplicaciones Web · Grupo VOX</a:t>
             </a:r>
           </a:p>
           <a:p>
@@ -6539,8 +6539,8 @@
         </p:blipFill>
         <p:spPr>
           <a:xfrm>
-            <a:off x="228600" y="467695"/>
-            <a:ext cx="11731752" cy="5776305"/>
+            <a:off x="228600" y="568337"/>
+            <a:ext cx="11731752" cy="5575021"/>
           </a:xfrm>
           <a:prstGeom prst="rect">
             <a:avLst/>
